--- a/decks/study-smarter-not-longer-lesson-v2.pptx
+++ b/decks/study-smarter-not-longer-lesson-v2.pptx
@@ -19,6 +19,7 @@
     <p:sldId id="267" r:id="rId19"/>
     <p:sldId id="268" r:id="rId20"/>
     <p:sldId id="269" r:id="rId21"/>
+    <p:sldId id="270" r:id="rId22"/>
   </p:sldIdLst>
   <p:sldSz cx="12192000" cy="6858000" type="screen4x3"/>
   <p:notesSz cx="6858000" cy="9144000"/>
@@ -515,7 +516,7 @@
           <a:lstStyle/>
           <a:p>
             <a:r>
-              <a:t>This page and the next three are hidden. They stay in the deck for you and are skipped when you present.</a:t>
+              <a:t>This page is hidden and skipped when you present. The full plan, care notes and research are on the hidden pages at the end of the deck, if you want them.</a:t>
             </a:r>
           </a:p>
         </p:txBody>
@@ -656,6 +657,76 @@
           <a:p>
             <a:r>
               <a:t>4 MINUTES. Collect anonymously, or let students keep it as a reminder. Before they go, name when to ask for more help: using good methods and still struggling in a class; reading, writing or focusing taking much longer than it seems to take others; school stress taking over evenings, sleep or mood. Teachers, the learning specialist and counselors can help. Share the BVR Diner link on the slide (post it on your class page too). It has the methods, the ten-day plan, a private check-in and who to talk to.</a:t>
+            </a:r>
+          </a:p>
+        </p:txBody>
+      </p:sp>
+      <p:sp>
+        <p:nvSpPr>
+          <p:cNvPr id="4" name="Slide Number Placeholder 3"/>
+          <p:cNvSpPr>
+            <a:spLocks noGrp="1"/>
+          </p:cNvSpPr>
+          <p:nvPr>
+            <p:ph type="sldNum" idx="5" sz="quarter"/>
+          </p:nvPr>
+        </p:nvSpPr>
+        <p:spPr/>
+      </p:sp>
+    </p:spTree>
+  </p:cSld>
+  <p:clrMapOvr>
+    <a:masterClrMapping/>
+  </p:clrMapOvr>
+</p:notes>
+</file>
+
+<file path=ppt/notesSlides/notesSlide12.xml><?xml version="1.0" encoding="utf-8"?>
+<p:notes xmlns:a="http://schemas.openxmlformats.org/drawingml/2006/main" xmlns:p="http://schemas.openxmlformats.org/presentationml/2006/main" xmlns:r="http://schemas.openxmlformats.org/officeDocument/2006/relationships">
+  <p:cSld>
+    <p:spTree>
+      <p:nvGrpSpPr>
+        <p:cNvPr id="1" name=""/>
+        <p:cNvGrpSpPr/>
+        <p:nvPr/>
+      </p:nvGrpSpPr>
+      <p:grpSpPr>
+        <a:xfrm>
+          <a:off x="0" y="0"/>
+          <a:ext cx="0" cy="0"/>
+          <a:chOff x="0" y="0"/>
+          <a:chExt cx="0" cy="0"/>
+        </a:xfrm>
+      </p:grpSpPr>
+      <p:sp>
+        <p:nvSpPr>
+          <p:cNvPr id="2" name="Slide Image Placeholder 1"/>
+          <p:cNvSpPr>
+            <a:spLocks noGrp="1"/>
+          </p:cNvSpPr>
+          <p:nvPr>
+            <p:ph type="sldImg" idx="2"/>
+          </p:nvPr>
+        </p:nvSpPr>
+        <p:spPr/>
+      </p:sp>
+      <p:sp>
+        <p:nvSpPr>
+          <p:cNvPr id="3" name="Notes Placeholder 2"/>
+          <p:cNvSpPr>
+            <a:spLocks noGrp="1"/>
+          </p:cNvSpPr>
+          <p:nvPr>
+            <p:ph type="body" idx="3" sz="quarter"/>
+          </p:nvPr>
+        </p:nvSpPr>
+        <p:spPr/>
+        <p:txBody>
+          <a:bodyPr/>
+          <a:lstStyle/>
+          <a:p>
+            <a:r>
+              <a:t>If you want more: this page and the next three are hidden and skipped when you present.</a:t>
             </a:r>
           </a:p>
         </p:txBody>
@@ -4307,7 +4378,7 @@
                 </a:solidFill>
                 <a:latin typeface="Inter Tight"/>
               </a:rPr>
-              <a:t>TEACHER PAGE  ·  skipped when you present  ·  Lesson plan</a:t>
+              <a:t>TEACHER PAGE  ·  skipped when you present  ·  Before you start</a:t>
             </a:r>
           </a:p>
         </p:txBody>
@@ -4398,8 +4469,8 @@
         </p:nvSpPr>
         <p:spPr>
           <a:xfrm>
-            <a:off x="548640" y="1828800"/>
-            <a:ext cx="5120640" cy="4389120"/>
+            <a:off x="548640" y="2011680"/>
+            <a:ext cx="11064240" cy="4206240"/>
           </a:xfrm>
           <a:prstGeom prst="rect">
             <a:avLst/>
@@ -4414,43 +4485,43 @@
           <a:p>
             <a:pPr algn="l">
               <a:spcAft>
-                <a:spcPts val="675"/>
-              </a:spcAft>
-            </a:pPr>
-            <a:r>
-              <a:rPr sz="1100" b="1" i="0">
+                <a:spcPts val="810"/>
+              </a:spcAft>
+            </a:pPr>
+            <a:r>
+              <a:rPr sz="1200" b="1" i="0">
                 <a:solidFill>
                   <a:srgbClr val="0B2D5B"/>
                 </a:solidFill>
                 <a:latin typeface="Inter Tight"/>
               </a:rPr>
-              <a:t>GOAL</a:t>
-            </a:r>
-          </a:p>
-          <a:p>
-            <a:pPr algn="l">
-              <a:spcAft>
-                <a:spcPts val="675"/>
-              </a:spcAft>
-            </a:pPr>
-            <a:r>
-              <a:rPr sz="1500" b="0" i="0">
+              <a:t>BEFORE YOU START</a:t>
+            </a:r>
+          </a:p>
+          <a:p>
+            <a:pPr algn="l">
+              <a:spcAft>
+                <a:spcPts val="810"/>
+              </a:spcAft>
+            </a:pPr>
+            <a:r>
+              <a:rPr sz="1800" b="0" i="0">
                 <a:solidFill>
                   <a:srgbClr val="1C1B19"/>
                 </a:solidFill>
                 <a:latin typeface="Source Serif 4"/>
               </a:rPr>
-              <a:t>Students can explain why rereading feels like studying but holds up worst (familiar isn't the same as knowing), use three methods that work (quiz yourself, space it out, mix it up), and sketch a spaced plan for a real test coming up. The aim is a better method. Nobody should leave thinking they're bad at school.</a:t>
-            </a:r>
-          </a:p>
-          <a:p>
-            <a:pPr algn="l">
-              <a:spcAft>
-                <a:spcPts val="675"/>
-              </a:spcAft>
-            </a:pPr>
-            <a:r>
-              <a:rPr sz="1500" b="0" i="0">
+              <a:t>Students learn why rereading feels like studying but holds up worst, and three methods that work: quiz yourself, space it out, mix it up. Bring blank paper for the brain dump, frame everything as a method problem and never a smarts problem, and keep scores private.</a:t>
+            </a:r>
+          </a:p>
+          <a:p>
+            <a:pPr algn="l">
+              <a:spcAft>
+                <a:spcPts val="810"/>
+              </a:spcAft>
+            </a:pPr>
+            <a:r>
+              <a:rPr sz="1800" b="0" i="0">
                 <a:solidFill>
                   <a:srgbClr val="1C1B19"/>
                 </a:solidFill>
@@ -4462,321 +4533,75 @@
           <a:p>
             <a:pPr algn="l">
               <a:spcAft>
-                <a:spcPts val="675"/>
-              </a:spcAft>
-            </a:pPr>
-            <a:r>
-              <a:rPr sz="1100" b="1" i="0">
+                <a:spcPts val="810"/>
+              </a:spcAft>
+            </a:pPr>
+            <a:r>
+              <a:rPr sz="1200" b="1" i="0">
                 <a:solidFill>
                   <a:srgbClr val="0B2D5B"/>
                 </a:solidFill>
                 <a:latin typeface="Inter Tight"/>
               </a:rPr>
-              <a:t>MATERIALS</a:t>
-            </a:r>
-          </a:p>
-          <a:p>
-            <a:pPr algn="l">
-              <a:spcAft>
-                <a:spcPts val="675"/>
-              </a:spcAft>
-            </a:pPr>
-            <a:r>
-              <a:rPr sz="1500" b="0" i="0">
+              <a:t>EVERY STUDENT IN THE ROOM</a:t>
+            </a:r>
+          </a:p>
+          <a:p>
+            <a:pPr algn="l">
+              <a:spcAft>
+                <a:spcPts val="810"/>
+              </a:spcAft>
+            </a:pPr>
+            <a:r>
+              <a:rPr sz="1800" b="0" i="0">
                 <a:solidFill>
                   <a:srgbClr val="1C1B19"/>
                 </a:solidFill>
                 <a:latin typeface="Source Serif 4"/>
               </a:rPr>
-              <a:t>Blank paper for the brain dump, one sheet per student</a:t>
-            </a:r>
-          </a:p>
-          <a:p>
-            <a:pPr algn="l">
-              <a:spcAft>
-                <a:spcPts val="675"/>
-              </a:spcAft>
-            </a:pPr>
-            <a:r>
-              <a:rPr sz="1500" b="0" i="0">
+              <a:t>The brain dump can be typed, spoken, drawn or written in any language, and "who quizzes you" can be a sibling, a friend on a call, or flashcards, since not every student has a parent home or a quiet room.</a:t>
+            </a:r>
+          </a:p>
+          <a:p>
+            <a:pPr algn="l">
+              <a:spcAft>
+                <a:spcPts val="810"/>
+              </a:spcAft>
+            </a:pPr>
+            <a:r>
+              <a:rPr sz="1800" b="0" i="0">
                 <a:solidFill>
                   <a:srgbClr val="1C1B19"/>
                 </a:solidFill>
                 <a:latin typeface="Source Serif 4"/>
               </a:rPr>
-              <a:t>Index cards for the opening guess and the exit card</a:t>
-            </a:r>
-          </a:p>
-          <a:p>
-            <a:pPr algn="l">
-              <a:spcAft>
-                <a:spcPts val="675"/>
-              </a:spcAft>
-            </a:pPr>
-            <a:r>
-              <a:rPr sz="1500" b="0" i="0">
-                <a:solidFill>
-                  <a:srgbClr val="1C1B19"/>
-                </a:solidFill>
-                <a:latin typeface="Source Serif 4"/>
-              </a:rPr>
-              <a:t>The BVR Diner page link (last slide) to share after class</a:t>
-            </a:r>
-          </a:p>
-        </p:txBody>
-      </p:sp>
-      <p:sp>
-        <p:nvSpPr>
-          <p:cNvPr id="7" name="TextBox 6"/>
-          <p:cNvSpPr txBox="1"/>
-          <p:nvPr/>
-        </p:nvSpPr>
-        <p:spPr>
-          <a:xfrm>
-            <a:off x="6126480" y="1828800"/>
-            <a:ext cx="5486400" cy="4389120"/>
-          </a:xfrm>
-          <a:prstGeom prst="rect">
-            <a:avLst/>
-          </a:prstGeom>
-          <a:noFill/>
-        </p:spPr>
-        <p:txBody>
-          <a:bodyPr wrap="square" anchor="t" lIns="0" rIns="0" tIns="0" bIns="0">
-            <a:spAutoFit/>
-          </a:bodyPr>
-          <a:lstStyle/>
-          <a:p>
-            <a:pPr algn="l">
-              <a:spcAft>
-                <a:spcPts val="630"/>
-              </a:spcAft>
-            </a:pPr>
-            <a:r>
-              <a:rPr sz="1100" b="1" i="0">
+              <a:t/>
+            </a:r>
+          </a:p>
+          <a:p>
+            <a:pPr algn="l">
+              <a:spcAft>
+                <a:spcPts val="810"/>
+              </a:spcAft>
+            </a:pPr>
+            <a:r>
+              <a:rPr sz="1200" b="1" i="0">
                 <a:solidFill>
                   <a:srgbClr val="0B2D5B"/>
                 </a:solidFill>
                 <a:latin typeface="Inter Tight"/>
               </a:rPr>
-              <a:t>FLOW</a:t>
-            </a:r>
-          </a:p>
-          <a:p>
-            <a:pPr algn="l">
-              <a:spcAft>
-                <a:spcPts val="630"/>
-              </a:spcAft>
-            </a:pPr>
-            <a:r>
-              <a:rPr sz="1300" b="1" i="0">
-                <a:solidFill>
-                  <a:srgbClr val="F47B20"/>
-                </a:solidFill>
-                <a:latin typeface="Inter Tight"/>
-              </a:rPr>
-              <a:t>5 min   </a:t>
-            </a:r>
-            <a:r>
-              <a:rPr sz="1400" b="0" i="0">
-                <a:solidFill>
-                  <a:srgbClr val="1C1B19"/>
-                </a:solidFill>
-                <a:latin typeface="Source Serif 4"/>
-              </a:rPr>
-              <a:t>Myth or fact (stand up, sit down)</a:t>
-            </a:r>
-          </a:p>
-          <a:p>
-            <a:pPr algn="l">
-              <a:spcAft>
-                <a:spcPts val="630"/>
-              </a:spcAft>
-            </a:pPr>
-            <a:r>
-              <a:rPr sz="1300" b="1" i="0">
-                <a:solidFill>
-                  <a:srgbClr val="F47B20"/>
-                </a:solidFill>
-                <a:latin typeface="Inter Tight"/>
-              </a:rPr>
-              <a:t>8 min   </a:t>
-            </a:r>
-            <a:r>
-              <a:rPr sz="1400" b="0" i="0">
-                <a:solidFill>
-                  <a:srgbClr val="1C1B19"/>
-                </a:solidFill>
-                <a:latin typeface="Source Serif 4"/>
-              </a:rPr>
-              <a:t>The rereading experiment (predict, then see)</a:t>
-            </a:r>
-          </a:p>
-          <a:p>
-            <a:pPr algn="l">
-              <a:spcAft>
-                <a:spcPts val="630"/>
-              </a:spcAft>
-            </a:pPr>
-            <a:r>
-              <a:rPr sz="1300" b="1" i="0">
-                <a:solidFill>
-                  <a:srgbClr val="F47B20"/>
-                </a:solidFill>
-                <a:latin typeface="Inter Tight"/>
-              </a:rPr>
-              <a:t>5 min   </a:t>
-            </a:r>
-            <a:r>
-              <a:rPr sz="1400" b="0" i="0">
-                <a:solidFill>
-                  <a:srgbClr val="1C1B19"/>
-                </a:solidFill>
-                <a:latin typeface="Source Serif 4"/>
-              </a:rPr>
-              <a:t>Mixed practice: worse in the moment, better on the test</a:t>
-            </a:r>
-          </a:p>
-          <a:p>
-            <a:pPr algn="l">
-              <a:spcAft>
-                <a:spcPts val="630"/>
-              </a:spcAft>
-            </a:pPr>
-            <a:r>
-              <a:rPr sz="1300" b="1" i="0">
-                <a:solidFill>
-                  <a:srgbClr val="F47B20"/>
-                </a:solidFill>
-                <a:latin typeface="Inter Tight"/>
-              </a:rPr>
-              <a:t>8 min   </a:t>
-            </a:r>
-            <a:r>
-              <a:rPr sz="1400" b="0" i="0">
-                <a:solidFill>
-                  <a:srgbClr val="1C1B19"/>
-                </a:solidFill>
-                <a:latin typeface="Source Serif 4"/>
-              </a:rPr>
-              <a:t>Brain dump (private, no notes)</a:t>
-            </a:r>
-          </a:p>
-          <a:p>
-            <a:pPr algn="l">
-              <a:spcAft>
-                <a:spcPts val="630"/>
-              </a:spcAft>
-            </a:pPr>
-            <a:r>
-              <a:rPr sz="1300" b="1" i="0">
-                <a:solidFill>
-                  <a:srgbClr val="F47B20"/>
-                </a:solidFill>
-                <a:latin typeface="Inter Tight"/>
-              </a:rPr>
-              <a:t>9 min   </a:t>
-            </a:r>
-            <a:r>
-              <a:rPr sz="1400" b="0" i="0">
-                <a:solidFill>
-                  <a:srgbClr val="1C1B19"/>
-                </a:solidFill>
-                <a:latin typeface="Source Serif 4"/>
-              </a:rPr>
-              <a:t>Three study plans (small groups)</a:t>
-            </a:r>
-          </a:p>
-          <a:p>
-            <a:pPr algn="l">
-              <a:spcAft>
-                <a:spcPts val="630"/>
-              </a:spcAft>
-            </a:pPr>
-            <a:r>
-              <a:rPr sz="1300" b="1" i="0">
-                <a:solidFill>
-                  <a:srgbClr val="F47B20"/>
-                </a:solidFill>
-                <a:latin typeface="Inter Tight"/>
-              </a:rPr>
-              <a:t>6 min   </a:t>
-            </a:r>
-            <a:r>
-              <a:rPr sz="1400" b="0" i="0">
-                <a:solidFill>
-                  <a:srgbClr val="1C1B19"/>
-                </a:solidFill>
-                <a:latin typeface="Source Serif 4"/>
-              </a:rPr>
-              <a:t>A ten-day plan for a real test (pair-share)</a:t>
-            </a:r>
-          </a:p>
-          <a:p>
-            <a:pPr algn="l">
-              <a:spcAft>
-                <a:spcPts val="630"/>
-              </a:spcAft>
-            </a:pPr>
-            <a:r>
-              <a:rPr sz="1300" b="1" i="0">
-                <a:solidFill>
-                  <a:srgbClr val="F47B20"/>
-                </a:solidFill>
-                <a:latin typeface="Inter Tight"/>
-              </a:rPr>
-              <a:t>4 min   </a:t>
-            </a:r>
-            <a:r>
-              <a:rPr sz="1400" b="0" i="0">
-                <a:solidFill>
-                  <a:srgbClr val="1C1B19"/>
-                </a:solidFill>
-                <a:latin typeface="Source Serif 4"/>
-              </a:rPr>
-              <a:t>Exit card and the BVR Diner link</a:t>
-            </a:r>
-          </a:p>
-          <a:p>
-            <a:pPr algn="l">
-              <a:spcAft>
-                <a:spcPts val="630"/>
-              </a:spcAft>
-            </a:pPr>
-            <a:r>
-              <a:rPr sz="1400" b="0" i="0">
-                <a:solidFill>
-                  <a:srgbClr val="1C1B19"/>
-                </a:solidFill>
-                <a:latin typeface="Source Serif 4"/>
-              </a:rPr>
-              <a:t/>
-            </a:r>
-          </a:p>
-          <a:p>
-            <a:pPr algn="l">
-              <a:spcAft>
-                <a:spcPts val="630"/>
-              </a:spcAft>
-            </a:pPr>
-            <a:r>
-              <a:rPr sz="1100" b="1" i="0">
-                <a:solidFill>
-                  <a:srgbClr val="0B2D5B"/>
-                </a:solidFill>
-                <a:latin typeface="Inter Tight"/>
-              </a:rPr>
               <a:t>SHORT ON TIME (20-MINUTE ADVISORY)</a:t>
             </a:r>
           </a:p>
           <a:p>
             <a:pPr algn="l">
               <a:spcAft>
-                <a:spcPts val="630"/>
-              </a:spcAft>
-            </a:pPr>
-            <a:r>
-              <a:rPr sz="1400" b="0" i="0">
+                <a:spcPts val="810"/>
+              </a:spcAft>
+            </a:pPr>
+            <a:r>
+              <a:rPr sz="1800" b="0" i="0">
                 <a:solidFill>
                   <a:srgbClr val="1C1B19"/>
                 </a:solidFill>
@@ -4891,7 +4716,7 @@
                 </a:solidFill>
                 <a:latin typeface="Inter Tight"/>
               </a:rPr>
-              <a:t>MIXING IT UP</a:t>
+              <a:t>PLAN IT OUT</a:t>
             </a:r>
           </a:p>
         </p:txBody>
@@ -4944,7 +4769,7 @@
         <p:spPr>
           <a:xfrm>
             <a:off x="822960" y="1005840"/>
-            <a:ext cx="10515600" cy="914400"/>
+            <a:ext cx="10515600" cy="1097280"/>
           </a:xfrm>
           <a:prstGeom prst="rect">
             <a:avLst/>
@@ -4959,77 +4784,31 @@
           <a:p>
             <a:pPr algn="l">
               <a:spcAft>
-                <a:spcPts val="1530"/>
-              </a:spcAft>
-            </a:pPr>
-            <a:r>
-              <a:rPr sz="3400" b="1" i="0">
+                <a:spcPts val="1620"/>
+              </a:spcAft>
+            </a:pPr>
+            <a:r>
+              <a:rPr sz="3600" b="1" i="0">
                 <a:solidFill>
                   <a:srgbClr val="1C1B19"/>
                 </a:solidFill>
                 <a:latin typeface="Source Serif 4"/>
               </a:rPr>
-              <a:t>Practice that feels worse, results that are better</a:t>
-            </a:r>
-          </a:p>
-        </p:txBody>
-      </p:sp>
-      <p:sp>
-        <p:nvSpPr>
-          <p:cNvPr id="6" name="Rectangle 5"/>
-          <p:cNvSpPr/>
-          <p:nvPr/>
-        </p:nvSpPr>
-        <p:spPr>
-          <a:xfrm>
-            <a:off x="822960" y="2103120"/>
-            <a:ext cx="5120640" cy="3931920"/>
-          </a:xfrm>
-          <a:prstGeom prst="rect">
-            <a:avLst/>
-          </a:prstGeom>
-          <a:solidFill>
-            <a:srgbClr val="FFFFFF"/>
-          </a:solidFill>
-          <a:ln w="15875">
-            <a:solidFill>
-              <a:srgbClr val="D8D2C6"/>
-            </a:solidFill>
-          </a:ln>
-          <a:effectLst/>
-        </p:spPr>
-        <p:style>
-          <a:lnRef idx="1">
-            <a:schemeClr val="accent1"/>
-          </a:lnRef>
-          <a:fillRef idx="3">
-            <a:schemeClr val="accent1"/>
-          </a:fillRef>
-          <a:effectRef idx="2">
-            <a:schemeClr val="accent1"/>
-          </a:effectRef>
-          <a:fontRef idx="minor">
-            <a:schemeClr val="lt1"/>
-          </a:fontRef>
-        </p:style>
-        <p:txBody>
-          <a:bodyPr rtlCol="0" anchor="ctr"/>
-          <a:lstStyle/>
-          <a:p>
-            <a:pPr algn="ctr"/>
-          </a:p>
-        </p:txBody>
-      </p:sp>
-      <p:sp>
-        <p:nvSpPr>
-          <p:cNvPr id="7" name="TextBox 6"/>
+              <a:t>A ten-day plan for a real test</a:t>
+            </a:r>
+          </a:p>
+        </p:txBody>
+      </p:sp>
+      <p:sp>
+        <p:nvSpPr>
+          <p:cNvPr id="6" name="TextBox 5"/>
           <p:cNvSpPr txBox="1"/>
           <p:nvPr/>
         </p:nvSpPr>
         <p:spPr>
           <a:xfrm>
-            <a:off x="1097280" y="2286000"/>
-            <a:ext cx="4572000" cy="457200"/>
+            <a:off x="822960" y="2057400"/>
+            <a:ext cx="548640" cy="804672"/>
           </a:xfrm>
           <a:prstGeom prst="rect">
             <a:avLst/>
@@ -5044,31 +4823,31 @@
           <a:p>
             <a:pPr algn="l">
               <a:spcAft>
-                <a:spcPts val="585"/>
-              </a:spcAft>
-            </a:pPr>
-            <a:r>
-              <a:rPr sz="1300" b="1" i="0">
-                <a:solidFill>
-                  <a:srgbClr val="0B2D5B"/>
-                </a:solidFill>
-                <a:latin typeface="Inter Tight"/>
-              </a:rPr>
-              <a:t>ONE TYPE AT A TIME</a:t>
-            </a:r>
-          </a:p>
-        </p:txBody>
-      </p:sp>
-      <p:sp>
-        <p:nvSpPr>
-          <p:cNvPr id="8" name="TextBox 7"/>
+                <a:spcPts val="1170"/>
+              </a:spcAft>
+            </a:pPr>
+            <a:r>
+              <a:rPr sz="2600" b="1" i="0">
+                <a:solidFill>
+                  <a:srgbClr val="F47B20"/>
+                </a:solidFill>
+                <a:latin typeface="Source Serif 4"/>
+              </a:rPr>
+              <a:t>•</a:t>
+            </a:r>
+          </a:p>
+        </p:txBody>
+      </p:sp>
+      <p:sp>
+        <p:nvSpPr>
+          <p:cNvPr id="7" name="TextBox 6"/>
           <p:cNvSpPr txBox="1"/>
           <p:nvPr/>
         </p:nvSpPr>
         <p:spPr>
           <a:xfrm>
-            <a:off x="1097280" y="2788920"/>
-            <a:ext cx="4572000" cy="3108960"/>
+            <a:off x="1463040" y="2093976"/>
+            <a:ext cx="9875520" cy="804672"/>
           </a:xfrm>
           <a:prstGeom prst="rect">
             <a:avLst/>
@@ -5083,125 +4862,47 @@
           <a:p>
             <a:pPr algn="l">
               <a:spcAft>
-                <a:spcPts val="855"/>
-              </a:spcAft>
-            </a:pPr>
-            <a:r>
-              <a:rPr sz="1900" b="0" i="0">
+                <a:spcPts val="945"/>
+              </a:spcAft>
+            </a:pPr>
+            <a:r>
+              <a:rPr sz="2100" b="1" i="0">
                 <a:solidFill>
                   <a:srgbClr val="1C1B19"/>
                 </a:solidFill>
                 <a:latin typeface="Source Serif 4"/>
               </a:rPr>
-              <a:t>89% right during practice</a:t>
-            </a:r>
-          </a:p>
-          <a:p>
-            <a:pPr algn="l">
-              <a:spcAft>
-                <a:spcPts val="855"/>
-              </a:spcAft>
-            </a:pPr>
-            <a:r>
-              <a:rPr sz="1900" b="0" i="0">
-                <a:solidFill>
-                  <a:srgbClr val="1C1B19"/>
-                </a:solidFill>
-                <a:latin typeface="Source Serif 4"/>
-              </a:rPr>
-              <a:t>20% on the test a week later</a:t>
-            </a:r>
-          </a:p>
-          <a:p>
-            <a:pPr algn="l">
-              <a:spcAft>
-                <a:spcPts val="855"/>
-              </a:spcAft>
-            </a:pPr>
-            <a:r>
-              <a:rPr sz="1900" b="0" i="0">
-                <a:solidFill>
-                  <a:srgbClr val="1C1B19"/>
-                </a:solidFill>
-                <a:latin typeface="Source Serif 4"/>
-              </a:rPr>
-              <a:t>You know the method before you start</a:t>
-            </a:r>
-          </a:p>
-          <a:p>
-            <a:pPr algn="l">
-              <a:spcAft>
-                <a:spcPts val="855"/>
-              </a:spcAft>
-            </a:pPr>
-            <a:r>
-              <a:rPr sz="1900" b="0" i="0">
-                <a:solidFill>
-                  <a:srgbClr val="1C1B19"/>
-                </a:solidFill>
-                <a:latin typeface="Source Serif 4"/>
-              </a:rPr>
-              <a:t>Feels smooth</a:t>
-            </a:r>
-          </a:p>
-        </p:txBody>
-      </p:sp>
-      <p:sp>
-        <p:nvSpPr>
-          <p:cNvPr id="9" name="Rectangle 8"/>
-          <p:cNvSpPr/>
-          <p:nvPr/>
-        </p:nvSpPr>
-        <p:spPr>
-          <a:xfrm>
-            <a:off x="6309360" y="2103120"/>
-            <a:ext cx="5120640" cy="3931920"/>
-          </a:xfrm>
-          <a:prstGeom prst="rect">
-            <a:avLst/>
-          </a:prstGeom>
-          <a:solidFill>
-            <a:srgbClr val="FFFFFF"/>
-          </a:solidFill>
-          <a:ln w="15875">
-            <a:solidFill>
-              <a:srgbClr val="D8D2C6"/>
-            </a:solidFill>
-          </a:ln>
-          <a:effectLst/>
-        </p:spPr>
-        <p:style>
-          <a:lnRef idx="1">
-            <a:schemeClr val="accent1"/>
-          </a:lnRef>
-          <a:fillRef idx="3">
-            <a:schemeClr val="accent1"/>
-          </a:fillRef>
-          <a:effectRef idx="2">
-            <a:schemeClr val="accent1"/>
-          </a:effectRef>
-          <a:fontRef idx="minor">
-            <a:schemeClr val="lt1"/>
-          </a:fontRef>
-        </p:style>
-        <p:txBody>
-          <a:bodyPr rtlCol="0" anchor="ctr"/>
-          <a:lstStyle/>
-          <a:p>
-            <a:pPr algn="ctr"/>
-          </a:p>
-        </p:txBody>
-      </p:sp>
-      <p:sp>
-        <p:nvSpPr>
-          <p:cNvPr id="10" name="TextBox 9"/>
+              <a:t>Day 1: learn it.</a:t>
+            </a:r>
+          </a:p>
+          <a:p>
+            <a:pPr algn="l">
+              <a:spcAft>
+                <a:spcPts val="945"/>
+              </a:spcAft>
+            </a:pPr>
+            <a:r>
+              <a:rPr sz="1600" b="0" i="0">
+                <a:solidFill>
+                  <a:srgbClr val="5D5A54"/>
+                </a:solidFill>
+                <a:latin typeface="Source Serif 4"/>
+              </a:rPr>
+              <a:t>End with a brain dump.</a:t>
+            </a:r>
+          </a:p>
+        </p:txBody>
+      </p:sp>
+      <p:sp>
+        <p:nvSpPr>
+          <p:cNvPr id="8" name="TextBox 7"/>
           <p:cNvSpPr txBox="1"/>
           <p:nvPr/>
         </p:nvSpPr>
         <p:spPr>
           <a:xfrm>
-            <a:off x="6583680" y="2286000"/>
-            <a:ext cx="4572000" cy="457200"/>
+            <a:off x="822960" y="2862072"/>
+            <a:ext cx="548640" cy="804672"/>
           </a:xfrm>
           <a:prstGeom prst="rect">
             <a:avLst/>
@@ -5216,31 +4917,31 @@
           <a:p>
             <a:pPr algn="l">
               <a:spcAft>
-                <a:spcPts val="585"/>
-              </a:spcAft>
-            </a:pPr>
-            <a:r>
-              <a:rPr sz="1300" b="1" i="0">
-                <a:solidFill>
-                  <a:srgbClr val="0B2D5B"/>
-                </a:solidFill>
-                <a:latin typeface="Inter Tight"/>
-              </a:rPr>
-              <a:t>MIXED UP</a:t>
-            </a:r>
-          </a:p>
-        </p:txBody>
-      </p:sp>
-      <p:sp>
-        <p:nvSpPr>
-          <p:cNvPr id="11" name="TextBox 10"/>
+                <a:spcPts val="1170"/>
+              </a:spcAft>
+            </a:pPr>
+            <a:r>
+              <a:rPr sz="2600" b="1" i="0">
+                <a:solidFill>
+                  <a:srgbClr val="F47B20"/>
+                </a:solidFill>
+                <a:latin typeface="Source Serif 4"/>
+              </a:rPr>
+              <a:t>•</a:t>
+            </a:r>
+          </a:p>
+        </p:txBody>
+      </p:sp>
+      <p:sp>
+        <p:nvSpPr>
+          <p:cNvPr id="9" name="TextBox 8"/>
           <p:cNvSpPr txBox="1"/>
           <p:nvPr/>
         </p:nvSpPr>
         <p:spPr>
           <a:xfrm>
-            <a:off x="6583680" y="2788920"/>
-            <a:ext cx="4572000" cy="3108960"/>
+            <a:off x="1463040" y="2898648"/>
+            <a:ext cx="9875520" cy="804672"/>
           </a:xfrm>
           <a:prstGeom prst="rect">
             <a:avLst/>
@@ -5255,65 +4956,315 @@
           <a:p>
             <a:pPr algn="l">
               <a:spcAft>
-                <a:spcPts val="855"/>
-              </a:spcAft>
-            </a:pPr>
-            <a:r>
-              <a:rPr sz="1900" b="0" i="0">
+                <a:spcPts val="945"/>
+              </a:spcAft>
+            </a:pPr>
+            <a:r>
+              <a:rPr sz="2100" b="1" i="0">
                 <a:solidFill>
                   <a:srgbClr val="1C1B19"/>
                 </a:solidFill>
                 <a:latin typeface="Source Serif 4"/>
               </a:rPr>
-              <a:t>60% right during practice</a:t>
-            </a:r>
-          </a:p>
-          <a:p>
-            <a:pPr algn="l">
-              <a:spcAft>
-                <a:spcPts val="855"/>
-              </a:spcAft>
-            </a:pPr>
-            <a:r>
-              <a:rPr sz="1900" b="0" i="0">
+              <a:t>Day 3: practice from memory.</a:t>
+            </a:r>
+          </a:p>
+          <a:p>
+            <a:pPr algn="l">
+              <a:spcAft>
+                <a:spcPts val="945"/>
+              </a:spcAft>
+            </a:pPr>
+            <a:r>
+              <a:rPr sz="1600" b="0" i="0">
+                <a:solidFill>
+                  <a:srgbClr val="5D5A54"/>
+                </a:solidFill>
+                <a:latin typeface="Source Serif 4"/>
+              </a:rPr>
+              <a:t>Then check your answers.</a:t>
+            </a:r>
+          </a:p>
+        </p:txBody>
+      </p:sp>
+      <p:sp>
+        <p:nvSpPr>
+          <p:cNvPr id="10" name="TextBox 9"/>
+          <p:cNvSpPr txBox="1"/>
+          <p:nvPr/>
+        </p:nvSpPr>
+        <p:spPr>
+          <a:xfrm>
+            <a:off x="822960" y="3666744"/>
+            <a:ext cx="548640" cy="804672"/>
+          </a:xfrm>
+          <a:prstGeom prst="rect">
+            <a:avLst/>
+          </a:prstGeom>
+          <a:noFill/>
+        </p:spPr>
+        <p:txBody>
+          <a:bodyPr wrap="square" anchor="t" lIns="0" rIns="0" tIns="0" bIns="0">
+            <a:spAutoFit/>
+          </a:bodyPr>
+          <a:lstStyle/>
+          <a:p>
+            <a:pPr algn="l">
+              <a:spcAft>
+                <a:spcPts val="1170"/>
+              </a:spcAft>
+            </a:pPr>
+            <a:r>
+              <a:rPr sz="2600" b="1" i="0">
+                <a:solidFill>
+                  <a:srgbClr val="F47B20"/>
+                </a:solidFill>
+                <a:latin typeface="Source Serif 4"/>
+              </a:rPr>
+              <a:t>•</a:t>
+            </a:r>
+          </a:p>
+        </p:txBody>
+      </p:sp>
+      <p:sp>
+        <p:nvSpPr>
+          <p:cNvPr id="11" name="TextBox 10"/>
+          <p:cNvSpPr txBox="1"/>
+          <p:nvPr/>
+        </p:nvSpPr>
+        <p:spPr>
+          <a:xfrm>
+            <a:off x="1463040" y="3703320"/>
+            <a:ext cx="9875520" cy="804672"/>
+          </a:xfrm>
+          <a:prstGeom prst="rect">
+            <a:avLst/>
+          </a:prstGeom>
+          <a:noFill/>
+        </p:spPr>
+        <p:txBody>
+          <a:bodyPr wrap="square" anchor="t" lIns="0" rIns="0" tIns="0" bIns="0">
+            <a:spAutoFit/>
+          </a:bodyPr>
+          <a:lstStyle/>
+          <a:p>
+            <a:pPr algn="l">
+              <a:spcAft>
+                <a:spcPts val="945"/>
+              </a:spcAft>
+            </a:pPr>
+            <a:r>
+              <a:rPr sz="2100" b="1" i="0">
                 <a:solidFill>
                   <a:srgbClr val="1C1B19"/>
                 </a:solidFill>
                 <a:latin typeface="Source Serif 4"/>
               </a:rPr>
-              <a:t>63% on the test a week later</a:t>
-            </a:r>
-          </a:p>
-          <a:p>
-            <a:pPr algn="l">
-              <a:spcAft>
-                <a:spcPts val="855"/>
-              </a:spcAft>
-            </a:pPr>
-            <a:r>
-              <a:rPr sz="1900" b="0" i="0">
+              <a:t>Day 6: mixed practice test.</a:t>
+            </a:r>
+          </a:p>
+          <a:p>
+            <a:pPr algn="l">
+              <a:spcAft>
+                <a:spcPts val="945"/>
+              </a:spcAft>
+            </a:pPr>
+            <a:r>
+              <a:rPr sz="1600" b="0" i="0">
+                <a:solidFill>
+                  <a:srgbClr val="5D5A54"/>
+                </a:solidFill>
+                <a:latin typeface="Source Serif 4"/>
+              </a:rPr>
+              <a:t>Include last unit. Mark what you missed.</a:t>
+            </a:r>
+          </a:p>
+        </p:txBody>
+      </p:sp>
+      <p:sp>
+        <p:nvSpPr>
+          <p:cNvPr id="12" name="TextBox 11"/>
+          <p:cNvSpPr txBox="1"/>
+          <p:nvPr/>
+        </p:nvSpPr>
+        <p:spPr>
+          <a:xfrm>
+            <a:off x="822960" y="4471416"/>
+            <a:ext cx="548640" cy="804672"/>
+          </a:xfrm>
+          <a:prstGeom prst="rect">
+            <a:avLst/>
+          </a:prstGeom>
+          <a:noFill/>
+        </p:spPr>
+        <p:txBody>
+          <a:bodyPr wrap="square" anchor="t" lIns="0" rIns="0" tIns="0" bIns="0">
+            <a:spAutoFit/>
+          </a:bodyPr>
+          <a:lstStyle/>
+          <a:p>
+            <a:pPr algn="l">
+              <a:spcAft>
+                <a:spcPts val="1170"/>
+              </a:spcAft>
+            </a:pPr>
+            <a:r>
+              <a:rPr sz="2600" b="1" i="0">
+                <a:solidFill>
+                  <a:srgbClr val="F47B20"/>
+                </a:solidFill>
+                <a:latin typeface="Source Serif 4"/>
+              </a:rPr>
+              <a:t>•</a:t>
+            </a:r>
+          </a:p>
+        </p:txBody>
+      </p:sp>
+      <p:sp>
+        <p:nvSpPr>
+          <p:cNvPr id="13" name="TextBox 12"/>
+          <p:cNvSpPr txBox="1"/>
+          <p:nvPr/>
+        </p:nvSpPr>
+        <p:spPr>
+          <a:xfrm>
+            <a:off x="1463040" y="4507992"/>
+            <a:ext cx="9875520" cy="804672"/>
+          </a:xfrm>
+          <a:prstGeom prst="rect">
+            <a:avLst/>
+          </a:prstGeom>
+          <a:noFill/>
+        </p:spPr>
+        <p:txBody>
+          <a:bodyPr wrap="square" anchor="t" lIns="0" rIns="0" tIns="0" bIns="0">
+            <a:spAutoFit/>
+          </a:bodyPr>
+          <a:lstStyle/>
+          <a:p>
+            <a:pPr algn="l">
+              <a:spcAft>
+                <a:spcPts val="945"/>
+              </a:spcAft>
+            </a:pPr>
+            <a:r>
+              <a:rPr sz="2100" b="1" i="0">
                 <a:solidFill>
                   <a:srgbClr val="1C1B19"/>
                 </a:solidFill>
                 <a:latin typeface="Source Serif 4"/>
               </a:rPr>
-              <a:t>You have to pick the method</a:t>
-            </a:r>
-          </a:p>
-          <a:p>
-            <a:pPr algn="l">
-              <a:spcAft>
-                <a:spcPts val="855"/>
-              </a:spcAft>
-            </a:pPr>
-            <a:r>
-              <a:rPr sz="1900" b="0" i="0">
+              <a:t>Day 8: only what you missed.</a:t>
+            </a:r>
+          </a:p>
+          <a:p>
+            <a:pPr algn="l">
+              <a:spcAft>
+                <a:spcPts val="945"/>
+              </a:spcAft>
+            </a:pPr>
+            <a:r>
+              <a:rPr sz="1600" b="0" i="0">
+                <a:solidFill>
+                  <a:srgbClr val="5D5A54"/>
+                </a:solidFill>
+                <a:latin typeface="Source Serif 4"/>
+              </a:rPr>
+              <a:t>From memory, not rereading.</a:t>
+            </a:r>
+          </a:p>
+        </p:txBody>
+      </p:sp>
+      <p:sp>
+        <p:nvSpPr>
+          <p:cNvPr id="14" name="TextBox 13"/>
+          <p:cNvSpPr txBox="1"/>
+          <p:nvPr/>
+        </p:nvSpPr>
+        <p:spPr>
+          <a:xfrm>
+            <a:off x="822960" y="5276088"/>
+            <a:ext cx="548640" cy="804672"/>
+          </a:xfrm>
+          <a:prstGeom prst="rect">
+            <a:avLst/>
+          </a:prstGeom>
+          <a:noFill/>
+        </p:spPr>
+        <p:txBody>
+          <a:bodyPr wrap="square" anchor="t" lIns="0" rIns="0" tIns="0" bIns="0">
+            <a:spAutoFit/>
+          </a:bodyPr>
+          <a:lstStyle/>
+          <a:p>
+            <a:pPr algn="l">
+              <a:spcAft>
+                <a:spcPts val="1170"/>
+              </a:spcAft>
+            </a:pPr>
+            <a:r>
+              <a:rPr sz="2600" b="1" i="0">
+                <a:solidFill>
+                  <a:srgbClr val="F47B20"/>
+                </a:solidFill>
+                <a:latin typeface="Source Serif 4"/>
+              </a:rPr>
+              <a:t>•</a:t>
+            </a:r>
+          </a:p>
+        </p:txBody>
+      </p:sp>
+      <p:sp>
+        <p:nvSpPr>
+          <p:cNvPr id="15" name="TextBox 14"/>
+          <p:cNvSpPr txBox="1"/>
+          <p:nvPr/>
+        </p:nvSpPr>
+        <p:spPr>
+          <a:xfrm>
+            <a:off x="1463040" y="5312664"/>
+            <a:ext cx="9875520" cy="804672"/>
+          </a:xfrm>
+          <a:prstGeom prst="rect">
+            <a:avLst/>
+          </a:prstGeom>
+          <a:noFill/>
+        </p:spPr>
+        <p:txBody>
+          <a:bodyPr wrap="square" anchor="t" lIns="0" rIns="0" tIns="0" bIns="0">
+            <a:spAutoFit/>
+          </a:bodyPr>
+          <a:lstStyle/>
+          <a:p>
+            <a:pPr algn="l">
+              <a:spcAft>
+                <a:spcPts val="945"/>
+              </a:spcAft>
+            </a:pPr>
+            <a:r>
+              <a:rPr sz="2100" b="1" i="0">
                 <a:solidFill>
                   <a:srgbClr val="1C1B19"/>
                 </a:solidFill>
                 <a:latin typeface="Source Serif 4"/>
               </a:rPr>
-              <a:t>Feels clumsy</a:t>
+              <a:t>Day 9: short quiz, then sleep.</a:t>
+            </a:r>
+          </a:p>
+          <a:p>
+            <a:pPr algn="l">
+              <a:spcAft>
+                <a:spcPts val="945"/>
+              </a:spcAft>
+            </a:pPr>
+            <a:r>
+              <a:rPr sz="1600" b="0" i="0">
+                <a:solidFill>
+                  <a:srgbClr val="5D5A54"/>
+                </a:solidFill>
+                <a:latin typeface="Source Serif 4"/>
+              </a:rPr>
+              <a:t>No all-nighter.</a:t>
             </a:r>
           </a:p>
         </p:txBody>
@@ -5422,7 +5373,7 @@
                 </a:solidFill>
                 <a:latin typeface="Inter Tight"/>
               </a:rPr>
-              <a:t>TRY IT</a:t>
+              <a:t>BEFORE YOU GO</a:t>
             </a:r>
           </a:p>
         </p:txBody>
@@ -5468,23 +5419,103 @@
       </p:sp>
       <p:sp>
         <p:nvSpPr>
-          <p:cNvPr id="5" name="Rectangle 4"/>
+          <p:cNvPr id="5" name="TextBox 4"/>
+          <p:cNvSpPr txBox="1"/>
+          <p:nvPr/>
+        </p:nvSpPr>
+        <p:spPr>
+          <a:xfrm>
+            <a:off x="822960" y="1188720"/>
+            <a:ext cx="10515600" cy="914400"/>
+          </a:xfrm>
+          <a:prstGeom prst="rect">
+            <a:avLst/>
+          </a:prstGeom>
+          <a:noFill/>
+        </p:spPr>
+        <p:txBody>
+          <a:bodyPr wrap="square" anchor="t" lIns="0" rIns="0" tIns="0" bIns="0">
+            <a:spAutoFit/>
+          </a:bodyPr>
+          <a:lstStyle/>
+          <a:p>
+            <a:pPr algn="l">
+              <a:spcAft>
+                <a:spcPts val="1620"/>
+              </a:spcAft>
+            </a:pPr>
+            <a:r>
+              <a:rPr sz="3600" b="1" i="0">
+                <a:solidFill>
+                  <a:srgbClr val="1C1B19"/>
+                </a:solidFill>
+                <a:latin typeface="Source Serif 4"/>
+              </a:rPr>
+              <a:t>Exit card</a:t>
+            </a:r>
+          </a:p>
+        </p:txBody>
+      </p:sp>
+      <p:sp>
+        <p:nvSpPr>
+          <p:cNvPr id="6" name="TextBox 5"/>
+          <p:cNvSpPr txBox="1"/>
+          <p:nvPr/>
+        </p:nvSpPr>
+        <p:spPr>
+          <a:xfrm>
+            <a:off x="822960" y="2286000"/>
+            <a:ext cx="10515600" cy="1463040"/>
+          </a:xfrm>
+          <a:prstGeom prst="rect">
+            <a:avLst/>
+          </a:prstGeom>
+          <a:noFill/>
+        </p:spPr>
+        <p:txBody>
+          <a:bodyPr wrap="square" anchor="t" lIns="0" rIns="0" tIns="0" bIns="0">
+            <a:spAutoFit/>
+          </a:bodyPr>
+          <a:lstStyle/>
+          <a:p>
+            <a:pPr algn="l">
+              <a:spcAft>
+                <a:spcPts val="1080"/>
+              </a:spcAft>
+            </a:pPr>
+            <a:r>
+              <a:rPr sz="2400" b="0" i="0">
+                <a:solidFill>
+                  <a:srgbClr val="1C1B19"/>
+                </a:solidFill>
+                <a:latin typeface="Source Serif 4"/>
+              </a:rPr>
+              <a:t>Which method will you try this week, and for which test?</a:t>
+            </a:r>
+          </a:p>
+        </p:txBody>
+      </p:sp>
+      <p:sp>
+        <p:nvSpPr>
+          <p:cNvPr id="7" name="Rectangle 6"/>
           <p:cNvSpPr/>
           <p:nvPr/>
         </p:nvSpPr>
         <p:spPr>
           <a:xfrm>
-            <a:off x="822960" y="1371600"/>
-            <a:ext cx="73152" cy="3566160"/>
+            <a:off x="822960" y="4023360"/>
+            <a:ext cx="10515600" cy="1371600"/>
           </a:xfrm>
           <a:prstGeom prst="rect">
             <a:avLst/>
           </a:prstGeom>
           <a:solidFill>
-            <a:srgbClr val="F47B20"/>
+            <a:srgbClr val="FFFFFF"/>
           </a:solidFill>
-          <a:ln>
-            <a:noFill/>
+          <a:ln w="15875">
+            <a:solidFill>
+              <a:srgbClr val="1C1B19"/>
+            </a:solidFill>
           </a:ln>
           <a:effectLst/>
         </p:spPr>
@@ -5512,53 +5543,14 @@
       </p:sp>
       <p:sp>
         <p:nvSpPr>
-          <p:cNvPr id="6" name="TextBox 5"/>
+          <p:cNvPr id="8" name="TextBox 7"/>
           <p:cNvSpPr txBox="1"/>
           <p:nvPr/>
         </p:nvSpPr>
         <p:spPr>
           <a:xfrm>
-            <a:off x="1188720" y="1371600"/>
-            <a:ext cx="10058400" cy="3566160"/>
-          </a:xfrm>
-          <a:prstGeom prst="rect">
-            <a:avLst/>
-          </a:prstGeom>
-          <a:noFill/>
-        </p:spPr>
-        <p:txBody>
-          <a:bodyPr wrap="square" anchor="ctr" lIns="0" rIns="0" tIns="0" bIns="0">
-            <a:spAutoFit/>
-          </a:bodyPr>
-          <a:lstStyle/>
-          <a:p>
-            <a:pPr algn="l">
-              <a:spcAft>
-                <a:spcPts val="1800"/>
-              </a:spcAft>
-            </a:pPr>
-            <a:r>
-              <a:rPr sz="4000" b="0" i="1">
-                <a:solidFill>
-                  <a:srgbClr val="1C1B19"/>
-                </a:solidFill>
-                <a:latin typeface="Source Serif 4"/>
-              </a:rPr>
-              <a:t>Pick a class with a test coming. Write all you remember.</a:t>
-            </a:r>
-          </a:p>
-        </p:txBody>
-      </p:sp>
-      <p:sp>
-        <p:nvSpPr>
-          <p:cNvPr id="7" name="TextBox 6"/>
-          <p:cNvSpPr txBox="1"/>
-          <p:nvPr/>
-        </p:nvSpPr>
-        <p:spPr>
-          <a:xfrm>
-            <a:off x="1188720" y="5120640"/>
-            <a:ext cx="10058400" cy="914400"/>
+            <a:off x="1097280" y="4206240"/>
+            <a:ext cx="10058400" cy="365760"/>
           </a:xfrm>
           <a:prstGeom prst="rect">
             <a:avLst/>
@@ -5573,17 +5565,56 @@
           <a:p>
             <a:pPr algn="l">
               <a:spcAft>
-                <a:spcPts val="810"/>
-              </a:spcAft>
-            </a:pPr>
-            <a:r>
-              <a:rPr sz="1800" b="0" i="0">
-                <a:solidFill>
-                  <a:srgbClr val="5D5A54"/>
+                <a:spcPts val="540"/>
+              </a:spcAft>
+            </a:pPr>
+            <a:r>
+              <a:rPr sz="1200" b="1" i="0">
+                <a:solidFill>
+                  <a:srgbClr val="0B2D5B"/>
                 </a:solidFill>
                 <a:latin typeface="Inter Tight"/>
               </a:rPr>
-              <a:t>No notes for five minutes. Then open your notes and mark what you missed in another color.</a:t>
+              <a:t>ON THE BVR DINER MENU</a:t>
+            </a:r>
+          </a:p>
+        </p:txBody>
+      </p:sp>
+      <p:sp>
+        <p:nvSpPr>
+          <p:cNvPr id="9" name="TextBox 8"/>
+          <p:cNvSpPr txBox="1"/>
+          <p:nvPr/>
+        </p:nvSpPr>
+        <p:spPr>
+          <a:xfrm>
+            <a:off x="1097280" y="4617720"/>
+            <a:ext cx="10058400" cy="640080"/>
+          </a:xfrm>
+          <a:prstGeom prst="rect">
+            <a:avLst/>
+          </a:prstGeom>
+          <a:noFill/>
+        </p:spPr>
+        <p:txBody>
+          <a:bodyPr wrap="square" anchor="t" lIns="0" rIns="0" tIns="0" bIns="0">
+            <a:spAutoFit/>
+          </a:bodyPr>
+          <a:lstStyle/>
+          <a:p>
+            <a:pPr algn="l">
+              <a:spcAft>
+                <a:spcPts val="900"/>
+              </a:spcAft>
+            </a:pPr>
+            <a:r>
+              <a:rPr sz="2000" b="0" i="0">
+                <a:solidFill>
+                  <a:srgbClr val="1C1B19"/>
+                </a:solidFill>
+                <a:latin typeface="Inter Tight"/>
+              </a:rPr>
+              <a:t>https://rmwtoolkit.github.io/bcds-toolkit/study-smarter-not-longer-high-school.html</a:t>
             </a:r>
           </a:p>
         </p:txBody>
@@ -5597,6 +5628,2308 @@
 </file>
 
 <file path=ppt/slides/slide12.xml><?xml version="1.0" encoding="utf-8"?>
+<p:sld xmlns:a="http://schemas.openxmlformats.org/drawingml/2006/main" xmlns:p="http://schemas.openxmlformats.org/presentationml/2006/main" xmlns:r="http://schemas.openxmlformats.org/officeDocument/2006/relationships" show="0">
+  <p:cSld>
+    <p:bg>
+      <p:bgPr>
+        <a:solidFill>
+          <a:srgbClr val="EEEBE4"/>
+        </a:solidFill>
+        <a:effectLst/>
+      </p:bgPr>
+    </p:bg>
+    <p:spTree>
+      <p:nvGrpSpPr>
+        <p:cNvPr id="1" name=""/>
+        <p:cNvGrpSpPr/>
+        <p:nvPr/>
+      </p:nvGrpSpPr>
+      <p:grpSpPr/>
+      <p:sp>
+        <p:nvSpPr>
+          <p:cNvPr id="2" name="Rectangle 1"/>
+          <p:cNvSpPr/>
+          <p:nvPr/>
+        </p:nvSpPr>
+        <p:spPr>
+          <a:xfrm>
+            <a:off x="0" y="0"/>
+            <a:ext cx="12191695" cy="384048"/>
+          </a:xfrm>
+          <a:prstGeom prst="rect">
+            <a:avLst/>
+          </a:prstGeom>
+          <a:solidFill>
+            <a:srgbClr val="0B2D5B"/>
+          </a:solidFill>
+          <a:ln>
+            <a:noFill/>
+          </a:ln>
+          <a:effectLst/>
+        </p:spPr>
+        <p:style>
+          <a:lnRef idx="1">
+            <a:schemeClr val="accent1"/>
+          </a:lnRef>
+          <a:fillRef idx="3">
+            <a:schemeClr val="accent1"/>
+          </a:fillRef>
+          <a:effectRef idx="2">
+            <a:schemeClr val="accent1"/>
+          </a:effectRef>
+          <a:fontRef idx="minor">
+            <a:schemeClr val="lt1"/>
+          </a:fontRef>
+        </p:style>
+        <p:txBody>
+          <a:bodyPr rtlCol="0" anchor="ctr"/>
+          <a:lstStyle/>
+          <a:p>
+            <a:pPr algn="ctr"/>
+          </a:p>
+        </p:txBody>
+      </p:sp>
+      <p:sp>
+        <p:nvSpPr>
+          <p:cNvPr id="3" name="TextBox 2"/>
+          <p:cNvSpPr txBox="1"/>
+          <p:nvPr/>
+        </p:nvSpPr>
+        <p:spPr>
+          <a:xfrm>
+            <a:off x="548640" y="100584"/>
+            <a:ext cx="10972800" cy="274320"/>
+          </a:xfrm>
+          <a:prstGeom prst="rect">
+            <a:avLst/>
+          </a:prstGeom>
+          <a:noFill/>
+        </p:spPr>
+        <p:txBody>
+          <a:bodyPr wrap="square" anchor="t" lIns="0" rIns="0" tIns="0" bIns="0">
+            <a:spAutoFit/>
+          </a:bodyPr>
+          <a:lstStyle/>
+          <a:p>
+            <a:pPr algn="l">
+              <a:spcAft>
+                <a:spcPts val="495"/>
+              </a:spcAft>
+            </a:pPr>
+            <a:r>
+              <a:rPr sz="1100" b="1" i="0">
+                <a:solidFill>
+                  <a:srgbClr val="FFFFFF"/>
+                </a:solidFill>
+                <a:latin typeface="Inter Tight"/>
+              </a:rPr>
+              <a:t>TEACHER PAGE  ·  skipped when you present  ·  Lesson plan</a:t>
+            </a:r>
+          </a:p>
+        </p:txBody>
+      </p:sp>
+      <p:sp>
+        <p:nvSpPr>
+          <p:cNvPr id="4" name="TextBox 3"/>
+          <p:cNvSpPr txBox="1"/>
+          <p:nvPr/>
+        </p:nvSpPr>
+        <p:spPr>
+          <a:xfrm>
+            <a:off x="548640" y="685800"/>
+            <a:ext cx="10972800" cy="731520"/>
+          </a:xfrm>
+          <a:prstGeom prst="rect">
+            <a:avLst/>
+          </a:prstGeom>
+          <a:noFill/>
+        </p:spPr>
+        <p:txBody>
+          <a:bodyPr wrap="square" anchor="t" lIns="0" rIns="0" tIns="0" bIns="0">
+            <a:spAutoFit/>
+          </a:bodyPr>
+          <a:lstStyle/>
+          <a:p>
+            <a:pPr algn="l">
+              <a:spcAft>
+                <a:spcPts val="1530"/>
+              </a:spcAft>
+            </a:pPr>
+            <a:r>
+              <a:rPr sz="3400" b="1" i="0">
+                <a:solidFill>
+                  <a:srgbClr val="1C1B19"/>
+                </a:solidFill>
+                <a:latin typeface="Source Serif 4"/>
+              </a:rPr>
+              <a:t>Study Smarter, Not Longer</a:t>
+            </a:r>
+          </a:p>
+        </p:txBody>
+      </p:sp>
+      <p:sp>
+        <p:nvSpPr>
+          <p:cNvPr id="5" name="TextBox 4"/>
+          <p:cNvSpPr txBox="1"/>
+          <p:nvPr/>
+        </p:nvSpPr>
+        <p:spPr>
+          <a:xfrm>
+            <a:off x="548640" y="1325880"/>
+            <a:ext cx="10972800" cy="365760"/>
+          </a:xfrm>
+          <a:prstGeom prst="rect">
+            <a:avLst/>
+          </a:prstGeom>
+          <a:noFill/>
+        </p:spPr>
+        <p:txBody>
+          <a:bodyPr wrap="square" anchor="t" lIns="0" rIns="0" tIns="0" bIns="0">
+            <a:spAutoFit/>
+          </a:bodyPr>
+          <a:lstStyle/>
+          <a:p>
+            <a:pPr algn="l">
+              <a:spcAft>
+                <a:spcPts val="630"/>
+              </a:spcAft>
+            </a:pPr>
+            <a:r>
+              <a:rPr sz="1400" b="0" i="0">
+                <a:solidFill>
+                  <a:srgbClr val="5D5A54"/>
+                </a:solidFill>
+                <a:latin typeface="Inter Tight"/>
+              </a:rPr>
+              <a:t>Upper School  ·  45 minutes (20-minute advisory version below)  ·  9th grade advisory, health class, or a counselor-led group</a:t>
+            </a:r>
+          </a:p>
+        </p:txBody>
+      </p:sp>
+      <p:sp>
+        <p:nvSpPr>
+          <p:cNvPr id="6" name="TextBox 5"/>
+          <p:cNvSpPr txBox="1"/>
+          <p:nvPr/>
+        </p:nvSpPr>
+        <p:spPr>
+          <a:xfrm>
+            <a:off x="548640" y="1828800"/>
+            <a:ext cx="5120640" cy="4389120"/>
+          </a:xfrm>
+          <a:prstGeom prst="rect">
+            <a:avLst/>
+          </a:prstGeom>
+          <a:noFill/>
+        </p:spPr>
+        <p:txBody>
+          <a:bodyPr wrap="square" anchor="t" lIns="0" rIns="0" tIns="0" bIns="0">
+            <a:spAutoFit/>
+          </a:bodyPr>
+          <a:lstStyle/>
+          <a:p>
+            <a:pPr algn="l">
+              <a:spcAft>
+                <a:spcPts val="675"/>
+              </a:spcAft>
+            </a:pPr>
+            <a:r>
+              <a:rPr sz="1100" b="1" i="0">
+                <a:solidFill>
+                  <a:srgbClr val="0B2D5B"/>
+                </a:solidFill>
+                <a:latin typeface="Inter Tight"/>
+              </a:rPr>
+              <a:t>GOAL</a:t>
+            </a:r>
+          </a:p>
+          <a:p>
+            <a:pPr algn="l">
+              <a:spcAft>
+                <a:spcPts val="675"/>
+              </a:spcAft>
+            </a:pPr>
+            <a:r>
+              <a:rPr sz="1500" b="0" i="0">
+                <a:solidFill>
+                  <a:srgbClr val="1C1B19"/>
+                </a:solidFill>
+                <a:latin typeface="Source Serif 4"/>
+              </a:rPr>
+              <a:t>Students can explain why rereading feels like studying but holds up worst (familiar isn't the same as knowing), use three methods that work (quiz yourself, space it out, mix it up), and sketch a spaced plan for a real test coming up. The aim is a better method. Nobody should leave thinking they're bad at school.</a:t>
+            </a:r>
+          </a:p>
+          <a:p>
+            <a:pPr algn="l">
+              <a:spcAft>
+                <a:spcPts val="675"/>
+              </a:spcAft>
+            </a:pPr>
+            <a:r>
+              <a:rPr sz="1500" b="0" i="0">
+                <a:solidFill>
+                  <a:srgbClr val="1C1B19"/>
+                </a:solidFill>
+                <a:latin typeface="Source Serif 4"/>
+              </a:rPr>
+              <a:t/>
+            </a:r>
+          </a:p>
+          <a:p>
+            <a:pPr algn="l">
+              <a:spcAft>
+                <a:spcPts val="675"/>
+              </a:spcAft>
+            </a:pPr>
+            <a:r>
+              <a:rPr sz="1100" b="1" i="0">
+                <a:solidFill>
+                  <a:srgbClr val="0B2D5B"/>
+                </a:solidFill>
+                <a:latin typeface="Inter Tight"/>
+              </a:rPr>
+              <a:t>MATERIALS</a:t>
+            </a:r>
+          </a:p>
+          <a:p>
+            <a:pPr algn="l">
+              <a:spcAft>
+                <a:spcPts val="675"/>
+              </a:spcAft>
+            </a:pPr>
+            <a:r>
+              <a:rPr sz="1500" b="0" i="0">
+                <a:solidFill>
+                  <a:srgbClr val="1C1B19"/>
+                </a:solidFill>
+                <a:latin typeface="Source Serif 4"/>
+              </a:rPr>
+              <a:t>Blank paper for the brain dump, one sheet per student</a:t>
+            </a:r>
+          </a:p>
+          <a:p>
+            <a:pPr algn="l">
+              <a:spcAft>
+                <a:spcPts val="675"/>
+              </a:spcAft>
+            </a:pPr>
+            <a:r>
+              <a:rPr sz="1500" b="0" i="0">
+                <a:solidFill>
+                  <a:srgbClr val="1C1B19"/>
+                </a:solidFill>
+                <a:latin typeface="Source Serif 4"/>
+              </a:rPr>
+              <a:t>Index cards for the opening guess and the exit card</a:t>
+            </a:r>
+          </a:p>
+          <a:p>
+            <a:pPr algn="l">
+              <a:spcAft>
+                <a:spcPts val="675"/>
+              </a:spcAft>
+            </a:pPr>
+            <a:r>
+              <a:rPr sz="1500" b="0" i="0">
+                <a:solidFill>
+                  <a:srgbClr val="1C1B19"/>
+                </a:solidFill>
+                <a:latin typeface="Source Serif 4"/>
+              </a:rPr>
+              <a:t>The BVR Diner page link (last slide) to share after class</a:t>
+            </a:r>
+          </a:p>
+        </p:txBody>
+      </p:sp>
+      <p:sp>
+        <p:nvSpPr>
+          <p:cNvPr id="7" name="TextBox 6"/>
+          <p:cNvSpPr txBox="1"/>
+          <p:nvPr/>
+        </p:nvSpPr>
+        <p:spPr>
+          <a:xfrm>
+            <a:off x="6126480" y="1828800"/>
+            <a:ext cx="5486400" cy="4389120"/>
+          </a:xfrm>
+          <a:prstGeom prst="rect">
+            <a:avLst/>
+          </a:prstGeom>
+          <a:noFill/>
+        </p:spPr>
+        <p:txBody>
+          <a:bodyPr wrap="square" anchor="t" lIns="0" rIns="0" tIns="0" bIns="0">
+            <a:spAutoFit/>
+          </a:bodyPr>
+          <a:lstStyle/>
+          <a:p>
+            <a:pPr algn="l">
+              <a:spcAft>
+                <a:spcPts val="630"/>
+              </a:spcAft>
+            </a:pPr>
+            <a:r>
+              <a:rPr sz="1100" b="1" i="0">
+                <a:solidFill>
+                  <a:srgbClr val="0B2D5B"/>
+                </a:solidFill>
+                <a:latin typeface="Inter Tight"/>
+              </a:rPr>
+              <a:t>FLOW</a:t>
+            </a:r>
+          </a:p>
+          <a:p>
+            <a:pPr algn="l">
+              <a:spcAft>
+                <a:spcPts val="630"/>
+              </a:spcAft>
+            </a:pPr>
+            <a:r>
+              <a:rPr sz="1300" b="1" i="0">
+                <a:solidFill>
+                  <a:srgbClr val="F47B20"/>
+                </a:solidFill>
+                <a:latin typeface="Inter Tight"/>
+              </a:rPr>
+              <a:t>5 min   </a:t>
+            </a:r>
+            <a:r>
+              <a:rPr sz="1400" b="0" i="0">
+                <a:solidFill>
+                  <a:srgbClr val="1C1B19"/>
+                </a:solidFill>
+                <a:latin typeface="Source Serif 4"/>
+              </a:rPr>
+              <a:t>Myth or fact (stand up, sit down)</a:t>
+            </a:r>
+          </a:p>
+          <a:p>
+            <a:pPr algn="l">
+              <a:spcAft>
+                <a:spcPts val="630"/>
+              </a:spcAft>
+            </a:pPr>
+            <a:r>
+              <a:rPr sz="1300" b="1" i="0">
+                <a:solidFill>
+                  <a:srgbClr val="F47B20"/>
+                </a:solidFill>
+                <a:latin typeface="Inter Tight"/>
+              </a:rPr>
+              <a:t>8 min   </a:t>
+            </a:r>
+            <a:r>
+              <a:rPr sz="1400" b="0" i="0">
+                <a:solidFill>
+                  <a:srgbClr val="1C1B19"/>
+                </a:solidFill>
+                <a:latin typeface="Source Serif 4"/>
+              </a:rPr>
+              <a:t>The rereading experiment (predict, then see)</a:t>
+            </a:r>
+          </a:p>
+          <a:p>
+            <a:pPr algn="l">
+              <a:spcAft>
+                <a:spcPts val="630"/>
+              </a:spcAft>
+            </a:pPr>
+            <a:r>
+              <a:rPr sz="1300" b="1" i="0">
+                <a:solidFill>
+                  <a:srgbClr val="F47B20"/>
+                </a:solidFill>
+                <a:latin typeface="Inter Tight"/>
+              </a:rPr>
+              <a:t>5 min   </a:t>
+            </a:r>
+            <a:r>
+              <a:rPr sz="1400" b="0" i="0">
+                <a:solidFill>
+                  <a:srgbClr val="1C1B19"/>
+                </a:solidFill>
+                <a:latin typeface="Source Serif 4"/>
+              </a:rPr>
+              <a:t>Mixed practice: worse in the moment, better on the test</a:t>
+            </a:r>
+          </a:p>
+          <a:p>
+            <a:pPr algn="l">
+              <a:spcAft>
+                <a:spcPts val="630"/>
+              </a:spcAft>
+            </a:pPr>
+            <a:r>
+              <a:rPr sz="1300" b="1" i="0">
+                <a:solidFill>
+                  <a:srgbClr val="F47B20"/>
+                </a:solidFill>
+                <a:latin typeface="Inter Tight"/>
+              </a:rPr>
+              <a:t>8 min   </a:t>
+            </a:r>
+            <a:r>
+              <a:rPr sz="1400" b="0" i="0">
+                <a:solidFill>
+                  <a:srgbClr val="1C1B19"/>
+                </a:solidFill>
+                <a:latin typeface="Source Serif 4"/>
+              </a:rPr>
+              <a:t>Brain dump (private, no notes)</a:t>
+            </a:r>
+          </a:p>
+          <a:p>
+            <a:pPr algn="l">
+              <a:spcAft>
+                <a:spcPts val="630"/>
+              </a:spcAft>
+            </a:pPr>
+            <a:r>
+              <a:rPr sz="1300" b="1" i="0">
+                <a:solidFill>
+                  <a:srgbClr val="F47B20"/>
+                </a:solidFill>
+                <a:latin typeface="Inter Tight"/>
+              </a:rPr>
+              <a:t>9 min   </a:t>
+            </a:r>
+            <a:r>
+              <a:rPr sz="1400" b="0" i="0">
+                <a:solidFill>
+                  <a:srgbClr val="1C1B19"/>
+                </a:solidFill>
+                <a:latin typeface="Source Serif 4"/>
+              </a:rPr>
+              <a:t>Three study plans (small groups)</a:t>
+            </a:r>
+          </a:p>
+          <a:p>
+            <a:pPr algn="l">
+              <a:spcAft>
+                <a:spcPts val="630"/>
+              </a:spcAft>
+            </a:pPr>
+            <a:r>
+              <a:rPr sz="1300" b="1" i="0">
+                <a:solidFill>
+                  <a:srgbClr val="F47B20"/>
+                </a:solidFill>
+                <a:latin typeface="Inter Tight"/>
+              </a:rPr>
+              <a:t>6 min   </a:t>
+            </a:r>
+            <a:r>
+              <a:rPr sz="1400" b="0" i="0">
+                <a:solidFill>
+                  <a:srgbClr val="1C1B19"/>
+                </a:solidFill>
+                <a:latin typeface="Source Serif 4"/>
+              </a:rPr>
+              <a:t>A ten-day plan for a real test (pair-share)</a:t>
+            </a:r>
+          </a:p>
+          <a:p>
+            <a:pPr algn="l">
+              <a:spcAft>
+                <a:spcPts val="630"/>
+              </a:spcAft>
+            </a:pPr>
+            <a:r>
+              <a:rPr sz="1300" b="1" i="0">
+                <a:solidFill>
+                  <a:srgbClr val="F47B20"/>
+                </a:solidFill>
+                <a:latin typeface="Inter Tight"/>
+              </a:rPr>
+              <a:t>4 min   </a:t>
+            </a:r>
+            <a:r>
+              <a:rPr sz="1400" b="0" i="0">
+                <a:solidFill>
+                  <a:srgbClr val="1C1B19"/>
+                </a:solidFill>
+                <a:latin typeface="Source Serif 4"/>
+              </a:rPr>
+              <a:t>Exit card and the BVR Diner link</a:t>
+            </a:r>
+          </a:p>
+          <a:p>
+            <a:pPr algn="l">
+              <a:spcAft>
+                <a:spcPts val="630"/>
+              </a:spcAft>
+            </a:pPr>
+            <a:r>
+              <a:rPr sz="1400" b="0" i="0">
+                <a:solidFill>
+                  <a:srgbClr val="1C1B19"/>
+                </a:solidFill>
+                <a:latin typeface="Source Serif 4"/>
+              </a:rPr>
+              <a:t/>
+            </a:r>
+          </a:p>
+          <a:p>
+            <a:pPr algn="l">
+              <a:spcAft>
+                <a:spcPts val="630"/>
+              </a:spcAft>
+            </a:pPr>
+            <a:r>
+              <a:rPr sz="1100" b="1" i="0">
+                <a:solidFill>
+                  <a:srgbClr val="0B2D5B"/>
+                </a:solidFill>
+                <a:latin typeface="Inter Tight"/>
+              </a:rPr>
+              <a:t>SHORT ON TIME (20-MINUTE ADVISORY)</a:t>
+            </a:r>
+          </a:p>
+          <a:p>
+            <a:pPr algn="l">
+              <a:spcAft>
+                <a:spcPts val="630"/>
+              </a:spcAft>
+            </a:pPr>
+            <a:r>
+              <a:rPr sz="1400" b="0" i="0">
+                <a:solidFill>
+                  <a:srgbClr val="1C1B19"/>
+                </a:solidFill>
+                <a:latin typeface="Source Serif 4"/>
+              </a:rPr>
+              <a:t>Myth or fact (4), the rereading experiment (6), brain dump (6), exit card and link (4). Share the BVR Diner link so students get the ten-day plan and the rest.</a:t>
+            </a:r>
+          </a:p>
+        </p:txBody>
+      </p:sp>
+    </p:spTree>
+  </p:cSld>
+  <p:clrMapOvr>
+    <a:masterClrMapping/>
+  </p:clrMapOvr>
+</p:sld>
+</file>
+
+<file path=ppt/slides/slide13.xml><?xml version="1.0" encoding="utf-8"?>
+<p:sld xmlns:a="http://schemas.openxmlformats.org/drawingml/2006/main" xmlns:p="http://schemas.openxmlformats.org/presentationml/2006/main" xmlns:r="http://schemas.openxmlformats.org/officeDocument/2006/relationships" show="0">
+  <p:cSld>
+    <p:bg>
+      <p:bgPr>
+        <a:solidFill>
+          <a:srgbClr val="EEEBE4"/>
+        </a:solidFill>
+        <a:effectLst/>
+      </p:bgPr>
+    </p:bg>
+    <p:spTree>
+      <p:nvGrpSpPr>
+        <p:cNvPr id="1" name=""/>
+        <p:cNvGrpSpPr/>
+        <p:nvPr/>
+      </p:nvGrpSpPr>
+      <p:grpSpPr/>
+      <p:sp>
+        <p:nvSpPr>
+          <p:cNvPr id="2" name="Rectangle 1"/>
+          <p:cNvSpPr/>
+          <p:nvPr/>
+        </p:nvSpPr>
+        <p:spPr>
+          <a:xfrm>
+            <a:off x="0" y="0"/>
+            <a:ext cx="12191695" cy="384048"/>
+          </a:xfrm>
+          <a:prstGeom prst="rect">
+            <a:avLst/>
+          </a:prstGeom>
+          <a:solidFill>
+            <a:srgbClr val="0B2D5B"/>
+          </a:solidFill>
+          <a:ln>
+            <a:noFill/>
+          </a:ln>
+          <a:effectLst/>
+        </p:spPr>
+        <p:style>
+          <a:lnRef idx="1">
+            <a:schemeClr val="accent1"/>
+          </a:lnRef>
+          <a:fillRef idx="3">
+            <a:schemeClr val="accent1"/>
+          </a:fillRef>
+          <a:effectRef idx="2">
+            <a:schemeClr val="accent1"/>
+          </a:effectRef>
+          <a:fontRef idx="minor">
+            <a:schemeClr val="lt1"/>
+          </a:fontRef>
+        </p:style>
+        <p:txBody>
+          <a:bodyPr rtlCol="0" anchor="ctr"/>
+          <a:lstStyle/>
+          <a:p>
+            <a:pPr algn="ctr"/>
+          </a:p>
+        </p:txBody>
+      </p:sp>
+      <p:sp>
+        <p:nvSpPr>
+          <p:cNvPr id="3" name="TextBox 2"/>
+          <p:cNvSpPr txBox="1"/>
+          <p:nvPr/>
+        </p:nvSpPr>
+        <p:spPr>
+          <a:xfrm>
+            <a:off x="548640" y="100584"/>
+            <a:ext cx="10972800" cy="274320"/>
+          </a:xfrm>
+          <a:prstGeom prst="rect">
+            <a:avLst/>
+          </a:prstGeom>
+          <a:noFill/>
+        </p:spPr>
+        <p:txBody>
+          <a:bodyPr wrap="square" anchor="t" lIns="0" rIns="0" tIns="0" bIns="0">
+            <a:spAutoFit/>
+          </a:bodyPr>
+          <a:lstStyle/>
+          <a:p>
+            <a:pPr algn="l">
+              <a:spcAft>
+                <a:spcPts val="495"/>
+              </a:spcAft>
+            </a:pPr>
+            <a:r>
+              <a:rPr sz="1100" b="1" i="0">
+                <a:solidFill>
+                  <a:srgbClr val="FFFFFF"/>
+                </a:solidFill>
+                <a:latin typeface="Inter Tight"/>
+              </a:rPr>
+              <a:t>TEACHER PAGE  ·  skipped when you present  ·  Before you teach</a:t>
+            </a:r>
+          </a:p>
+        </p:txBody>
+      </p:sp>
+      <p:sp>
+        <p:nvSpPr>
+          <p:cNvPr id="4" name="TextBox 3"/>
+          <p:cNvSpPr txBox="1"/>
+          <p:nvPr/>
+        </p:nvSpPr>
+        <p:spPr>
+          <a:xfrm>
+            <a:off x="548640" y="685800"/>
+            <a:ext cx="10972800" cy="640080"/>
+          </a:xfrm>
+          <a:prstGeom prst="rect">
+            <a:avLst/>
+          </a:prstGeom>
+          <a:noFill/>
+        </p:spPr>
+        <p:txBody>
+          <a:bodyPr wrap="square" anchor="t" lIns="0" rIns="0" tIns="0" bIns="0">
+            <a:spAutoFit/>
+          </a:bodyPr>
+          <a:lstStyle/>
+          <a:p>
+            <a:pPr algn="l">
+              <a:spcAft>
+                <a:spcPts val="1350"/>
+              </a:spcAft>
+            </a:pPr>
+            <a:r>
+              <a:rPr sz="3000" b="1" i="0">
+                <a:solidFill>
+                  <a:srgbClr val="1C1B19"/>
+                </a:solidFill>
+                <a:latin typeface="Source Serif 4"/>
+              </a:rPr>
+              <a:t>Before you teach</a:t>
+            </a:r>
+          </a:p>
+        </p:txBody>
+      </p:sp>
+      <p:sp>
+        <p:nvSpPr>
+          <p:cNvPr id="5" name="TextBox 4"/>
+          <p:cNvSpPr txBox="1"/>
+          <p:nvPr/>
+        </p:nvSpPr>
+        <p:spPr>
+          <a:xfrm>
+            <a:off x="548640" y="1463040"/>
+            <a:ext cx="5394960" cy="4937760"/>
+          </a:xfrm>
+          <a:prstGeom prst="rect">
+            <a:avLst/>
+          </a:prstGeom>
+          <a:noFill/>
+        </p:spPr>
+        <p:txBody>
+          <a:bodyPr wrap="square" anchor="t" lIns="0" rIns="0" tIns="0" bIns="0">
+            <a:spAutoFit/>
+          </a:bodyPr>
+          <a:lstStyle/>
+          <a:p>
+            <a:pPr algn="l">
+              <a:spcAft>
+                <a:spcPts val="585"/>
+              </a:spcAft>
+            </a:pPr>
+            <a:r>
+              <a:rPr sz="1500" b="1" i="0">
+                <a:solidFill>
+                  <a:srgbClr val="1C1B19"/>
+                </a:solidFill>
+                <a:latin typeface="Source Serif 4"/>
+              </a:rPr>
+              <a:t>Some students already feel behind.</a:t>
+            </a:r>
+          </a:p>
+          <a:p>
+            <a:pPr algn="l">
+              <a:spcAft>
+                <a:spcPts val="585"/>
+              </a:spcAft>
+            </a:pPr>
+            <a:r>
+              <a:rPr sz="1300" b="0" i="0">
+                <a:solidFill>
+                  <a:srgbClr val="1C1B19"/>
+                </a:solidFill>
+                <a:latin typeface="Source Serif 4"/>
+              </a:rPr>
+              <a:t>First Upper School tests can shake students who did well before. Frame everything as a method problem, never a smarts problem. A student who rereads has been doing what most students do.</a:t>
+            </a:r>
+          </a:p>
+          <a:p>
+            <a:pPr algn="l">
+              <a:spcAft>
+                <a:spcPts val="585"/>
+              </a:spcAft>
+            </a:pPr>
+            <a:r>
+              <a:rPr sz="1300" b="0" i="0">
+                <a:solidFill>
+                  <a:srgbClr val="1C1B19"/>
+                </a:solidFill>
+                <a:latin typeface="Source Serif 4"/>
+              </a:rPr>
+              <a:t/>
+            </a:r>
+          </a:p>
+          <a:p>
+            <a:pPr algn="l">
+              <a:spcAft>
+                <a:spcPts val="585"/>
+              </a:spcAft>
+            </a:pPr>
+            <a:r>
+              <a:rPr sz="1500" b="1" i="0">
+                <a:solidFill>
+                  <a:srgbClr val="1C1B19"/>
+                </a:solidFill>
+                <a:latin typeface="Source Serif 4"/>
+              </a:rPr>
+              <a:t>Keep grades and scores private.</a:t>
+            </a:r>
+          </a:p>
+          <a:p>
+            <a:pPr algn="l">
+              <a:spcAft>
+                <a:spcPts val="585"/>
+              </a:spcAft>
+            </a:pPr>
+            <a:r>
+              <a:rPr sz="1300" b="0" i="0">
+                <a:solidFill>
+                  <a:srgbClr val="1C1B19"/>
+                </a:solidFill>
+                <a:latin typeface="Source Serif 4"/>
+              </a:rPr>
+              <a:t>Don't ask anyone to share a test score or how long they studied. The brain dump stays with the student. Nobody hands it in.</a:t>
+            </a:r>
+          </a:p>
+          <a:p>
+            <a:pPr algn="l">
+              <a:spcAft>
+                <a:spcPts val="585"/>
+              </a:spcAft>
+            </a:pPr>
+            <a:r>
+              <a:rPr sz="1300" b="0" i="0">
+                <a:solidFill>
+                  <a:srgbClr val="1C1B19"/>
+                </a:solidFill>
+                <a:latin typeface="Source Serif 4"/>
+              </a:rPr>
+              <a:t/>
+            </a:r>
+          </a:p>
+          <a:p>
+            <a:pPr algn="l">
+              <a:spcAft>
+                <a:spcPts val="585"/>
+              </a:spcAft>
+            </a:pPr>
+            <a:r>
+              <a:rPr sz="1500" b="1" i="0">
+                <a:solidFill>
+                  <a:srgbClr val="1C1B19"/>
+                </a:solidFill>
+                <a:latin typeface="Source Serif 4"/>
+              </a:rPr>
+              <a:t>Expect pushback on learning styles.</a:t>
+            </a:r>
+          </a:p>
+          <a:p>
+            <a:pPr algn="l">
+              <a:spcAft>
+                <a:spcPts val="585"/>
+              </a:spcAft>
+            </a:pPr>
+            <a:r>
+              <a:rPr sz="1300" b="0" i="0">
+                <a:solidFill>
+                  <a:srgbClr val="1C1B19"/>
+                </a:solidFill>
+                <a:latin typeface="Source Serif 4"/>
+              </a:rPr>
+              <a:t>Many students have been told they're visual learners. Preferring visuals is fine. The research says matching teaching to a style doesn't improve learning. Say it gently and move on. Nobody needs correcting in front of the room.</a:t>
+            </a:r>
+          </a:p>
+          <a:p>
+            <a:pPr algn="l">
+              <a:spcAft>
+                <a:spcPts val="585"/>
+              </a:spcAft>
+            </a:pPr>
+            <a:r>
+              <a:rPr sz="1300" b="0" i="0">
+                <a:solidFill>
+                  <a:srgbClr val="1C1B19"/>
+                </a:solidFill>
+                <a:latin typeface="Source Serif 4"/>
+              </a:rPr>
+              <a:t/>
+            </a:r>
+          </a:p>
+        </p:txBody>
+      </p:sp>
+      <p:sp>
+        <p:nvSpPr>
+          <p:cNvPr id="6" name="TextBox 5"/>
+          <p:cNvSpPr txBox="1"/>
+          <p:nvPr/>
+        </p:nvSpPr>
+        <p:spPr>
+          <a:xfrm>
+            <a:off x="6217920" y="1463040"/>
+            <a:ext cx="5394960" cy="4937760"/>
+          </a:xfrm>
+          <a:prstGeom prst="rect">
+            <a:avLst/>
+          </a:prstGeom>
+          <a:noFill/>
+        </p:spPr>
+        <p:txBody>
+          <a:bodyPr wrap="square" anchor="t" lIns="0" rIns="0" tIns="0" bIns="0">
+            <a:spAutoFit/>
+          </a:bodyPr>
+          <a:lstStyle/>
+          <a:p>
+            <a:pPr algn="l">
+              <a:spcAft>
+                <a:spcPts val="585"/>
+              </a:spcAft>
+            </a:pPr>
+            <a:r>
+              <a:rPr sz="1500" b="1" i="0">
+                <a:solidFill>
+                  <a:srgbClr val="1C1B19"/>
+                </a:solidFill>
+                <a:latin typeface="Source Serif 4"/>
+              </a:rPr>
+              <a:t>Be honest about the research.</a:t>
+            </a:r>
+          </a:p>
+          <a:p>
+            <a:pPr algn="l">
+              <a:spcAft>
+                <a:spcPts val="585"/>
+              </a:spcAft>
+            </a:pPr>
+            <a:r>
+              <a:rPr sz="1300" b="0" i="0">
+                <a:solidFill>
+                  <a:srgbClr val="1C1B19"/>
+                </a:solidFill>
+                <a:latin typeface="Source Serif 4"/>
+              </a:rPr>
+              <a:t>Most of these studies were with college students, and the math-mixing study was small. Methods raise the odds. They don't promise a grade. Students trust you more when you say so.</a:t>
+            </a:r>
+          </a:p>
+          <a:p>
+            <a:pPr algn="l">
+              <a:spcAft>
+                <a:spcPts val="585"/>
+              </a:spcAft>
+            </a:pPr>
+            <a:r>
+              <a:rPr sz="1300" b="0" i="0">
+                <a:solidFill>
+                  <a:srgbClr val="1C1B19"/>
+                </a:solidFill>
+                <a:latin typeface="Source Serif 4"/>
+              </a:rPr>
+              <a:t/>
+            </a:r>
+          </a:p>
+          <a:p>
+            <a:pPr algn="l">
+              <a:spcAft>
+                <a:spcPts val="585"/>
+              </a:spcAft>
+            </a:pPr>
+            <a:r>
+              <a:rPr sz="1500" b="1" i="0">
+                <a:solidFill>
+                  <a:srgbClr val="1C1B19"/>
+                </a:solidFill>
+                <a:latin typeface="Source Serif 4"/>
+              </a:rPr>
+              <a:t>Good methods and still struggling.</a:t>
+            </a:r>
+          </a:p>
+          <a:p>
+            <a:pPr algn="l">
+              <a:spcAft>
+                <a:spcPts val="585"/>
+              </a:spcAft>
+            </a:pPr>
+            <a:r>
+              <a:rPr sz="1300" b="0" i="0">
+                <a:solidFill>
+                  <a:srgbClr val="1C1B19"/>
+                </a:solidFill>
+                <a:latin typeface="Source Serif 4"/>
+              </a:rPr>
+              <a:t>If reading, writing or focusing takes a student much longer than it seems to take others, connect them with the learning specialist or a counselor. An evaluation can open up supports now and in college.</a:t>
+            </a:r>
+          </a:p>
+          <a:p>
+            <a:pPr algn="l">
+              <a:spcAft>
+                <a:spcPts val="585"/>
+              </a:spcAft>
+            </a:pPr>
+            <a:r>
+              <a:rPr sz="1300" b="0" i="0">
+                <a:solidFill>
+                  <a:srgbClr val="1C1B19"/>
+                </a:solidFill>
+                <a:latin typeface="Source Serif 4"/>
+              </a:rPr>
+              <a:t/>
+            </a:r>
+          </a:p>
+          <a:p>
+            <a:pPr algn="l">
+              <a:spcAft>
+                <a:spcPts val="585"/>
+              </a:spcAft>
+            </a:pPr>
+            <a:r>
+              <a:rPr sz="1500" b="1" i="0">
+                <a:solidFill>
+                  <a:srgbClr val="1C1B19"/>
+                </a:solidFill>
+                <a:latin typeface="Source Serif 4"/>
+              </a:rPr>
+              <a:t>When stress is the bigger problem.</a:t>
+            </a:r>
+          </a:p>
+          <a:p>
+            <a:pPr algn="l">
+              <a:spcAft>
+                <a:spcPts val="585"/>
+              </a:spcAft>
+            </a:pPr>
+            <a:r>
+              <a:rPr sz="1300" b="0" i="0">
+                <a:solidFill>
+                  <a:srgbClr val="1C1B19"/>
+                </a:solidFill>
+                <a:latin typeface="Source Serif 4"/>
+              </a:rPr>
+              <a:t>If a student says school stress is taking over their evenings, sleep or mood, thank them and walk them to a counselor that day. Don't work through it in front of the class.</a:t>
+            </a:r>
+          </a:p>
+          <a:p>
+            <a:pPr algn="l">
+              <a:spcAft>
+                <a:spcPts val="585"/>
+              </a:spcAft>
+            </a:pPr>
+            <a:r>
+              <a:rPr sz="1300" b="0" i="0">
+                <a:solidFill>
+                  <a:srgbClr val="1C1B19"/>
+                </a:solidFill>
+                <a:latin typeface="Source Serif 4"/>
+              </a:rPr>
+              <a:t/>
+            </a:r>
+          </a:p>
+        </p:txBody>
+      </p:sp>
+    </p:spTree>
+  </p:cSld>
+  <p:clrMapOvr>
+    <a:masterClrMapping/>
+  </p:clrMapOvr>
+</p:sld>
+</file>
+
+<file path=ppt/slides/slide14.xml><?xml version="1.0" encoding="utf-8"?>
+<p:sld xmlns:a="http://schemas.openxmlformats.org/drawingml/2006/main" xmlns:p="http://schemas.openxmlformats.org/presentationml/2006/main" xmlns:r="http://schemas.openxmlformats.org/officeDocument/2006/relationships" show="0">
+  <p:cSld>
+    <p:bg>
+      <p:bgPr>
+        <a:solidFill>
+          <a:srgbClr val="EEEBE4"/>
+        </a:solidFill>
+        <a:effectLst/>
+      </p:bgPr>
+    </p:bg>
+    <p:spTree>
+      <p:nvGrpSpPr>
+        <p:cNvPr id="1" name=""/>
+        <p:cNvGrpSpPr/>
+        <p:nvPr/>
+      </p:nvGrpSpPr>
+      <p:grpSpPr/>
+      <p:sp>
+        <p:nvSpPr>
+          <p:cNvPr id="2" name="Rectangle 1"/>
+          <p:cNvSpPr/>
+          <p:nvPr/>
+        </p:nvSpPr>
+        <p:spPr>
+          <a:xfrm>
+            <a:off x="0" y="0"/>
+            <a:ext cx="12191695" cy="384048"/>
+          </a:xfrm>
+          <a:prstGeom prst="rect">
+            <a:avLst/>
+          </a:prstGeom>
+          <a:solidFill>
+            <a:srgbClr val="0B2D5B"/>
+          </a:solidFill>
+          <a:ln>
+            <a:noFill/>
+          </a:ln>
+          <a:effectLst/>
+        </p:spPr>
+        <p:style>
+          <a:lnRef idx="1">
+            <a:schemeClr val="accent1"/>
+          </a:lnRef>
+          <a:fillRef idx="3">
+            <a:schemeClr val="accent1"/>
+          </a:fillRef>
+          <a:effectRef idx="2">
+            <a:schemeClr val="accent1"/>
+          </a:effectRef>
+          <a:fontRef idx="minor">
+            <a:schemeClr val="lt1"/>
+          </a:fontRef>
+        </p:style>
+        <p:txBody>
+          <a:bodyPr rtlCol="0" anchor="ctr"/>
+          <a:lstStyle/>
+          <a:p>
+            <a:pPr algn="ctr"/>
+          </a:p>
+        </p:txBody>
+      </p:sp>
+      <p:sp>
+        <p:nvSpPr>
+          <p:cNvPr id="3" name="TextBox 2"/>
+          <p:cNvSpPr txBox="1"/>
+          <p:nvPr/>
+        </p:nvSpPr>
+        <p:spPr>
+          <a:xfrm>
+            <a:off x="548640" y="100584"/>
+            <a:ext cx="10972800" cy="274320"/>
+          </a:xfrm>
+          <a:prstGeom prst="rect">
+            <a:avLst/>
+          </a:prstGeom>
+          <a:noFill/>
+        </p:spPr>
+        <p:txBody>
+          <a:bodyPr wrap="square" anchor="t" lIns="0" rIns="0" tIns="0" bIns="0">
+            <a:spAutoFit/>
+          </a:bodyPr>
+          <a:lstStyle/>
+          <a:p>
+            <a:pPr algn="l">
+              <a:spcAft>
+                <a:spcPts val="495"/>
+              </a:spcAft>
+            </a:pPr>
+            <a:r>
+              <a:rPr sz="1100" b="1" i="0">
+                <a:solidFill>
+                  <a:srgbClr val="FFFFFF"/>
+                </a:solidFill>
+                <a:latin typeface="Inter Tight"/>
+              </a:rPr>
+              <a:t>TEACHER PAGE  ·  skipped when you present  ·  Every student in the room</a:t>
+            </a:r>
+          </a:p>
+        </p:txBody>
+      </p:sp>
+      <p:sp>
+        <p:nvSpPr>
+          <p:cNvPr id="4" name="TextBox 3"/>
+          <p:cNvSpPr txBox="1"/>
+          <p:nvPr/>
+        </p:nvSpPr>
+        <p:spPr>
+          <a:xfrm>
+            <a:off x="548640" y="685800"/>
+            <a:ext cx="10972800" cy="640080"/>
+          </a:xfrm>
+          <a:prstGeom prst="rect">
+            <a:avLst/>
+          </a:prstGeom>
+          <a:noFill/>
+        </p:spPr>
+        <p:txBody>
+          <a:bodyPr wrap="square" anchor="t" lIns="0" rIns="0" tIns="0" bIns="0">
+            <a:spAutoFit/>
+          </a:bodyPr>
+          <a:lstStyle/>
+          <a:p>
+            <a:pPr algn="l">
+              <a:spcAft>
+                <a:spcPts val="1350"/>
+              </a:spcAft>
+            </a:pPr>
+            <a:r>
+              <a:rPr sz="3000" b="1" i="0">
+                <a:solidFill>
+                  <a:srgbClr val="1C1B19"/>
+                </a:solidFill>
+                <a:latin typeface="Source Serif 4"/>
+              </a:rPr>
+              <a:t>Every student in the room</a:t>
+            </a:r>
+          </a:p>
+        </p:txBody>
+      </p:sp>
+      <p:sp>
+        <p:nvSpPr>
+          <p:cNvPr id="5" name="TextBox 4"/>
+          <p:cNvSpPr txBox="1"/>
+          <p:nvPr/>
+        </p:nvSpPr>
+        <p:spPr>
+          <a:xfrm>
+            <a:off x="548640" y="1325880"/>
+            <a:ext cx="10972800" cy="365760"/>
+          </a:xfrm>
+          <a:prstGeom prst="rect">
+            <a:avLst/>
+          </a:prstGeom>
+          <a:noFill/>
+        </p:spPr>
+        <p:txBody>
+          <a:bodyPr wrap="square" anchor="t" lIns="0" rIns="0" tIns="0" bIns="0">
+            <a:spAutoFit/>
+          </a:bodyPr>
+          <a:lstStyle/>
+          <a:p>
+            <a:pPr algn="l">
+              <a:spcAft>
+                <a:spcPts val="630"/>
+              </a:spcAft>
+            </a:pPr>
+            <a:r>
+              <a:rPr sz="1400" b="0" i="0">
+                <a:solidFill>
+                  <a:srgbClr val="5D5A54"/>
+                </a:solidFill>
+                <a:latin typeface="Inter Tight"/>
+              </a:rPr>
+              <a:t>Culture, family, identity, ability and money: what to keep in mind for this topic.</a:t>
+            </a:r>
+          </a:p>
+        </p:txBody>
+      </p:sp>
+      <p:sp>
+        <p:nvSpPr>
+          <p:cNvPr id="6" name="TextBox 5"/>
+          <p:cNvSpPr txBox="1"/>
+          <p:nvPr/>
+        </p:nvSpPr>
+        <p:spPr>
+          <a:xfrm>
+            <a:off x="548640" y="1828800"/>
+            <a:ext cx="5394960" cy="4572000"/>
+          </a:xfrm>
+          <a:prstGeom prst="rect">
+            <a:avLst/>
+          </a:prstGeom>
+          <a:noFill/>
+        </p:spPr>
+        <p:txBody>
+          <a:bodyPr wrap="square" anchor="t" lIns="0" rIns="0" tIns="0" bIns="0">
+            <a:spAutoFit/>
+          </a:bodyPr>
+          <a:lstStyle/>
+          <a:p>
+            <a:pPr algn="l">
+              <a:spcAft>
+                <a:spcPts val="585"/>
+              </a:spcAft>
+            </a:pPr>
+            <a:r>
+              <a:rPr sz="1500" b="1" i="0">
+                <a:solidFill>
+                  <a:srgbClr val="1C1B19"/>
+                </a:solidFill>
+                <a:latin typeface="Source Serif 4"/>
+              </a:rPr>
+              <a:t>Learning differences and disability.</a:t>
+            </a:r>
+          </a:p>
+          <a:p>
+            <a:pPr algn="l">
+              <a:spcAft>
+                <a:spcPts val="585"/>
+              </a:spcAft>
+            </a:pPr>
+            <a:r>
+              <a:rPr sz="1300" b="0" i="0">
+                <a:solidFill>
+                  <a:srgbClr val="1C1B19"/>
+                </a:solidFill>
+                <a:latin typeface="Source Serif 4"/>
+              </a:rPr>
+              <a:t>The brain dump can be typed, spoken quietly into a phone, drawn as a map, or written as a list. Students with ADHD, dyslexia or slower processing may need more time on every activity. Measure what they can pull from memory, at whatever speed.</a:t>
+            </a:r>
+          </a:p>
+          <a:p>
+            <a:pPr algn="l">
+              <a:spcAft>
+                <a:spcPts val="585"/>
+              </a:spcAft>
+            </a:pPr>
+            <a:r>
+              <a:rPr sz="1300" b="0" i="0">
+                <a:solidFill>
+                  <a:srgbClr val="1C1B19"/>
+                </a:solidFill>
+                <a:latin typeface="Source Serif 4"/>
+              </a:rPr>
+              <a:t/>
+            </a:r>
+          </a:p>
+          <a:p>
+            <a:pPr algn="l">
+              <a:spcAft>
+                <a:spcPts val="585"/>
+              </a:spcAft>
+            </a:pPr>
+            <a:r>
+              <a:rPr sz="1500" b="1" i="0">
+                <a:solidFill>
+                  <a:srgbClr val="1C1B19"/>
+                </a:solidFill>
+                <a:latin typeface="Source Serif 4"/>
+              </a:rPr>
+              <a:t>Not every student has the same study time.</a:t>
+            </a:r>
+          </a:p>
+          <a:p>
+            <a:pPr algn="l">
+              <a:spcAft>
+                <a:spcPts val="585"/>
+              </a:spcAft>
+            </a:pPr>
+            <a:r>
+              <a:rPr sz="1300" b="0" i="0">
+                <a:solidFill>
+                  <a:srgbClr val="1C1B19"/>
+                </a:solidFill>
+                <a:latin typeface="Source Serif 4"/>
+              </a:rPr>
+              <a:t>Some students work, ride a long bus, or watch younger siblings after school. "Count questions, not hours" helps here: short quizzing sessions fit a tight evening. Every method in this lesson is free, and released practice questions are free online.</a:t>
+            </a:r>
+          </a:p>
+          <a:p>
+            <a:pPr algn="l">
+              <a:spcAft>
+                <a:spcPts val="585"/>
+              </a:spcAft>
+            </a:pPr>
+            <a:r>
+              <a:rPr sz="1300" b="0" i="0">
+                <a:solidFill>
+                  <a:srgbClr val="1C1B19"/>
+                </a:solidFill>
+                <a:latin typeface="Source Serif 4"/>
+              </a:rPr>
+              <a:t/>
+            </a:r>
+          </a:p>
+          <a:p>
+            <a:pPr algn="l">
+              <a:spcAft>
+                <a:spcPts val="585"/>
+              </a:spcAft>
+            </a:pPr>
+            <a:r>
+              <a:rPr sz="1500" b="1" i="0">
+                <a:solidFill>
+                  <a:srgbClr val="1C1B19"/>
+                </a:solidFill>
+                <a:latin typeface="Source Serif 4"/>
+              </a:rPr>
+              <a:t>A quiet place isn't a given.</a:t>
+            </a:r>
+          </a:p>
+          <a:p>
+            <a:pPr algn="l">
+              <a:spcAft>
+                <a:spcPts val="585"/>
+              </a:spcAft>
+            </a:pPr>
+            <a:r>
+              <a:rPr sz="1300" b="0" i="0">
+                <a:solidFill>
+                  <a:srgbClr val="1C1B19"/>
+                </a:solidFill>
+                <a:latin typeface="Source Serif 4"/>
+              </a:rPr>
+              <a:t>Some students share a room or study in a busy kitchen. Mention the school library and any after-school study space. A brain dump works on a bus or in a hallway.</a:t>
+            </a:r>
+          </a:p>
+          <a:p>
+            <a:pPr algn="l">
+              <a:spcAft>
+                <a:spcPts val="585"/>
+              </a:spcAft>
+            </a:pPr>
+            <a:r>
+              <a:rPr sz="1300" b="0" i="0">
+                <a:solidFill>
+                  <a:srgbClr val="1C1B19"/>
+                </a:solidFill>
+                <a:latin typeface="Source Serif 4"/>
+              </a:rPr>
+              <a:t/>
+            </a:r>
+          </a:p>
+        </p:txBody>
+      </p:sp>
+      <p:sp>
+        <p:nvSpPr>
+          <p:cNvPr id="7" name="TextBox 6"/>
+          <p:cNvSpPr txBox="1"/>
+          <p:nvPr/>
+        </p:nvSpPr>
+        <p:spPr>
+          <a:xfrm>
+            <a:off x="6217920" y="1828800"/>
+            <a:ext cx="5394960" cy="4572000"/>
+          </a:xfrm>
+          <a:prstGeom prst="rect">
+            <a:avLst/>
+          </a:prstGeom>
+          <a:noFill/>
+        </p:spPr>
+        <p:txBody>
+          <a:bodyPr wrap="square" anchor="t" lIns="0" rIns="0" tIns="0" bIns="0">
+            <a:spAutoFit/>
+          </a:bodyPr>
+          <a:lstStyle/>
+          <a:p>
+            <a:pPr algn="l">
+              <a:spcAft>
+                <a:spcPts val="585"/>
+              </a:spcAft>
+            </a:pPr>
+            <a:r>
+              <a:rPr sz="1500" b="1" i="0">
+                <a:solidFill>
+                  <a:srgbClr val="1C1B19"/>
+                </a:solidFill>
+                <a:latin typeface="Source Serif 4"/>
+              </a:rPr>
+              <a:t>Who quizzes you can be anyone.</a:t>
+            </a:r>
+          </a:p>
+          <a:p>
+            <a:pPr algn="l">
+              <a:spcAft>
+                <a:spcPts val="585"/>
+              </a:spcAft>
+            </a:pPr>
+            <a:r>
+              <a:rPr sz="1300" b="0" i="0">
+                <a:solidFill>
+                  <a:srgbClr val="1C1B19"/>
+                </a:solidFill>
+                <a:latin typeface="Source Serif 4"/>
+              </a:rPr>
+              <a:t>Don't assume a parent is home to help. A sibling, a grandparent, a friend on a call, or a stack of flashcards all work. Rosa's scenario has a grandmother in it; swap in whatever fits your students.</a:t>
+            </a:r>
+          </a:p>
+          <a:p>
+            <a:pPr algn="l">
+              <a:spcAft>
+                <a:spcPts val="585"/>
+              </a:spcAft>
+            </a:pPr>
+            <a:r>
+              <a:rPr sz="1300" b="0" i="0">
+                <a:solidFill>
+                  <a:srgbClr val="1C1B19"/>
+                </a:solidFill>
+                <a:latin typeface="Source Serif 4"/>
+              </a:rPr>
+              <a:t/>
+            </a:r>
+          </a:p>
+          <a:p>
+            <a:pPr algn="l">
+              <a:spcAft>
+                <a:spcPts val="585"/>
+              </a:spcAft>
+            </a:pPr>
+            <a:r>
+              <a:rPr sz="1500" b="1" i="0">
+                <a:solidFill>
+                  <a:srgbClr val="1C1B19"/>
+                </a:solidFill>
+                <a:latin typeface="Source Serif 4"/>
+              </a:rPr>
+              <a:t>Families hold different views on effort.</a:t>
+            </a:r>
+          </a:p>
+          <a:p>
+            <a:pPr algn="l">
+              <a:spcAft>
+                <a:spcPts val="585"/>
+              </a:spcAft>
+            </a:pPr>
+            <a:r>
+              <a:rPr sz="1300" b="0" i="0">
+                <a:solidFill>
+                  <a:srgbClr val="1C1B19"/>
+                </a:solidFill>
+                <a:latin typeface="Source Serif 4"/>
+              </a:rPr>
+              <a:t>For some families, long hours at the desk are how effort shows. Respect that. The point is to make those hours count. Ask students how studying is talked about at home, as a private thought.</a:t>
+            </a:r>
+          </a:p>
+          <a:p>
+            <a:pPr algn="l">
+              <a:spcAft>
+                <a:spcPts val="585"/>
+              </a:spcAft>
+            </a:pPr>
+            <a:r>
+              <a:rPr sz="1300" b="0" i="0">
+                <a:solidFill>
+                  <a:srgbClr val="1C1B19"/>
+                </a:solidFill>
+                <a:latin typeface="Source Serif 4"/>
+              </a:rPr>
+              <a:t/>
+            </a:r>
+          </a:p>
+          <a:p>
+            <a:pPr algn="l">
+              <a:spcAft>
+                <a:spcPts val="585"/>
+              </a:spcAft>
+            </a:pPr>
+            <a:r>
+              <a:rPr sz="1500" b="1" i="0">
+                <a:solidFill>
+                  <a:srgbClr val="1C1B19"/>
+                </a:solidFill>
+                <a:latin typeface="Source Serif 4"/>
+              </a:rPr>
+              <a:t>Language and the calendar.</a:t>
+            </a:r>
+          </a:p>
+          <a:p>
+            <a:pPr algn="l">
+              <a:spcAft>
+                <a:spcPts val="585"/>
+              </a:spcAft>
+            </a:pPr>
+            <a:r>
+              <a:rPr sz="1300" b="0" i="0">
+                <a:solidFill>
+                  <a:srgbClr val="1C1B19"/>
+                </a:solidFill>
+                <a:latin typeface="Source Serif 4"/>
+              </a:rPr>
+              <a:t>Students learning English can brain dump in any language, then check against notes in English. Religious holidays, fasting and family events can block whole days; a spaced plan moves around them more easily than a cram can.</a:t>
+            </a:r>
+          </a:p>
+          <a:p>
+            <a:pPr algn="l">
+              <a:spcAft>
+                <a:spcPts val="585"/>
+              </a:spcAft>
+            </a:pPr>
+            <a:r>
+              <a:rPr sz="1300" b="0" i="0">
+                <a:solidFill>
+                  <a:srgbClr val="1C1B19"/>
+                </a:solidFill>
+                <a:latin typeface="Source Serif 4"/>
+              </a:rPr>
+              <a:t/>
+            </a:r>
+          </a:p>
+        </p:txBody>
+      </p:sp>
+    </p:spTree>
+  </p:cSld>
+  <p:clrMapOvr>
+    <a:masterClrMapping/>
+  </p:clrMapOvr>
+</p:sld>
+</file>
+
+<file path=ppt/slides/slide15.xml><?xml version="1.0" encoding="utf-8"?>
+<p:sld xmlns:a="http://schemas.openxmlformats.org/drawingml/2006/main" xmlns:p="http://schemas.openxmlformats.org/presentationml/2006/main" xmlns:r="http://schemas.openxmlformats.org/officeDocument/2006/relationships" show="0">
+  <p:cSld>
+    <p:bg>
+      <p:bgPr>
+        <a:solidFill>
+          <a:srgbClr val="EEEBE4"/>
+        </a:solidFill>
+        <a:effectLst/>
+      </p:bgPr>
+    </p:bg>
+    <p:spTree>
+      <p:nvGrpSpPr>
+        <p:cNvPr id="1" name=""/>
+        <p:cNvGrpSpPr/>
+        <p:nvPr/>
+      </p:nvGrpSpPr>
+      <p:grpSpPr/>
+      <p:sp>
+        <p:nvSpPr>
+          <p:cNvPr id="2" name="Rectangle 1"/>
+          <p:cNvSpPr/>
+          <p:nvPr/>
+        </p:nvSpPr>
+        <p:spPr>
+          <a:xfrm>
+            <a:off x="0" y="0"/>
+            <a:ext cx="12191695" cy="384048"/>
+          </a:xfrm>
+          <a:prstGeom prst="rect">
+            <a:avLst/>
+          </a:prstGeom>
+          <a:solidFill>
+            <a:srgbClr val="0B2D5B"/>
+          </a:solidFill>
+          <a:ln>
+            <a:noFill/>
+          </a:ln>
+          <a:effectLst/>
+        </p:spPr>
+        <p:style>
+          <a:lnRef idx="1">
+            <a:schemeClr val="accent1"/>
+          </a:lnRef>
+          <a:fillRef idx="3">
+            <a:schemeClr val="accent1"/>
+          </a:fillRef>
+          <a:effectRef idx="2">
+            <a:schemeClr val="accent1"/>
+          </a:effectRef>
+          <a:fontRef idx="minor">
+            <a:schemeClr val="lt1"/>
+          </a:fontRef>
+        </p:style>
+        <p:txBody>
+          <a:bodyPr rtlCol="0" anchor="ctr"/>
+          <a:lstStyle/>
+          <a:p>
+            <a:pPr algn="ctr"/>
+          </a:p>
+        </p:txBody>
+      </p:sp>
+      <p:sp>
+        <p:nvSpPr>
+          <p:cNvPr id="3" name="TextBox 2"/>
+          <p:cNvSpPr txBox="1"/>
+          <p:nvPr/>
+        </p:nvSpPr>
+        <p:spPr>
+          <a:xfrm>
+            <a:off x="548640" y="100584"/>
+            <a:ext cx="10972800" cy="274320"/>
+          </a:xfrm>
+          <a:prstGeom prst="rect">
+            <a:avLst/>
+          </a:prstGeom>
+          <a:noFill/>
+        </p:spPr>
+        <p:txBody>
+          <a:bodyPr wrap="square" anchor="t" lIns="0" rIns="0" tIns="0" bIns="0">
+            <a:spAutoFit/>
+          </a:bodyPr>
+          <a:lstStyle/>
+          <a:p>
+            <a:pPr algn="l">
+              <a:spcAft>
+                <a:spcPts val="495"/>
+              </a:spcAft>
+            </a:pPr>
+            <a:r>
+              <a:rPr sz="1100" b="1" i="0">
+                <a:solidFill>
+                  <a:srgbClr val="FFFFFF"/>
+                </a:solidFill>
+                <a:latin typeface="Inter Tight"/>
+              </a:rPr>
+              <a:t>TEACHER PAGE  ·  skipped when you present  ·  Background</a:t>
+            </a:r>
+          </a:p>
+        </p:txBody>
+      </p:sp>
+      <p:sp>
+        <p:nvSpPr>
+          <p:cNvPr id="4" name="TextBox 3"/>
+          <p:cNvSpPr txBox="1"/>
+          <p:nvPr/>
+        </p:nvSpPr>
+        <p:spPr>
+          <a:xfrm>
+            <a:off x="548640" y="685800"/>
+            <a:ext cx="10972800" cy="640080"/>
+          </a:xfrm>
+          <a:prstGeom prst="rect">
+            <a:avLst/>
+          </a:prstGeom>
+          <a:noFill/>
+        </p:spPr>
+        <p:txBody>
+          <a:bodyPr wrap="square" anchor="t" lIns="0" rIns="0" tIns="0" bIns="0">
+            <a:spAutoFit/>
+          </a:bodyPr>
+          <a:lstStyle/>
+          <a:p>
+            <a:pPr algn="l">
+              <a:spcAft>
+                <a:spcPts val="1350"/>
+              </a:spcAft>
+            </a:pPr>
+            <a:r>
+              <a:rPr sz="3000" b="1" i="0">
+                <a:solidFill>
+                  <a:srgbClr val="1C1B19"/>
+                </a:solidFill>
+                <a:latin typeface="Source Serif 4"/>
+              </a:rPr>
+              <a:t>What the research says</a:t>
+            </a:r>
+          </a:p>
+        </p:txBody>
+      </p:sp>
+      <p:sp>
+        <p:nvSpPr>
+          <p:cNvPr id="5" name="TextBox 4"/>
+          <p:cNvSpPr txBox="1"/>
+          <p:nvPr/>
+        </p:nvSpPr>
+        <p:spPr>
+          <a:xfrm>
+            <a:off x="548640" y="1463040"/>
+            <a:ext cx="5394960" cy="4937760"/>
+          </a:xfrm>
+          <a:prstGeom prst="rect">
+            <a:avLst/>
+          </a:prstGeom>
+          <a:noFill/>
+        </p:spPr>
+        <p:txBody>
+          <a:bodyPr wrap="square" anchor="t" lIns="0" rIns="0" tIns="0" bIns="0">
+            <a:spAutoFit/>
+          </a:bodyPr>
+          <a:lstStyle/>
+          <a:p>
+            <a:pPr algn="l">
+              <a:spcAft>
+                <a:spcPts val="585"/>
+              </a:spcAft>
+            </a:pPr>
+            <a:r>
+              <a:rPr sz="1300" b="0" i="0">
+                <a:solidFill>
+                  <a:srgbClr val="1C1B19"/>
+                </a:solidFill>
+                <a:latin typeface="Source Serif 4"/>
+              </a:rPr>
+              <a:t>Students who reread a passage did best on a test five minutes later. Students who read it once and then wrote down all they could remember beat them by 14 points at two days and at one week. The rereaders predicted they'd remember the most and remembered the least.</a:t>
+            </a:r>
+          </a:p>
+          <a:p>
+            <a:pPr algn="l">
+              <a:spcAft>
+                <a:spcPts val="585"/>
+              </a:spcAft>
+            </a:pPr>
+            <a:r>
+              <a:rPr sz="1050" b="0" i="0">
+                <a:solidFill>
+                  <a:srgbClr val="5D5A54"/>
+                </a:solidFill>
+                <a:latin typeface="Inter Tight"/>
+              </a:rPr>
+              <a:t>Roediger and Karpicke, Psychological Science, 2006</a:t>
+            </a:r>
+          </a:p>
+          <a:p>
+            <a:pPr algn="l">
+              <a:spcAft>
+                <a:spcPts val="585"/>
+              </a:spcAft>
+            </a:pPr>
+            <a:r>
+              <a:rPr sz="1300" b="0" i="0">
+                <a:solidFill>
+                  <a:srgbClr val="1C1B19"/>
+                </a:solidFill>
+                <a:latin typeface="Source Serif 4"/>
+              </a:rPr>
+              <a:t>A review of hundreds of studies on ten common study techniques rated only two "high utility": practice testing and spreading study out over time. Rereading, highlighting and summarizing rated low.</a:t>
+            </a:r>
+          </a:p>
+          <a:p>
+            <a:pPr algn="l">
+              <a:spcAft>
+                <a:spcPts val="585"/>
+              </a:spcAft>
+            </a:pPr>
+            <a:r>
+              <a:rPr sz="1050" b="0" i="0">
+                <a:solidFill>
+                  <a:srgbClr val="5D5A54"/>
+                </a:solidFill>
+                <a:latin typeface="Inter Tight"/>
+              </a:rPr>
+              <a:t>Dunlosky et al., Psychological Science in the Public Interest, 2013</a:t>
+            </a:r>
+          </a:p>
+          <a:p>
+            <a:pPr algn="l">
+              <a:spcAft>
+                <a:spcPts val="585"/>
+              </a:spcAft>
+            </a:pPr>
+            <a:r>
+              <a:rPr sz="1300" b="0" i="0">
+                <a:solidFill>
+                  <a:srgbClr val="1C1B19"/>
+                </a:solidFill>
+                <a:latin typeface="Source Serif 4"/>
+              </a:rPr>
+              <a:t>About 84% of college students said they reread notes or textbooks to study. About 11% practiced recalling information, and only 1% called that their main method.</a:t>
+            </a:r>
+          </a:p>
+          <a:p>
+            <a:pPr algn="l">
+              <a:spcAft>
+                <a:spcPts val="585"/>
+              </a:spcAft>
+            </a:pPr>
+            <a:r>
+              <a:rPr sz="1050" b="0" i="0">
+                <a:solidFill>
+                  <a:srgbClr val="5D5A54"/>
+                </a:solidFill>
+                <a:latin typeface="Inter Tight"/>
+              </a:rPr>
+              <a:t>Karpicke, Butler and Roediger, Memory, 2009</a:t>
+            </a:r>
+          </a:p>
+          <a:p>
+            <a:pPr algn="l">
+              <a:spcAft>
+                <a:spcPts val="585"/>
+              </a:spcAft>
+            </a:pPr>
+            <a:r>
+              <a:rPr sz="1300" b="0" i="0">
+                <a:solidFill>
+                  <a:srgbClr val="1C1B19"/>
+                </a:solidFill>
+                <a:latin typeface="Source Serif 4"/>
+              </a:rPr>
+              <a:t>"Desirable difficulties": recalling from memory, waiting between sessions and mixing problem types feel slower in the moment, and that effort builds memory you can use later.</a:t>
+            </a:r>
+          </a:p>
+          <a:p>
+            <a:pPr algn="l">
+              <a:spcAft>
+                <a:spcPts val="585"/>
+              </a:spcAft>
+            </a:pPr>
+            <a:r>
+              <a:rPr sz="1050" b="0" i="0">
+                <a:solidFill>
+                  <a:srgbClr val="5D5A54"/>
+                </a:solidFill>
+                <a:latin typeface="Inter Tight"/>
+              </a:rPr>
+              <a:t>Bjork, 1994</a:t>
+            </a:r>
+          </a:p>
+        </p:txBody>
+      </p:sp>
+      <p:sp>
+        <p:nvSpPr>
+          <p:cNvPr id="6" name="TextBox 5"/>
+          <p:cNvSpPr txBox="1"/>
+          <p:nvPr/>
+        </p:nvSpPr>
+        <p:spPr>
+          <a:xfrm>
+            <a:off x="6217920" y="1463040"/>
+            <a:ext cx="5394960" cy="4937760"/>
+          </a:xfrm>
+          <a:prstGeom prst="rect">
+            <a:avLst/>
+          </a:prstGeom>
+          <a:noFill/>
+        </p:spPr>
+        <p:txBody>
+          <a:bodyPr wrap="square" anchor="t" lIns="0" rIns="0" tIns="0" bIns="0">
+            <a:spAutoFit/>
+          </a:bodyPr>
+          <a:lstStyle/>
+          <a:p>
+            <a:pPr algn="l">
+              <a:spcAft>
+                <a:spcPts val="585"/>
+              </a:spcAft>
+            </a:pPr>
+            <a:r>
+              <a:rPr sz="1300" b="0" i="0">
+                <a:solidFill>
+                  <a:srgbClr val="1C1B19"/>
+                </a:solidFill>
+                <a:latin typeface="Source Serif 4"/>
+              </a:rPr>
+              <a:t>Students who practiced math problems in blocks got 89% right during practice versus 60% for mixed practice. A week later the mixed group scored 63% and the blocked group 20%. A small study; mixed practice has held up in classrooms since.</a:t>
+            </a:r>
+          </a:p>
+          <a:p>
+            <a:pPr algn="l">
+              <a:spcAft>
+                <a:spcPts val="585"/>
+              </a:spcAft>
+            </a:pPr>
+            <a:r>
+              <a:rPr sz="1050" b="0" i="0">
+                <a:solidFill>
+                  <a:srgbClr val="5D5A54"/>
+                </a:solidFill>
+                <a:latin typeface="Inter Tight"/>
+              </a:rPr>
+              <a:t>Rohrer and Taylor, Instructional Science, 2007</a:t>
+            </a:r>
+          </a:p>
+          <a:p>
+            <a:pPr algn="l">
+              <a:spcAft>
+                <a:spcPts val="585"/>
+              </a:spcAft>
+            </a:pPr>
+            <a:r>
+              <a:rPr sz="1300" b="0" i="0">
+                <a:solidFill>
+                  <a:srgbClr val="1C1B19"/>
+                </a:solidFill>
+                <a:latin typeface="Source Serif 4"/>
+              </a:rPr>
+              <a:t>In a study of more than 1,350 people, the best gap between study sessions grew with the time until the test: a day or two for a test a week away, closer to a month for a test a year away.</a:t>
+            </a:r>
+          </a:p>
+          <a:p>
+            <a:pPr algn="l">
+              <a:spcAft>
+                <a:spcPts val="585"/>
+              </a:spcAft>
+            </a:pPr>
+            <a:r>
+              <a:rPr sz="1050" b="0" i="0">
+                <a:solidFill>
+                  <a:srgbClr val="5D5A54"/>
+                </a:solidFill>
+                <a:latin typeface="Inter Tight"/>
+              </a:rPr>
+              <a:t>Cepeda et al., Psychological Science, 2008</a:t>
+            </a:r>
+          </a:p>
+          <a:p>
+            <a:pPr algn="l">
+              <a:spcAft>
+                <a:spcPts val="585"/>
+              </a:spcAft>
+            </a:pPr>
+            <a:r>
+              <a:rPr sz="1300" b="0" i="0">
+                <a:solidFill>
+                  <a:srgbClr val="1C1B19"/>
+                </a:solidFill>
+                <a:latin typeface="Source Serif 4"/>
+              </a:rPr>
+              <a:t>During sleep the brain replays and strengthens what was learned that day. Sleep is an active part of memory consolidation.</a:t>
+            </a:r>
+          </a:p>
+          <a:p>
+            <a:pPr algn="l">
+              <a:spcAft>
+                <a:spcPts val="585"/>
+              </a:spcAft>
+            </a:pPr>
+            <a:r>
+              <a:rPr sz="1050" b="0" i="0">
+                <a:solidFill>
+                  <a:srgbClr val="5D5A54"/>
+                </a:solidFill>
+                <a:latin typeface="Inter Tight"/>
+              </a:rPr>
+              <a:t>Diekelmann and Born, Nature Reviews Neuroscience, 2010</a:t>
+            </a:r>
+          </a:p>
+          <a:p>
+            <a:pPr algn="l">
+              <a:spcAft>
+                <a:spcPts val="585"/>
+              </a:spcAft>
+            </a:pPr>
+            <a:r>
+              <a:rPr sz="1300" b="0" i="0">
+                <a:solidFill>
+                  <a:srgbClr val="1C1B19"/>
+                </a:solidFill>
+                <a:latin typeface="Source Serif 4"/>
+              </a:rPr>
+              <a:t>No good evidence that teaching to a person's preferred "learning style" improves learning.</a:t>
+            </a:r>
+          </a:p>
+          <a:p>
+            <a:pPr algn="l">
+              <a:spcAft>
+                <a:spcPts val="585"/>
+              </a:spcAft>
+            </a:pPr>
+            <a:r>
+              <a:rPr sz="1050" b="0" i="0">
+                <a:solidFill>
+                  <a:srgbClr val="5D5A54"/>
+                </a:solidFill>
+                <a:latin typeface="Inter Tight"/>
+              </a:rPr>
+              <a:t>Pashler et al., Psychological Science in the Public Interest, 2008</a:t>
+            </a:r>
+          </a:p>
+        </p:txBody>
+      </p:sp>
+    </p:spTree>
+  </p:cSld>
+  <p:clrMapOvr>
+    <a:masterClrMapping/>
+  </p:clrMapOvr>
+</p:sld>
+</file>
+
+<file path=ppt/slides/slide2.xml><?xml version="1.0" encoding="utf-8"?>
+<p:sld xmlns:a="http://schemas.openxmlformats.org/drawingml/2006/main" xmlns:p="http://schemas.openxmlformats.org/presentationml/2006/main" xmlns:r="http://schemas.openxmlformats.org/officeDocument/2006/relationships">
+  <p:cSld>
+    <p:bg>
+      <p:bgPr>
+        <a:solidFill>
+          <a:srgbClr val="0B2D5B"/>
+        </a:solidFill>
+        <a:effectLst/>
+      </p:bgPr>
+    </p:bg>
+    <p:spTree>
+      <p:nvGrpSpPr>
+        <p:cNvPr id="1" name=""/>
+        <p:cNvGrpSpPr/>
+        <p:nvPr/>
+      </p:nvGrpSpPr>
+      <p:grpSpPr/>
+      <p:sp>
+        <p:nvSpPr>
+          <p:cNvPr id="2" name="Rectangle 1"/>
+          <p:cNvSpPr/>
+          <p:nvPr/>
+        </p:nvSpPr>
+        <p:spPr>
+          <a:xfrm>
+            <a:off x="548640" y="502920"/>
+            <a:ext cx="457200" cy="54864"/>
+          </a:xfrm>
+          <a:prstGeom prst="rect">
+            <a:avLst/>
+          </a:prstGeom>
+          <a:solidFill>
+            <a:srgbClr val="F47B20"/>
+          </a:solidFill>
+          <a:ln>
+            <a:noFill/>
+          </a:ln>
+          <a:effectLst/>
+        </p:spPr>
+        <p:style>
+          <a:lnRef idx="1">
+            <a:schemeClr val="accent1"/>
+          </a:lnRef>
+          <a:fillRef idx="3">
+            <a:schemeClr val="accent1"/>
+          </a:fillRef>
+          <a:effectRef idx="2">
+            <a:schemeClr val="accent1"/>
+          </a:effectRef>
+          <a:fontRef idx="minor">
+            <a:schemeClr val="lt1"/>
+          </a:fontRef>
+        </p:style>
+        <p:txBody>
+          <a:bodyPr rtlCol="0" anchor="ctr"/>
+          <a:lstStyle/>
+          <a:p>
+            <a:pPr algn="ctr"/>
+          </a:p>
+        </p:txBody>
+      </p:sp>
+      <p:sp>
+        <p:nvSpPr>
+          <p:cNvPr id="3" name="TextBox 2"/>
+          <p:cNvSpPr txBox="1"/>
+          <p:nvPr/>
+        </p:nvSpPr>
+        <p:spPr>
+          <a:xfrm>
+            <a:off x="1143000" y="393192"/>
+            <a:ext cx="8229600" cy="274320"/>
+          </a:xfrm>
+          <a:prstGeom prst="rect">
+            <a:avLst/>
+          </a:prstGeom>
+          <a:noFill/>
+        </p:spPr>
+        <p:txBody>
+          <a:bodyPr wrap="square" anchor="t" lIns="0" rIns="0" tIns="0" bIns="0">
+            <a:spAutoFit/>
+          </a:bodyPr>
+          <a:lstStyle/>
+          <a:p>
+            <a:pPr algn="l">
+              <a:spcAft>
+                <a:spcPts val="540"/>
+              </a:spcAft>
+            </a:pPr>
+            <a:r>
+              <a:rPr sz="1200" b="1" i="0">
+                <a:solidFill>
+                  <a:srgbClr val="5D5A54"/>
+                </a:solidFill>
+                <a:latin typeface="Inter Tight"/>
+              </a:rPr>
+              <a:t>STUDY SMARTER, NOT LONGER</a:t>
+            </a:r>
+          </a:p>
+        </p:txBody>
+      </p:sp>
+      <p:sp>
+        <p:nvSpPr>
+          <p:cNvPr id="4" name="TextBox 3"/>
+          <p:cNvSpPr txBox="1"/>
+          <p:nvPr/>
+        </p:nvSpPr>
+        <p:spPr>
+          <a:xfrm>
+            <a:off x="8229600" y="6400800"/>
+            <a:ext cx="3410712" cy="274320"/>
+          </a:xfrm>
+          <a:prstGeom prst="rect">
+            <a:avLst/>
+          </a:prstGeom>
+          <a:noFill/>
+        </p:spPr>
+        <p:txBody>
+          <a:bodyPr wrap="square" anchor="t" lIns="0" rIns="0" tIns="0" bIns="0">
+            <a:spAutoFit/>
+          </a:bodyPr>
+          <a:lstStyle/>
+          <a:p>
+            <a:pPr algn="r">
+              <a:spcAft>
+                <a:spcPts val="450"/>
+              </a:spcAft>
+            </a:pPr>
+            <a:r>
+              <a:rPr sz="1000" b="0" i="0">
+                <a:solidFill>
+                  <a:srgbClr val="5D5A54"/>
+                </a:solidFill>
+                <a:latin typeface="Inter Tight"/>
+              </a:rPr>
+              <a:t>Beaver Counseling</a:t>
+            </a:r>
+          </a:p>
+        </p:txBody>
+      </p:sp>
+      <p:sp>
+        <p:nvSpPr>
+          <p:cNvPr id="5" name="TextBox 4"/>
+          <p:cNvSpPr txBox="1"/>
+          <p:nvPr/>
+        </p:nvSpPr>
+        <p:spPr>
+          <a:xfrm>
+            <a:off x="822960" y="2011680"/>
+            <a:ext cx="10515600" cy="1463040"/>
+          </a:xfrm>
+          <a:prstGeom prst="rect">
+            <a:avLst/>
+          </a:prstGeom>
+          <a:noFill/>
+        </p:spPr>
+        <p:txBody>
+          <a:bodyPr wrap="square" anchor="b" lIns="0" rIns="0" tIns="0" bIns="0">
+            <a:spAutoFit/>
+          </a:bodyPr>
+          <a:lstStyle/>
+          <a:p>
+            <a:pPr algn="l">
+              <a:spcAft>
+                <a:spcPts val="2700"/>
+              </a:spcAft>
+            </a:pPr>
+            <a:r>
+              <a:rPr sz="6000" b="1" i="0">
+                <a:solidFill>
+                  <a:srgbClr val="FFFFFF"/>
+                </a:solidFill>
+                <a:latin typeface="Source Serif 4"/>
+              </a:rPr>
+              <a:t>Study Smarter, Not Longer</a:t>
+            </a:r>
+          </a:p>
+        </p:txBody>
+      </p:sp>
+      <p:sp>
+        <p:nvSpPr>
+          <p:cNvPr id="6" name="TextBox 5"/>
+          <p:cNvSpPr txBox="1"/>
+          <p:nvPr/>
+        </p:nvSpPr>
+        <p:spPr>
+          <a:xfrm>
+            <a:off x="822960" y="3611880"/>
+            <a:ext cx="10515600" cy="914400"/>
+          </a:xfrm>
+          <a:prstGeom prst="rect">
+            <a:avLst/>
+          </a:prstGeom>
+          <a:noFill/>
+        </p:spPr>
+        <p:txBody>
+          <a:bodyPr wrap="square" anchor="t" lIns="0" rIns="0" tIns="0" bIns="0">
+            <a:spAutoFit/>
+          </a:bodyPr>
+          <a:lstStyle/>
+          <a:p>
+            <a:pPr algn="l">
+              <a:spcAft>
+                <a:spcPts val="1080"/>
+              </a:spcAft>
+            </a:pPr>
+            <a:r>
+              <a:rPr sz="2400" b="0" i="1">
+                <a:solidFill>
+                  <a:srgbClr val="E8E4DA"/>
+                </a:solidFill>
+                <a:latin typeface="Source Serif 4"/>
+              </a:rPr>
+              <a:t>The study methods that feel best usually work worst.</a:t>
+            </a:r>
+          </a:p>
+        </p:txBody>
+      </p:sp>
+      <p:sp>
+        <p:nvSpPr>
+          <p:cNvPr id="7" name="TextBox 6"/>
+          <p:cNvSpPr txBox="1"/>
+          <p:nvPr/>
+        </p:nvSpPr>
+        <p:spPr>
+          <a:xfrm>
+            <a:off x="822960" y="6035040"/>
+            <a:ext cx="7315200" cy="365760"/>
+          </a:xfrm>
+          <a:prstGeom prst="rect">
+            <a:avLst/>
+          </a:prstGeom>
+          <a:noFill/>
+        </p:spPr>
+        <p:txBody>
+          <a:bodyPr wrap="square" anchor="t" lIns="0" rIns="0" tIns="0" bIns="0">
+            <a:spAutoFit/>
+          </a:bodyPr>
+          <a:lstStyle/>
+          <a:p>
+            <a:pPr algn="l">
+              <a:spcAft>
+                <a:spcPts val="585"/>
+              </a:spcAft>
+            </a:pPr>
+            <a:r>
+              <a:rPr sz="1300" b="0" i="0">
+                <a:solidFill>
+                  <a:srgbClr val="E8E4DA"/>
+                </a:solidFill>
+                <a:latin typeface="Inter Tight"/>
+              </a:rPr>
+              <a:t>Beaver Upper School · Counseling</a:t>
+            </a:r>
+          </a:p>
+        </p:txBody>
+      </p:sp>
+    </p:spTree>
+  </p:cSld>
+  <p:clrMapOvr>
+    <a:masterClrMapping/>
+  </p:clrMapOvr>
+</p:sld>
+</file>
+
+<file path=ppt/slides/slide3.xml><?xml version="1.0" encoding="utf-8"?>
 <p:sld xmlns:a="http://schemas.openxmlformats.org/drawingml/2006/main" xmlns:p="http://schemas.openxmlformats.org/presentationml/2006/main" xmlns:r="http://schemas.openxmlformats.org/officeDocument/2006/relationships">
   <p:cSld>
     <p:bg>
@@ -5692,7 +8025,7 @@
                 </a:solidFill>
                 <a:latin typeface="Inter Tight"/>
               </a:rPr>
-              <a:t>THREE STUDY PLANS</a:t>
+              <a:t>MYTH OR FACT?</a:t>
             </a:r>
           </a:p>
         </p:txBody>
@@ -5745,7 +8078,7 @@
         <p:spPr>
           <a:xfrm>
             <a:off x="822960" y="1005840"/>
-            <a:ext cx="10515600" cy="914400"/>
+            <a:ext cx="10515600" cy="1097280"/>
           </a:xfrm>
           <a:prstGeom prst="rect">
             <a:avLst/>
@@ -5760,77 +8093,31 @@
           <a:p>
             <a:pPr algn="l">
               <a:spcAft>
-                <a:spcPts val="1530"/>
-              </a:spcAft>
-            </a:pPr>
-            <a:r>
-              <a:rPr sz="3400" b="1" i="0">
+                <a:spcPts val="1620"/>
+              </a:spcAft>
+            </a:pPr>
+            <a:r>
+              <a:rPr sz="3600" b="1" i="0">
                 <a:solidFill>
                   <a:srgbClr val="1C1B19"/>
                 </a:solidFill>
                 <a:latin typeface="Source Serif 4"/>
               </a:rPr>
-              <a:t>Which plan would you change, and how?</a:t>
-            </a:r>
-          </a:p>
-        </p:txBody>
-      </p:sp>
-      <p:sp>
-        <p:nvSpPr>
-          <p:cNvPr id="6" name="Rectangle 5"/>
-          <p:cNvSpPr/>
-          <p:nvPr/>
-        </p:nvSpPr>
-        <p:spPr>
-          <a:xfrm>
-            <a:off x="822960" y="2103120"/>
-            <a:ext cx="3322320" cy="3840480"/>
-          </a:xfrm>
-          <a:prstGeom prst="rect">
-            <a:avLst/>
-          </a:prstGeom>
-          <a:solidFill>
-            <a:srgbClr val="FFFFFF"/>
-          </a:solidFill>
-          <a:ln w="15875">
-            <a:solidFill>
-              <a:srgbClr val="D8D2C6"/>
-            </a:solidFill>
-          </a:ln>
-          <a:effectLst/>
-        </p:spPr>
-        <p:style>
-          <a:lnRef idx="1">
-            <a:schemeClr val="accent1"/>
-          </a:lnRef>
-          <a:fillRef idx="3">
-            <a:schemeClr val="accent1"/>
-          </a:fillRef>
-          <a:effectRef idx="2">
-            <a:schemeClr val="accent1"/>
-          </a:effectRef>
-          <a:fontRef idx="minor">
-            <a:schemeClr val="lt1"/>
-          </a:fontRef>
-        </p:style>
-        <p:txBody>
-          <a:bodyPr rtlCol="0" anchor="ctr"/>
-          <a:lstStyle/>
-          <a:p>
-            <a:pPr algn="ctr"/>
-          </a:p>
-        </p:txBody>
-      </p:sp>
-      <p:sp>
-        <p:nvSpPr>
-          <p:cNvPr id="7" name="TextBox 6"/>
+              <a:t>Stand up if you think it's a fact.</a:t>
+            </a:r>
+          </a:p>
+        </p:txBody>
+      </p:sp>
+      <p:sp>
+        <p:nvSpPr>
+          <p:cNvPr id="6" name="TextBox 5"/>
           <p:cNvSpPr txBox="1"/>
           <p:nvPr/>
         </p:nvSpPr>
         <p:spPr>
           <a:xfrm>
-            <a:off x="1051560" y="2286000"/>
-            <a:ext cx="2865120" cy="365760"/>
+            <a:off x="822960" y="2057400"/>
+            <a:ext cx="548640" cy="804672"/>
           </a:xfrm>
           <a:prstGeom prst="rect">
             <a:avLst/>
@@ -5845,31 +8132,31 @@
           <a:p>
             <a:pPr algn="l">
               <a:spcAft>
-                <a:spcPts val="585"/>
-              </a:spcAft>
-            </a:pPr>
-            <a:r>
-              <a:rPr sz="1300" b="1" i="0">
-                <a:solidFill>
-                  <a:srgbClr val="0B2D5B"/>
-                </a:solidFill>
-                <a:latin typeface="Inter Tight"/>
-              </a:rPr>
-              <a:t>KENJI</a:t>
-            </a:r>
-          </a:p>
-        </p:txBody>
-      </p:sp>
-      <p:sp>
-        <p:nvSpPr>
-          <p:cNvPr id="8" name="TextBox 7"/>
+                <a:spcPts val="1170"/>
+              </a:spcAft>
+            </a:pPr>
+            <a:r>
+              <a:rPr sz="2600" b="1" i="0">
+                <a:solidFill>
+                  <a:srgbClr val="F47B20"/>
+                </a:solidFill>
+                <a:latin typeface="Source Serif 4"/>
+              </a:rPr>
+              <a:t>1</a:t>
+            </a:r>
+          </a:p>
+        </p:txBody>
+      </p:sp>
+      <p:sp>
+        <p:nvSpPr>
+          <p:cNvPr id="7" name="TextBox 6"/>
           <p:cNvSpPr txBox="1"/>
           <p:nvPr/>
         </p:nvSpPr>
         <p:spPr>
           <a:xfrm>
-            <a:off x="1051560" y="2743200"/>
-            <a:ext cx="2865120" cy="3017520"/>
+            <a:off x="1463040" y="2093976"/>
+            <a:ext cx="9875520" cy="804672"/>
           </a:xfrm>
           <a:prstGeom prst="rect">
             <a:avLst/>
@@ -5884,77 +8171,31 @@
           <a:p>
             <a:pPr algn="l">
               <a:spcAft>
-                <a:spcPts val="810"/>
-              </a:spcAft>
-            </a:pPr>
-            <a:r>
-              <a:rPr sz="1800" b="0" i="0">
+                <a:spcPts val="945"/>
+              </a:spcAft>
+            </a:pPr>
+            <a:r>
+              <a:rPr sz="2100" b="1" i="0">
                 <a:solidFill>
                   <a:srgbClr val="1C1B19"/>
                 </a:solidFill>
                 <a:latin typeface="Source Serif 4"/>
               </a:rPr>
-              <a:t>Biology test in ten days. Soccer most nights. His plan: make a color-coded study guide this weekend, then reread it every night.</a:t>
-            </a:r>
-          </a:p>
-        </p:txBody>
-      </p:sp>
-      <p:sp>
-        <p:nvSpPr>
-          <p:cNvPr id="9" name="Rectangle 8"/>
-          <p:cNvSpPr/>
-          <p:nvPr/>
-        </p:nvSpPr>
-        <p:spPr>
-          <a:xfrm>
-            <a:off x="4419600" y="2103120"/>
-            <a:ext cx="3322320" cy="3840480"/>
-          </a:xfrm>
-          <a:prstGeom prst="rect">
-            <a:avLst/>
-          </a:prstGeom>
-          <a:solidFill>
-            <a:srgbClr val="FFFFFF"/>
-          </a:solidFill>
-          <a:ln w="15875">
-            <a:solidFill>
-              <a:srgbClr val="D8D2C6"/>
-            </a:solidFill>
-          </a:ln>
-          <a:effectLst/>
-        </p:spPr>
-        <p:style>
-          <a:lnRef idx="1">
-            <a:schemeClr val="accent1"/>
-          </a:lnRef>
-          <a:fillRef idx="3">
-            <a:schemeClr val="accent1"/>
-          </a:fillRef>
-          <a:effectRef idx="2">
-            <a:schemeClr val="accent1"/>
-          </a:effectRef>
-          <a:fontRef idx="minor">
-            <a:schemeClr val="lt1"/>
-          </a:fontRef>
-        </p:style>
-        <p:txBody>
-          <a:bodyPr rtlCol="0" anchor="ctr"/>
-          <a:lstStyle/>
-          <a:p>
-            <a:pPr algn="ctr"/>
-          </a:p>
-        </p:txBody>
-      </p:sp>
-      <p:sp>
-        <p:nvSpPr>
-          <p:cNvPr id="10" name="TextBox 9"/>
+              <a:t>Rereading your notes is one of the best ways to study.</a:t>
+            </a:r>
+          </a:p>
+        </p:txBody>
+      </p:sp>
+      <p:sp>
+        <p:nvSpPr>
+          <p:cNvPr id="8" name="TextBox 7"/>
           <p:cNvSpPr txBox="1"/>
           <p:nvPr/>
         </p:nvSpPr>
         <p:spPr>
           <a:xfrm>
-            <a:off x="4648200" y="2286000"/>
-            <a:ext cx="2865120" cy="365760"/>
+            <a:off x="822960" y="2862072"/>
+            <a:ext cx="548640" cy="804672"/>
           </a:xfrm>
           <a:prstGeom prst="rect">
             <a:avLst/>
@@ -5969,31 +8210,31 @@
           <a:p>
             <a:pPr algn="l">
               <a:spcAft>
-                <a:spcPts val="585"/>
-              </a:spcAft>
-            </a:pPr>
-            <a:r>
-              <a:rPr sz="1300" b="1" i="0">
-                <a:solidFill>
-                  <a:srgbClr val="0B2D5B"/>
-                </a:solidFill>
-                <a:latin typeface="Inter Tight"/>
-              </a:rPr>
-              <a:t>ROSA</a:t>
-            </a:r>
-          </a:p>
-        </p:txBody>
-      </p:sp>
-      <p:sp>
-        <p:nvSpPr>
-          <p:cNvPr id="11" name="TextBox 10"/>
+                <a:spcPts val="1170"/>
+              </a:spcAft>
+            </a:pPr>
+            <a:r>
+              <a:rPr sz="2600" b="1" i="0">
+                <a:solidFill>
+                  <a:srgbClr val="F47B20"/>
+                </a:solidFill>
+                <a:latin typeface="Source Serif 4"/>
+              </a:rPr>
+              <a:t>2</a:t>
+            </a:r>
+          </a:p>
+        </p:txBody>
+      </p:sp>
+      <p:sp>
+        <p:nvSpPr>
+          <p:cNvPr id="9" name="TextBox 8"/>
           <p:cNvSpPr txBox="1"/>
           <p:nvPr/>
         </p:nvSpPr>
         <p:spPr>
           <a:xfrm>
-            <a:off x="4648200" y="2743200"/>
-            <a:ext cx="2865120" cy="3017520"/>
+            <a:off x="1463040" y="2898648"/>
+            <a:ext cx="9875520" cy="804672"/>
           </a:xfrm>
           <a:prstGeom prst="rect">
             <a:avLst/>
@@ -6008,77 +8249,31 @@
           <a:p>
             <a:pPr algn="l">
               <a:spcAft>
-                <a:spcPts val="810"/>
-              </a:spcAft>
-            </a:pPr>
-            <a:r>
-              <a:rPr sz="1800" b="0" i="0">
+                <a:spcPts val="945"/>
+              </a:spcAft>
+            </a:pPr>
+            <a:r>
+              <a:rPr sz="2100" b="1" i="0">
                 <a:solidFill>
                   <a:srgbClr val="1C1B19"/>
                 </a:solidFill>
                 <a:latin typeface="Source Serif 4"/>
               </a:rPr>
-              <a:t>Math final covers six units. She watches her little brothers until her grandmother gets home. Plan: one unit a night, in order, all problems of a type together.</a:t>
-            </a:r>
-          </a:p>
-        </p:txBody>
-      </p:sp>
-      <p:sp>
-        <p:nvSpPr>
-          <p:cNvPr id="12" name="Rectangle 11"/>
-          <p:cNvSpPr/>
-          <p:nvPr/>
-        </p:nvSpPr>
-        <p:spPr>
-          <a:xfrm>
-            <a:off x="8016239" y="2103120"/>
-            <a:ext cx="3322320" cy="3840480"/>
-          </a:xfrm>
-          <a:prstGeom prst="rect">
-            <a:avLst/>
-          </a:prstGeom>
-          <a:solidFill>
-            <a:srgbClr val="FFFFFF"/>
-          </a:solidFill>
-          <a:ln w="15875">
-            <a:solidFill>
-              <a:srgbClr val="D8D2C6"/>
-            </a:solidFill>
-          </a:ln>
-          <a:effectLst/>
-        </p:spPr>
-        <p:style>
-          <a:lnRef idx="1">
-            <a:schemeClr val="accent1"/>
-          </a:lnRef>
-          <a:fillRef idx="3">
-            <a:schemeClr val="accent1"/>
-          </a:fillRef>
-          <a:effectRef idx="2">
-            <a:schemeClr val="accent1"/>
-          </a:effectRef>
-          <a:fontRef idx="minor">
-            <a:schemeClr val="lt1"/>
-          </a:fontRef>
-        </p:style>
-        <p:txBody>
-          <a:bodyPr rtlCol="0" anchor="ctr"/>
-          <a:lstStyle/>
-          <a:p>
-            <a:pPr algn="ctr"/>
-          </a:p>
-        </p:txBody>
-      </p:sp>
-      <p:sp>
-        <p:nvSpPr>
-          <p:cNvPr id="13" name="TextBox 12"/>
+              <a:t>You learn more when teaching matches your learning style.</a:t>
+            </a:r>
+          </a:p>
+        </p:txBody>
+      </p:sp>
+      <p:sp>
+        <p:nvSpPr>
+          <p:cNvPr id="10" name="TextBox 9"/>
           <p:cNvSpPr txBox="1"/>
           <p:nvPr/>
         </p:nvSpPr>
         <p:spPr>
           <a:xfrm>
-            <a:off x="8244839" y="2286000"/>
-            <a:ext cx="2865120" cy="365760"/>
+            <a:off x="822960" y="3666744"/>
+            <a:ext cx="548640" cy="804672"/>
           </a:xfrm>
           <a:prstGeom prst="rect">
             <a:avLst/>
@@ -6093,31 +8288,31 @@
           <a:p>
             <a:pPr algn="l">
               <a:spcAft>
-                <a:spcPts val="585"/>
-              </a:spcAft>
-            </a:pPr>
-            <a:r>
-              <a:rPr sz="1300" b="1" i="0">
-                <a:solidFill>
-                  <a:srgbClr val="0B2D5B"/>
-                </a:solidFill>
-                <a:latin typeface="Inter Tight"/>
-              </a:rPr>
-              <a:t>MALIK</a:t>
-            </a:r>
-          </a:p>
-        </p:txBody>
-      </p:sp>
-      <p:sp>
-        <p:nvSpPr>
-          <p:cNvPr id="14" name="TextBox 13"/>
+                <a:spcPts val="1170"/>
+              </a:spcAft>
+            </a:pPr>
+            <a:r>
+              <a:rPr sz="2600" b="1" i="0">
+                <a:solidFill>
+                  <a:srgbClr val="F47B20"/>
+                </a:solidFill>
+                <a:latin typeface="Source Serif 4"/>
+              </a:rPr>
+              <a:t>3</a:t>
+            </a:r>
+          </a:p>
+        </p:txBody>
+      </p:sp>
+      <p:sp>
+        <p:nvSpPr>
+          <p:cNvPr id="11" name="TextBox 10"/>
           <p:cNvSpPr txBox="1"/>
           <p:nvPr/>
         </p:nvSpPr>
         <p:spPr>
           <a:xfrm>
-            <a:off x="8244839" y="2743200"/>
-            <a:ext cx="2865120" cy="3017520"/>
+            <a:off x="1463040" y="3703320"/>
+            <a:ext cx="9875520" cy="804672"/>
           </a:xfrm>
           <a:prstGeom prst="rect">
             <a:avLst/>
@@ -6132,17 +8327,173 @@
           <a:p>
             <a:pPr algn="l">
               <a:spcAft>
-                <a:spcPts val="810"/>
-              </a:spcAft>
-            </a:pPr>
-            <a:r>
-              <a:rPr sz="1800" b="0" i="0">
+                <a:spcPts val="945"/>
+              </a:spcAft>
+            </a:pPr>
+            <a:r>
+              <a:rPr sz="2100" b="1" i="0">
                 <a:solidFill>
                   <a:srgbClr val="1C1B19"/>
                 </a:solidFill>
                 <a:latin typeface="Source Serif 4"/>
               </a:rPr>
-              <a:t>His study group meets on a video call the night before the history test. Last time they read their notes out loud for two hours.</a:t>
+              <a:t>If it feels easy while you study, you know it.</a:t>
+            </a:r>
+          </a:p>
+        </p:txBody>
+      </p:sp>
+      <p:sp>
+        <p:nvSpPr>
+          <p:cNvPr id="12" name="TextBox 11"/>
+          <p:cNvSpPr txBox="1"/>
+          <p:nvPr/>
+        </p:nvSpPr>
+        <p:spPr>
+          <a:xfrm>
+            <a:off x="822960" y="4471416"/>
+            <a:ext cx="548640" cy="804672"/>
+          </a:xfrm>
+          <a:prstGeom prst="rect">
+            <a:avLst/>
+          </a:prstGeom>
+          <a:noFill/>
+        </p:spPr>
+        <p:txBody>
+          <a:bodyPr wrap="square" anchor="t" lIns="0" rIns="0" tIns="0" bIns="0">
+            <a:spAutoFit/>
+          </a:bodyPr>
+          <a:lstStyle/>
+          <a:p>
+            <a:pPr algn="l">
+              <a:spcAft>
+                <a:spcPts val="1170"/>
+              </a:spcAft>
+            </a:pPr>
+            <a:r>
+              <a:rPr sz="2600" b="1" i="0">
+                <a:solidFill>
+                  <a:srgbClr val="F47B20"/>
+                </a:solidFill>
+                <a:latin typeface="Source Serif 4"/>
+              </a:rPr>
+              <a:t>4</a:t>
+            </a:r>
+          </a:p>
+        </p:txBody>
+      </p:sp>
+      <p:sp>
+        <p:nvSpPr>
+          <p:cNvPr id="13" name="TextBox 12"/>
+          <p:cNvSpPr txBox="1"/>
+          <p:nvPr/>
+        </p:nvSpPr>
+        <p:spPr>
+          <a:xfrm>
+            <a:off x="1463040" y="4507992"/>
+            <a:ext cx="9875520" cy="804672"/>
+          </a:xfrm>
+          <a:prstGeom prst="rect">
+            <a:avLst/>
+          </a:prstGeom>
+          <a:noFill/>
+        </p:spPr>
+        <p:txBody>
+          <a:bodyPr wrap="square" anchor="t" lIns="0" rIns="0" tIns="0" bIns="0">
+            <a:spAutoFit/>
+          </a:bodyPr>
+          <a:lstStyle/>
+          <a:p>
+            <a:pPr algn="l">
+              <a:spcAft>
+                <a:spcPts val="945"/>
+              </a:spcAft>
+            </a:pPr>
+            <a:r>
+              <a:rPr sz="2100" b="1" i="0">
+                <a:solidFill>
+                  <a:srgbClr val="1C1B19"/>
+                </a:solidFill>
+                <a:latin typeface="Source Serif 4"/>
+              </a:rPr>
+              <a:t>Mixing problem types beats doing one type at a time.</a:t>
+            </a:r>
+          </a:p>
+        </p:txBody>
+      </p:sp>
+      <p:sp>
+        <p:nvSpPr>
+          <p:cNvPr id="14" name="TextBox 13"/>
+          <p:cNvSpPr txBox="1"/>
+          <p:nvPr/>
+        </p:nvSpPr>
+        <p:spPr>
+          <a:xfrm>
+            <a:off x="822960" y="5276088"/>
+            <a:ext cx="548640" cy="804672"/>
+          </a:xfrm>
+          <a:prstGeom prst="rect">
+            <a:avLst/>
+          </a:prstGeom>
+          <a:noFill/>
+        </p:spPr>
+        <p:txBody>
+          <a:bodyPr wrap="square" anchor="t" lIns="0" rIns="0" tIns="0" bIns="0">
+            <a:spAutoFit/>
+          </a:bodyPr>
+          <a:lstStyle/>
+          <a:p>
+            <a:pPr algn="l">
+              <a:spcAft>
+                <a:spcPts val="1170"/>
+              </a:spcAft>
+            </a:pPr>
+            <a:r>
+              <a:rPr sz="2600" b="1" i="0">
+                <a:solidFill>
+                  <a:srgbClr val="F47B20"/>
+                </a:solidFill>
+                <a:latin typeface="Source Serif 4"/>
+              </a:rPr>
+              <a:t>5</a:t>
+            </a:r>
+          </a:p>
+        </p:txBody>
+      </p:sp>
+      <p:sp>
+        <p:nvSpPr>
+          <p:cNvPr id="15" name="TextBox 14"/>
+          <p:cNvSpPr txBox="1"/>
+          <p:nvPr/>
+        </p:nvSpPr>
+        <p:spPr>
+          <a:xfrm>
+            <a:off x="1463040" y="5312664"/>
+            <a:ext cx="9875520" cy="804672"/>
+          </a:xfrm>
+          <a:prstGeom prst="rect">
+            <a:avLst/>
+          </a:prstGeom>
+          <a:noFill/>
+        </p:spPr>
+        <p:txBody>
+          <a:bodyPr wrap="square" anchor="t" lIns="0" rIns="0" tIns="0" bIns="0">
+            <a:spAutoFit/>
+          </a:bodyPr>
+          <a:lstStyle/>
+          <a:p>
+            <a:pPr algn="l">
+              <a:spcAft>
+                <a:spcPts val="945"/>
+              </a:spcAft>
+            </a:pPr>
+            <a:r>
+              <a:rPr sz="2100" b="1" i="0">
+                <a:solidFill>
+                  <a:srgbClr val="1C1B19"/>
+                </a:solidFill>
+                <a:latin typeface="Source Serif 4"/>
+              </a:rPr>
+              <a:t>An all-nighter is worth it for a big test.</a:t>
             </a:r>
           </a:p>
         </p:txBody>
@@ -6155,7 +8506,7 @@
 </p:sld>
 </file>
 
-<file path=ppt/slides/slide13.xml><?xml version="1.0" encoding="utf-8"?>
+<file path=ppt/slides/slide4.xml><?xml version="1.0" encoding="utf-8"?>
 <p:sld xmlns:a="http://schemas.openxmlformats.org/drawingml/2006/main" xmlns:p="http://schemas.openxmlformats.org/presentationml/2006/main" xmlns:r="http://schemas.openxmlformats.org/officeDocument/2006/relationships">
   <p:cSld>
     <p:bg>
@@ -6251,7 +8602,7 @@
                 </a:solidFill>
                 <a:latin typeface="Inter Tight"/>
               </a:rPr>
-              <a:t>PLAN IT OUT</a:t>
+              <a:t>MYTH OR FACT?</a:t>
             </a:r>
           </a:p>
         </p:txBody>
@@ -6329,7 +8680,7 @@
                 </a:solidFill>
                 <a:latin typeface="Source Serif 4"/>
               </a:rPr>
-              <a:t>A ten-day plan for a real test</a:t>
+              <a:t>The answers</a:t>
             </a:r>
           </a:p>
         </p:txBody>
@@ -6368,7 +8719,7 @@
                 </a:solidFill>
                 <a:latin typeface="Source Serif 4"/>
               </a:rPr>
-              <a:t>•</a:t>
+              <a:t>1</a:t>
             </a:r>
           </a:p>
         </p:txBody>
@@ -6407,7 +8758,7 @@
                 </a:solidFill>
                 <a:latin typeface="Source Serif 4"/>
               </a:rPr>
-              <a:t>Day 1: learn it.</a:t>
+              <a:t>Myth.</a:t>
             </a:r>
           </a:p>
           <a:p>
@@ -6423,7 +8774,7 @@
                 </a:solidFill>
                 <a:latin typeface="Source Serif 4"/>
               </a:rPr>
-              <a:t>End with a brain dump.</a:t>
+              <a:t>It feels great. A week later it holds up worst.</a:t>
             </a:r>
           </a:p>
         </p:txBody>
@@ -6462,7 +8813,7 @@
                 </a:solidFill>
                 <a:latin typeface="Source Serif 4"/>
               </a:rPr>
-              <a:t>•</a:t>
+              <a:t>2</a:t>
             </a:r>
           </a:p>
         </p:txBody>
@@ -6501,7 +8852,7 @@
                 </a:solidFill>
                 <a:latin typeface="Source Serif 4"/>
               </a:rPr>
-              <a:t>Day 3: practice from memory.</a:t>
+              <a:t>Myth.</a:t>
             </a:r>
           </a:p>
           <a:p>
@@ -6517,7 +8868,7 @@
                 </a:solidFill>
                 <a:latin typeface="Source Serif 4"/>
               </a:rPr>
-              <a:t>Then check your answers.</a:t>
+              <a:t>No good evidence for it. Quizzing and spacing help everyone.</a:t>
             </a:r>
           </a:p>
         </p:txBody>
@@ -6556,7 +8907,7 @@
                 </a:solidFill>
                 <a:latin typeface="Source Serif 4"/>
               </a:rPr>
-              <a:t>•</a:t>
+              <a:t>3</a:t>
             </a:r>
           </a:p>
         </p:txBody>
@@ -6595,7 +8946,7 @@
                 </a:solidFill>
                 <a:latin typeface="Source Serif 4"/>
               </a:rPr>
-              <a:t>Day 6: mixed practice test.</a:t>
+              <a:t>Myth.</a:t>
             </a:r>
           </a:p>
           <a:p>
@@ -6611,7 +8962,7 @@
                 </a:solidFill>
                 <a:latin typeface="Source Serif 4"/>
               </a:rPr>
-              <a:t>Include last unit. Mark what you missed.</a:t>
+              <a:t>Easy usually means familiar. Familiar isn't recall.</a:t>
             </a:r>
           </a:p>
         </p:txBody>
@@ -6650,7 +9001,7 @@
                 </a:solidFill>
                 <a:latin typeface="Source Serif 4"/>
               </a:rPr>
-              <a:t>•</a:t>
+              <a:t>4</a:t>
             </a:r>
           </a:p>
         </p:txBody>
@@ -6689,7 +9040,7 @@
                 </a:solidFill>
                 <a:latin typeface="Source Serif 4"/>
               </a:rPr>
-              <a:t>Day 8: only what you missed.</a:t>
+              <a:t>Fact.</a:t>
             </a:r>
           </a:p>
           <a:p>
@@ -6705,7 +9056,7 @@
                 </a:solidFill>
                 <a:latin typeface="Source Serif 4"/>
               </a:rPr>
-              <a:t>From memory, not rereading.</a:t>
+              <a:t>Worse during practice, much better on the test.</a:t>
             </a:r>
           </a:p>
         </p:txBody>
@@ -6744,7 +9095,7 @@
                 </a:solidFill>
                 <a:latin typeface="Source Serif 4"/>
               </a:rPr>
-              <a:t>•</a:t>
+              <a:t>5</a:t>
             </a:r>
           </a:p>
         </p:txBody>
@@ -6783,7 +9134,7 @@
                 </a:solidFill>
                 <a:latin typeface="Source Serif 4"/>
               </a:rPr>
-              <a:t>Day 9: short quiz, then sleep.</a:t>
+              <a:t>Myth.</a:t>
             </a:r>
           </a:p>
           <a:p>
@@ -6799,7 +9150,7 @@
                 </a:solidFill>
                 <a:latin typeface="Source Serif 4"/>
               </a:rPr>
-              <a:t>No all-nighter.</a:t>
+              <a:t>Sleep is when your brain strengthens what you studied.</a:t>
             </a:r>
           </a:p>
         </p:txBody>
@@ -6812,7 +9163,7 @@
 </p:sld>
 </file>
 
-<file path=ppt/slides/slide14.xml><?xml version="1.0" encoding="utf-8"?>
+<file path=ppt/slides/slide5.xml><?xml version="1.0" encoding="utf-8"?>
 <p:sld xmlns:a="http://schemas.openxmlformats.org/drawingml/2006/main" xmlns:p="http://schemas.openxmlformats.org/presentationml/2006/main" xmlns:r="http://schemas.openxmlformats.org/officeDocument/2006/relationships">
   <p:cSld>
     <p:bg>
@@ -6908,7 +9259,7 @@
                 </a:solidFill>
                 <a:latin typeface="Inter Tight"/>
               </a:rPr>
-              <a:t>BEFORE YOU GO</a:t>
+              <a:t>THE EXPERIMENT</a:t>
             </a:r>
           </a:p>
         </p:txBody>
@@ -6960,7 +9311,7 @@
         </p:nvSpPr>
         <p:spPr>
           <a:xfrm>
-            <a:off x="822960" y="1188720"/>
+            <a:off x="822960" y="1005840"/>
             <a:ext cx="10515600" cy="914400"/>
           </a:xfrm>
           <a:prstGeom prst="rect">
@@ -6976,70 +9327,31 @@
           <a:p>
             <a:pPr algn="l">
               <a:spcAft>
-                <a:spcPts val="1620"/>
-              </a:spcAft>
-            </a:pPr>
-            <a:r>
-              <a:rPr sz="3600" b="1" i="0">
+                <a:spcPts val="1530"/>
+              </a:spcAft>
+            </a:pPr>
+            <a:r>
+              <a:rPr sz="3400" b="1" i="0">
                 <a:solidFill>
                   <a:srgbClr val="1C1B19"/>
                 </a:solidFill>
                 <a:latin typeface="Source Serif 4"/>
               </a:rPr>
-              <a:t>Exit card</a:t>
-            </a:r>
-          </a:p>
-        </p:txBody>
-      </p:sp>
-      <p:sp>
-        <p:nvSpPr>
-          <p:cNvPr id="6" name="TextBox 5"/>
-          <p:cNvSpPr txBox="1"/>
-          <p:nvPr/>
-        </p:nvSpPr>
-        <p:spPr>
-          <a:xfrm>
-            <a:off x="822960" y="2286000"/>
-            <a:ext cx="10515600" cy="1463040"/>
-          </a:xfrm>
-          <a:prstGeom prst="rect">
-            <a:avLst/>
-          </a:prstGeom>
-          <a:noFill/>
-        </p:spPr>
-        <p:txBody>
-          <a:bodyPr wrap="square" anchor="t" lIns="0" rIns="0" tIns="0" bIns="0">
-            <a:spAutoFit/>
-          </a:bodyPr>
-          <a:lstStyle/>
-          <a:p>
-            <a:pPr algn="l">
-              <a:spcAft>
-                <a:spcPts val="1080"/>
-              </a:spcAft>
-            </a:pPr>
-            <a:r>
-              <a:rPr sz="2400" b="0" i="0">
-                <a:solidFill>
-                  <a:srgbClr val="1C1B19"/>
-                </a:solidFill>
-                <a:latin typeface="Source Serif 4"/>
-              </a:rPr>
-              <a:t>Which method will you try this week, and for which test?</a:t>
-            </a:r>
-          </a:p>
-        </p:txBody>
-      </p:sp>
-      <p:sp>
-        <p:nvSpPr>
-          <p:cNvPr id="7" name="Rectangle 6"/>
+              <a:t>Reread it, or test yourself?</a:t>
+            </a:r>
+          </a:p>
+        </p:txBody>
+      </p:sp>
+      <p:sp>
+        <p:nvSpPr>
+          <p:cNvPr id="6" name="Rectangle 5"/>
           <p:cNvSpPr/>
           <p:nvPr/>
         </p:nvSpPr>
         <p:spPr>
           <a:xfrm>
-            <a:off x="822960" y="4023360"/>
-            <a:ext cx="10515600" cy="1371600"/>
+            <a:off x="822960" y="2103120"/>
+            <a:ext cx="5120640" cy="3931920"/>
           </a:xfrm>
           <a:prstGeom prst="rect">
             <a:avLst/>
@@ -7049,7 +9361,7 @@
           </a:solidFill>
           <a:ln w="15875">
             <a:solidFill>
-              <a:srgbClr val="1C1B19"/>
+              <a:srgbClr val="D8D2C6"/>
             </a:solidFill>
           </a:ln>
           <a:effectLst/>
@@ -7078,14 +9390,14 @@
       </p:sp>
       <p:sp>
         <p:nvSpPr>
-          <p:cNvPr id="8" name="TextBox 7"/>
+          <p:cNvPr id="7" name="TextBox 6"/>
           <p:cNvSpPr txBox="1"/>
           <p:nvPr/>
         </p:nvSpPr>
         <p:spPr>
           <a:xfrm>
-            <a:off x="1097280" y="4206240"/>
-            <a:ext cx="10058400" cy="365760"/>
+            <a:off x="1097280" y="2286000"/>
+            <a:ext cx="4572000" cy="457200"/>
           </a:xfrm>
           <a:prstGeom prst="rect">
             <a:avLst/>
@@ -7100,31 +9412,31 @@
           <a:p>
             <a:pPr algn="l">
               <a:spcAft>
-                <a:spcPts val="540"/>
-              </a:spcAft>
-            </a:pPr>
-            <a:r>
-              <a:rPr sz="1200" b="1" i="0">
+                <a:spcPts val="585"/>
+              </a:spcAft>
+            </a:pPr>
+            <a:r>
+              <a:rPr sz="1300" b="1" i="0">
                 <a:solidFill>
                   <a:srgbClr val="0B2D5B"/>
                 </a:solidFill>
                 <a:latin typeface="Inter Tight"/>
               </a:rPr>
-              <a:t>ON THE BVR DINER MENU</a:t>
-            </a:r>
-          </a:p>
-        </p:txBody>
-      </p:sp>
-      <p:sp>
-        <p:nvSpPr>
-          <p:cNvPr id="9" name="TextBox 8"/>
+              <a:t>GROUP A: REREAD</a:t>
+            </a:r>
+          </a:p>
+        </p:txBody>
+      </p:sp>
+      <p:sp>
+        <p:nvSpPr>
+          <p:cNvPr id="8" name="TextBox 7"/>
           <p:cNvSpPr txBox="1"/>
           <p:nvPr/>
         </p:nvSpPr>
         <p:spPr>
           <a:xfrm>
-            <a:off x="1097280" y="4617720"/>
-            <a:ext cx="10058400" cy="640080"/>
+            <a:off x="1097280" y="2788920"/>
+            <a:ext cx="4572000" cy="3108960"/>
           </a:xfrm>
           <a:prstGeom prst="rect">
             <a:avLst/>
@@ -7139,66 +9451,90 @@
           <a:p>
             <a:pPr algn="l">
               <a:spcAft>
-                <a:spcPts val="900"/>
-              </a:spcAft>
-            </a:pPr>
-            <a:r>
-              <a:rPr sz="2000" b="0" i="0">
+                <a:spcPts val="855"/>
+              </a:spcAft>
+            </a:pPr>
+            <a:r>
+              <a:rPr sz="1900" b="0" i="0">
                 <a:solidFill>
                   <a:srgbClr val="1C1B19"/>
                 </a:solidFill>
-                <a:latin typeface="Inter Tight"/>
-              </a:rPr>
-              <a:t>https://rmwtoolkit.github.io/bcds-toolkit/study-smarter-not-longer-high-school.html</a:t>
-            </a:r>
-          </a:p>
-        </p:txBody>
-      </p:sp>
-    </p:spTree>
-  </p:cSld>
-  <p:clrMapOvr>
-    <a:masterClrMapping/>
-  </p:clrMapOvr>
-</p:sld>
-</file>
-
-<file path=ppt/slides/slide2.xml><?xml version="1.0" encoding="utf-8"?>
-<p:sld xmlns:a="http://schemas.openxmlformats.org/drawingml/2006/main" xmlns:p="http://schemas.openxmlformats.org/presentationml/2006/main" xmlns:r="http://schemas.openxmlformats.org/officeDocument/2006/relationships" show="0">
-  <p:cSld>
-    <p:bg>
-      <p:bgPr>
-        <a:solidFill>
-          <a:srgbClr val="EEEBE4"/>
-        </a:solidFill>
-        <a:effectLst/>
-      </p:bgPr>
-    </p:bg>
-    <p:spTree>
-      <p:nvGrpSpPr>
-        <p:cNvPr id="1" name=""/>
-        <p:cNvGrpSpPr/>
-        <p:nvPr/>
-      </p:nvGrpSpPr>
-      <p:grpSpPr/>
-      <p:sp>
-        <p:nvSpPr>
-          <p:cNvPr id="2" name="Rectangle 1"/>
+                <a:latin typeface="Source Serif 4"/>
+              </a:rPr>
+              <a:t>Read the passage</a:t>
+            </a:r>
+          </a:p>
+          <a:p>
+            <a:pPr algn="l">
+              <a:spcAft>
+                <a:spcPts val="855"/>
+              </a:spcAft>
+            </a:pPr>
+            <a:r>
+              <a:rPr sz="1900" b="0" i="0">
+                <a:solidFill>
+                  <a:srgbClr val="1C1B19"/>
+                </a:solidFill>
+                <a:latin typeface="Source Serif 4"/>
+              </a:rPr>
+              <a:t>Read it again</a:t>
+            </a:r>
+          </a:p>
+          <a:p>
+            <a:pPr algn="l">
+              <a:spcAft>
+                <a:spcPts val="855"/>
+              </a:spcAft>
+            </a:pPr>
+            <a:r>
+              <a:rPr sz="1900" b="0" i="0">
+                <a:solidFill>
+                  <a:srgbClr val="1C1B19"/>
+                </a:solidFill>
+                <a:latin typeface="Source Serif 4"/>
+              </a:rPr>
+              <a:t>Felt the most ready</a:t>
+            </a:r>
+          </a:p>
+          <a:p>
+            <a:pPr algn="l">
+              <a:spcAft>
+                <a:spcPts val="855"/>
+              </a:spcAft>
+            </a:pPr>
+            <a:r>
+              <a:rPr sz="1900" b="0" i="0">
+                <a:solidFill>
+                  <a:srgbClr val="1C1B19"/>
+                </a:solidFill>
+                <a:latin typeface="Source Serif 4"/>
+              </a:rPr>
+              <a:t>Won the five-minute test</a:t>
+            </a:r>
+          </a:p>
+        </p:txBody>
+      </p:sp>
+      <p:sp>
+        <p:nvSpPr>
+          <p:cNvPr id="9" name="Rectangle 8"/>
           <p:cNvSpPr/>
           <p:nvPr/>
         </p:nvSpPr>
         <p:spPr>
           <a:xfrm>
-            <a:off x="0" y="0"/>
-            <a:ext cx="12191695" cy="384048"/>
+            <a:off x="6309360" y="2103120"/>
+            <a:ext cx="5120640" cy="3931920"/>
           </a:xfrm>
           <a:prstGeom prst="rect">
             <a:avLst/>
           </a:prstGeom>
           <a:solidFill>
-            <a:srgbClr val="0B2D5B"/>
+            <a:srgbClr val="FFFFFF"/>
           </a:solidFill>
-          <a:ln>
-            <a:noFill/>
+          <a:ln w="15875">
+            <a:solidFill>
+              <a:srgbClr val="D8D2C6"/>
+            </a:solidFill>
           </a:ln>
           <a:effectLst/>
         </p:spPr>
@@ -7226,14 +9562,14 @@
       </p:sp>
       <p:sp>
         <p:nvSpPr>
-          <p:cNvPr id="3" name="TextBox 2"/>
+          <p:cNvPr id="10" name="TextBox 9"/>
           <p:cNvSpPr txBox="1"/>
           <p:nvPr/>
         </p:nvSpPr>
         <p:spPr>
           <a:xfrm>
-            <a:off x="548640" y="100584"/>
-            <a:ext cx="10972800" cy="274320"/>
+            <a:off x="6583680" y="2286000"/>
+            <a:ext cx="4572000" cy="457200"/>
           </a:xfrm>
           <a:prstGeom prst="rect">
             <a:avLst/>
@@ -7248,31 +9584,31 @@
           <a:p>
             <a:pPr algn="l">
               <a:spcAft>
-                <a:spcPts val="495"/>
-              </a:spcAft>
-            </a:pPr>
-            <a:r>
-              <a:rPr sz="1100" b="1" i="0">
-                <a:solidFill>
-                  <a:srgbClr val="FFFFFF"/>
+                <a:spcPts val="585"/>
+              </a:spcAft>
+            </a:pPr>
+            <a:r>
+              <a:rPr sz="1300" b="1" i="0">
+                <a:solidFill>
+                  <a:srgbClr val="0B2D5B"/>
                 </a:solidFill>
                 <a:latin typeface="Inter Tight"/>
               </a:rPr>
-              <a:t>TEACHER PAGE  ·  skipped when you present  ·  Before you teach</a:t>
-            </a:r>
-          </a:p>
-        </p:txBody>
-      </p:sp>
-      <p:sp>
-        <p:nvSpPr>
-          <p:cNvPr id="4" name="TextBox 3"/>
+              <a:t>GROUP B: READ ONCE, THEN RECALL</a:t>
+            </a:r>
+          </a:p>
+        </p:txBody>
+      </p:sp>
+      <p:sp>
+        <p:nvSpPr>
+          <p:cNvPr id="11" name="TextBox 10"/>
           <p:cNvSpPr txBox="1"/>
           <p:nvPr/>
         </p:nvSpPr>
         <p:spPr>
           <a:xfrm>
-            <a:off x="548640" y="685800"/>
-            <a:ext cx="10972800" cy="640080"/>
+            <a:off x="6583680" y="2788920"/>
+            <a:ext cx="4572000" cy="3108960"/>
           </a:xfrm>
           <a:prstGeom prst="rect">
             <a:avLst/>
@@ -7287,1587 +9623,65 @@
           <a:p>
             <a:pPr algn="l">
               <a:spcAft>
-                <a:spcPts val="1350"/>
-              </a:spcAft>
-            </a:pPr>
-            <a:r>
-              <a:rPr sz="3000" b="1" i="0">
+                <a:spcPts val="855"/>
+              </a:spcAft>
+            </a:pPr>
+            <a:r>
+              <a:rPr sz="1900" b="0" i="0">
                 <a:solidFill>
                   <a:srgbClr val="1C1B19"/>
                 </a:solidFill>
                 <a:latin typeface="Source Serif 4"/>
               </a:rPr>
-              <a:t>Before you teach</a:t>
-            </a:r>
-          </a:p>
-        </p:txBody>
-      </p:sp>
-      <p:sp>
-        <p:nvSpPr>
-          <p:cNvPr id="5" name="TextBox 4"/>
-          <p:cNvSpPr txBox="1"/>
-          <p:nvPr/>
-        </p:nvSpPr>
-        <p:spPr>
-          <a:xfrm>
-            <a:off x="548640" y="1463040"/>
-            <a:ext cx="5394960" cy="4937760"/>
-          </a:xfrm>
-          <a:prstGeom prst="rect">
-            <a:avLst/>
-          </a:prstGeom>
-          <a:noFill/>
-        </p:spPr>
-        <p:txBody>
-          <a:bodyPr wrap="square" anchor="t" lIns="0" rIns="0" tIns="0" bIns="0">
-            <a:spAutoFit/>
-          </a:bodyPr>
-          <a:lstStyle/>
-          <a:p>
-            <a:pPr algn="l">
-              <a:spcAft>
-                <a:spcPts val="585"/>
-              </a:spcAft>
-            </a:pPr>
-            <a:r>
-              <a:rPr sz="1500" b="1" i="0">
+              <a:t>Read the passage once</a:t>
+            </a:r>
+          </a:p>
+          <a:p>
+            <a:pPr algn="l">
+              <a:spcAft>
+                <a:spcPts val="855"/>
+              </a:spcAft>
+            </a:pPr>
+            <a:r>
+              <a:rPr sz="1900" b="0" i="0">
                 <a:solidFill>
                   <a:srgbClr val="1C1B19"/>
                 </a:solidFill>
                 <a:latin typeface="Source Serif 4"/>
               </a:rPr>
-              <a:t>Some students already feel behind.</a:t>
-            </a:r>
-          </a:p>
-          <a:p>
-            <a:pPr algn="l">
-              <a:spcAft>
-                <a:spcPts val="585"/>
-              </a:spcAft>
-            </a:pPr>
-            <a:r>
-              <a:rPr sz="1300" b="0" i="0">
+              <a:t>Wrote all they could remember</a:t>
+            </a:r>
+          </a:p>
+          <a:p>
+            <a:pPr algn="l">
+              <a:spcAft>
+                <a:spcPts val="855"/>
+              </a:spcAft>
+            </a:pPr>
+            <a:r>
+              <a:rPr sz="1900" b="0" i="0">
                 <a:solidFill>
                   <a:srgbClr val="1C1B19"/>
                 </a:solidFill>
                 <a:latin typeface="Source Serif 4"/>
               </a:rPr>
-              <a:t>First Upper School tests can shake students who did well before. Frame everything as a method problem, never a smarts problem. A student who rereads has been doing what most students do.</a:t>
-            </a:r>
-          </a:p>
-          <a:p>
-            <a:pPr algn="l">
-              <a:spcAft>
-                <a:spcPts val="585"/>
-              </a:spcAft>
-            </a:pPr>
-            <a:r>
-              <a:rPr sz="1300" b="0" i="0">
+              <a:t>No notes, no feedback</a:t>
+            </a:r>
+          </a:p>
+          <a:p>
+            <a:pPr algn="l">
+              <a:spcAft>
+                <a:spcPts val="855"/>
+              </a:spcAft>
+            </a:pPr>
+            <a:r>
+              <a:rPr sz="1900" b="0" i="0">
                 <a:solidFill>
                   <a:srgbClr val="1C1B19"/>
                 </a:solidFill>
                 <a:latin typeface="Source Serif 4"/>
               </a:rPr>
-              <a:t/>
-            </a:r>
-          </a:p>
-          <a:p>
-            <a:pPr algn="l">
-              <a:spcAft>
-                <a:spcPts val="585"/>
-              </a:spcAft>
-            </a:pPr>
-            <a:r>
-              <a:rPr sz="1500" b="1" i="0">
-                <a:solidFill>
-                  <a:srgbClr val="1C1B19"/>
-                </a:solidFill>
-                <a:latin typeface="Source Serif 4"/>
-              </a:rPr>
-              <a:t>Keep grades and scores private.</a:t>
-            </a:r>
-          </a:p>
-          <a:p>
-            <a:pPr algn="l">
-              <a:spcAft>
-                <a:spcPts val="585"/>
-              </a:spcAft>
-            </a:pPr>
-            <a:r>
-              <a:rPr sz="1300" b="0" i="0">
-                <a:solidFill>
-                  <a:srgbClr val="1C1B19"/>
-                </a:solidFill>
-                <a:latin typeface="Source Serif 4"/>
-              </a:rPr>
-              <a:t>Don't ask anyone to share a test score or how long they studied. The brain dump stays with the student. Nobody hands it in.</a:t>
-            </a:r>
-          </a:p>
-          <a:p>
-            <a:pPr algn="l">
-              <a:spcAft>
-                <a:spcPts val="585"/>
-              </a:spcAft>
-            </a:pPr>
-            <a:r>
-              <a:rPr sz="1300" b="0" i="0">
-                <a:solidFill>
-                  <a:srgbClr val="1C1B19"/>
-                </a:solidFill>
-                <a:latin typeface="Source Serif 4"/>
-              </a:rPr>
-              <a:t/>
-            </a:r>
-          </a:p>
-          <a:p>
-            <a:pPr algn="l">
-              <a:spcAft>
-                <a:spcPts val="585"/>
-              </a:spcAft>
-            </a:pPr>
-            <a:r>
-              <a:rPr sz="1500" b="1" i="0">
-                <a:solidFill>
-                  <a:srgbClr val="1C1B19"/>
-                </a:solidFill>
-                <a:latin typeface="Source Serif 4"/>
-              </a:rPr>
-              <a:t>Expect pushback on learning styles.</a:t>
-            </a:r>
-          </a:p>
-          <a:p>
-            <a:pPr algn="l">
-              <a:spcAft>
-                <a:spcPts val="585"/>
-              </a:spcAft>
-            </a:pPr>
-            <a:r>
-              <a:rPr sz="1300" b="0" i="0">
-                <a:solidFill>
-                  <a:srgbClr val="1C1B19"/>
-                </a:solidFill>
-                <a:latin typeface="Source Serif 4"/>
-              </a:rPr>
-              <a:t>Many students have been told they're visual learners. Preferring visuals is fine. The research says matching teaching to a style doesn't improve learning. Say it gently and move on. Nobody needs correcting in front of the room.</a:t>
-            </a:r>
-          </a:p>
-          <a:p>
-            <a:pPr algn="l">
-              <a:spcAft>
-                <a:spcPts val="585"/>
-              </a:spcAft>
-            </a:pPr>
-            <a:r>
-              <a:rPr sz="1300" b="0" i="0">
-                <a:solidFill>
-                  <a:srgbClr val="1C1B19"/>
-                </a:solidFill>
-                <a:latin typeface="Source Serif 4"/>
-              </a:rPr>
-              <a:t/>
-            </a:r>
-          </a:p>
-        </p:txBody>
-      </p:sp>
-      <p:sp>
-        <p:nvSpPr>
-          <p:cNvPr id="6" name="TextBox 5"/>
-          <p:cNvSpPr txBox="1"/>
-          <p:nvPr/>
-        </p:nvSpPr>
-        <p:spPr>
-          <a:xfrm>
-            <a:off x="6217920" y="1463040"/>
-            <a:ext cx="5394960" cy="4937760"/>
-          </a:xfrm>
-          <a:prstGeom prst="rect">
-            <a:avLst/>
-          </a:prstGeom>
-          <a:noFill/>
-        </p:spPr>
-        <p:txBody>
-          <a:bodyPr wrap="square" anchor="t" lIns="0" rIns="0" tIns="0" bIns="0">
-            <a:spAutoFit/>
-          </a:bodyPr>
-          <a:lstStyle/>
-          <a:p>
-            <a:pPr algn="l">
-              <a:spcAft>
-                <a:spcPts val="585"/>
-              </a:spcAft>
-            </a:pPr>
-            <a:r>
-              <a:rPr sz="1500" b="1" i="0">
-                <a:solidFill>
-                  <a:srgbClr val="1C1B19"/>
-                </a:solidFill>
-                <a:latin typeface="Source Serif 4"/>
-              </a:rPr>
-              <a:t>Be honest about the research.</a:t>
-            </a:r>
-          </a:p>
-          <a:p>
-            <a:pPr algn="l">
-              <a:spcAft>
-                <a:spcPts val="585"/>
-              </a:spcAft>
-            </a:pPr>
-            <a:r>
-              <a:rPr sz="1300" b="0" i="0">
-                <a:solidFill>
-                  <a:srgbClr val="1C1B19"/>
-                </a:solidFill>
-                <a:latin typeface="Source Serif 4"/>
-              </a:rPr>
-              <a:t>Most of these studies were with college students, and the math-mixing study was small. Methods raise the odds. They don't promise a grade. Students trust you more when you say so.</a:t>
-            </a:r>
-          </a:p>
-          <a:p>
-            <a:pPr algn="l">
-              <a:spcAft>
-                <a:spcPts val="585"/>
-              </a:spcAft>
-            </a:pPr>
-            <a:r>
-              <a:rPr sz="1300" b="0" i="0">
-                <a:solidFill>
-                  <a:srgbClr val="1C1B19"/>
-                </a:solidFill>
-                <a:latin typeface="Source Serif 4"/>
-              </a:rPr>
-              <a:t/>
-            </a:r>
-          </a:p>
-          <a:p>
-            <a:pPr algn="l">
-              <a:spcAft>
-                <a:spcPts val="585"/>
-              </a:spcAft>
-            </a:pPr>
-            <a:r>
-              <a:rPr sz="1500" b="1" i="0">
-                <a:solidFill>
-                  <a:srgbClr val="1C1B19"/>
-                </a:solidFill>
-                <a:latin typeface="Source Serif 4"/>
-              </a:rPr>
-              <a:t>Good methods and still struggling.</a:t>
-            </a:r>
-          </a:p>
-          <a:p>
-            <a:pPr algn="l">
-              <a:spcAft>
-                <a:spcPts val="585"/>
-              </a:spcAft>
-            </a:pPr>
-            <a:r>
-              <a:rPr sz="1300" b="0" i="0">
-                <a:solidFill>
-                  <a:srgbClr val="1C1B19"/>
-                </a:solidFill>
-                <a:latin typeface="Source Serif 4"/>
-              </a:rPr>
-              <a:t>If reading, writing or focusing takes a student much longer than it seems to take others, connect them with the learning specialist or a counselor. An evaluation can open up supports now and in college.</a:t>
-            </a:r>
-          </a:p>
-          <a:p>
-            <a:pPr algn="l">
-              <a:spcAft>
-                <a:spcPts val="585"/>
-              </a:spcAft>
-            </a:pPr>
-            <a:r>
-              <a:rPr sz="1300" b="0" i="0">
-                <a:solidFill>
-                  <a:srgbClr val="1C1B19"/>
-                </a:solidFill>
-                <a:latin typeface="Source Serif 4"/>
-              </a:rPr>
-              <a:t/>
-            </a:r>
-          </a:p>
-          <a:p>
-            <a:pPr algn="l">
-              <a:spcAft>
-                <a:spcPts val="585"/>
-              </a:spcAft>
-            </a:pPr>
-            <a:r>
-              <a:rPr sz="1500" b="1" i="0">
-                <a:solidFill>
-                  <a:srgbClr val="1C1B19"/>
-                </a:solidFill>
-                <a:latin typeface="Source Serif 4"/>
-              </a:rPr>
-              <a:t>When stress is the bigger problem.</a:t>
-            </a:r>
-          </a:p>
-          <a:p>
-            <a:pPr algn="l">
-              <a:spcAft>
-                <a:spcPts val="585"/>
-              </a:spcAft>
-            </a:pPr>
-            <a:r>
-              <a:rPr sz="1300" b="0" i="0">
-                <a:solidFill>
-                  <a:srgbClr val="1C1B19"/>
-                </a:solidFill>
-                <a:latin typeface="Source Serif 4"/>
-              </a:rPr>
-              <a:t>If a student says school stress is taking over their evenings, sleep or mood, thank them and walk them to a counselor that day. Don't work through it in front of the class.</a:t>
-            </a:r>
-          </a:p>
-          <a:p>
-            <a:pPr algn="l">
-              <a:spcAft>
-                <a:spcPts val="585"/>
-              </a:spcAft>
-            </a:pPr>
-            <a:r>
-              <a:rPr sz="1300" b="0" i="0">
-                <a:solidFill>
-                  <a:srgbClr val="1C1B19"/>
-                </a:solidFill>
-                <a:latin typeface="Source Serif 4"/>
-              </a:rPr>
-              <a:t/>
-            </a:r>
-          </a:p>
-        </p:txBody>
-      </p:sp>
-    </p:spTree>
-  </p:cSld>
-  <p:clrMapOvr>
-    <a:masterClrMapping/>
-  </p:clrMapOvr>
-</p:sld>
-</file>
-
-<file path=ppt/slides/slide3.xml><?xml version="1.0" encoding="utf-8"?>
-<p:sld xmlns:a="http://schemas.openxmlformats.org/drawingml/2006/main" xmlns:p="http://schemas.openxmlformats.org/presentationml/2006/main" xmlns:r="http://schemas.openxmlformats.org/officeDocument/2006/relationships" show="0">
-  <p:cSld>
-    <p:bg>
-      <p:bgPr>
-        <a:solidFill>
-          <a:srgbClr val="EEEBE4"/>
-        </a:solidFill>
-        <a:effectLst/>
-      </p:bgPr>
-    </p:bg>
-    <p:spTree>
-      <p:nvGrpSpPr>
-        <p:cNvPr id="1" name=""/>
-        <p:cNvGrpSpPr/>
-        <p:nvPr/>
-      </p:nvGrpSpPr>
-      <p:grpSpPr/>
-      <p:sp>
-        <p:nvSpPr>
-          <p:cNvPr id="2" name="Rectangle 1"/>
-          <p:cNvSpPr/>
-          <p:nvPr/>
-        </p:nvSpPr>
-        <p:spPr>
-          <a:xfrm>
-            <a:off x="0" y="0"/>
-            <a:ext cx="12191695" cy="384048"/>
-          </a:xfrm>
-          <a:prstGeom prst="rect">
-            <a:avLst/>
-          </a:prstGeom>
-          <a:solidFill>
-            <a:srgbClr val="0B2D5B"/>
-          </a:solidFill>
-          <a:ln>
-            <a:noFill/>
-          </a:ln>
-          <a:effectLst/>
-        </p:spPr>
-        <p:style>
-          <a:lnRef idx="1">
-            <a:schemeClr val="accent1"/>
-          </a:lnRef>
-          <a:fillRef idx="3">
-            <a:schemeClr val="accent1"/>
-          </a:fillRef>
-          <a:effectRef idx="2">
-            <a:schemeClr val="accent1"/>
-          </a:effectRef>
-          <a:fontRef idx="minor">
-            <a:schemeClr val="lt1"/>
-          </a:fontRef>
-        </p:style>
-        <p:txBody>
-          <a:bodyPr rtlCol="0" anchor="ctr"/>
-          <a:lstStyle/>
-          <a:p>
-            <a:pPr algn="ctr"/>
-          </a:p>
-        </p:txBody>
-      </p:sp>
-      <p:sp>
-        <p:nvSpPr>
-          <p:cNvPr id="3" name="TextBox 2"/>
-          <p:cNvSpPr txBox="1"/>
-          <p:nvPr/>
-        </p:nvSpPr>
-        <p:spPr>
-          <a:xfrm>
-            <a:off x="548640" y="100584"/>
-            <a:ext cx="10972800" cy="274320"/>
-          </a:xfrm>
-          <a:prstGeom prst="rect">
-            <a:avLst/>
-          </a:prstGeom>
-          <a:noFill/>
-        </p:spPr>
-        <p:txBody>
-          <a:bodyPr wrap="square" anchor="t" lIns="0" rIns="0" tIns="0" bIns="0">
-            <a:spAutoFit/>
-          </a:bodyPr>
-          <a:lstStyle/>
-          <a:p>
-            <a:pPr algn="l">
-              <a:spcAft>
-                <a:spcPts val="495"/>
-              </a:spcAft>
-            </a:pPr>
-            <a:r>
-              <a:rPr sz="1100" b="1" i="0">
-                <a:solidFill>
-                  <a:srgbClr val="FFFFFF"/>
-                </a:solidFill>
-                <a:latin typeface="Inter Tight"/>
-              </a:rPr>
-              <a:t>TEACHER PAGE  ·  skipped when you present  ·  Every student in the room</a:t>
-            </a:r>
-          </a:p>
-        </p:txBody>
-      </p:sp>
-      <p:sp>
-        <p:nvSpPr>
-          <p:cNvPr id="4" name="TextBox 3"/>
-          <p:cNvSpPr txBox="1"/>
-          <p:nvPr/>
-        </p:nvSpPr>
-        <p:spPr>
-          <a:xfrm>
-            <a:off x="548640" y="685800"/>
-            <a:ext cx="10972800" cy="640080"/>
-          </a:xfrm>
-          <a:prstGeom prst="rect">
-            <a:avLst/>
-          </a:prstGeom>
-          <a:noFill/>
-        </p:spPr>
-        <p:txBody>
-          <a:bodyPr wrap="square" anchor="t" lIns="0" rIns="0" tIns="0" bIns="0">
-            <a:spAutoFit/>
-          </a:bodyPr>
-          <a:lstStyle/>
-          <a:p>
-            <a:pPr algn="l">
-              <a:spcAft>
-                <a:spcPts val="1350"/>
-              </a:spcAft>
-            </a:pPr>
-            <a:r>
-              <a:rPr sz="3000" b="1" i="0">
-                <a:solidFill>
-                  <a:srgbClr val="1C1B19"/>
-                </a:solidFill>
-                <a:latin typeface="Source Serif 4"/>
-              </a:rPr>
-              <a:t>Every student in the room</a:t>
-            </a:r>
-          </a:p>
-        </p:txBody>
-      </p:sp>
-      <p:sp>
-        <p:nvSpPr>
-          <p:cNvPr id="5" name="TextBox 4"/>
-          <p:cNvSpPr txBox="1"/>
-          <p:nvPr/>
-        </p:nvSpPr>
-        <p:spPr>
-          <a:xfrm>
-            <a:off x="548640" y="1325880"/>
-            <a:ext cx="10972800" cy="365760"/>
-          </a:xfrm>
-          <a:prstGeom prst="rect">
-            <a:avLst/>
-          </a:prstGeom>
-          <a:noFill/>
-        </p:spPr>
-        <p:txBody>
-          <a:bodyPr wrap="square" anchor="t" lIns="0" rIns="0" tIns="0" bIns="0">
-            <a:spAutoFit/>
-          </a:bodyPr>
-          <a:lstStyle/>
-          <a:p>
-            <a:pPr algn="l">
-              <a:spcAft>
-                <a:spcPts val="630"/>
-              </a:spcAft>
-            </a:pPr>
-            <a:r>
-              <a:rPr sz="1400" b="0" i="0">
-                <a:solidFill>
-                  <a:srgbClr val="5D5A54"/>
-                </a:solidFill>
-                <a:latin typeface="Inter Tight"/>
-              </a:rPr>
-              <a:t>Culture, family, identity, ability and money: what to keep in mind for this topic.</a:t>
-            </a:r>
-          </a:p>
-        </p:txBody>
-      </p:sp>
-      <p:sp>
-        <p:nvSpPr>
-          <p:cNvPr id="6" name="TextBox 5"/>
-          <p:cNvSpPr txBox="1"/>
-          <p:nvPr/>
-        </p:nvSpPr>
-        <p:spPr>
-          <a:xfrm>
-            <a:off x="548640" y="1828800"/>
-            <a:ext cx="5394960" cy="4572000"/>
-          </a:xfrm>
-          <a:prstGeom prst="rect">
-            <a:avLst/>
-          </a:prstGeom>
-          <a:noFill/>
-        </p:spPr>
-        <p:txBody>
-          <a:bodyPr wrap="square" anchor="t" lIns="0" rIns="0" tIns="0" bIns="0">
-            <a:spAutoFit/>
-          </a:bodyPr>
-          <a:lstStyle/>
-          <a:p>
-            <a:pPr algn="l">
-              <a:spcAft>
-                <a:spcPts val="585"/>
-              </a:spcAft>
-            </a:pPr>
-            <a:r>
-              <a:rPr sz="1500" b="1" i="0">
-                <a:solidFill>
-                  <a:srgbClr val="1C1B19"/>
-                </a:solidFill>
-                <a:latin typeface="Source Serif 4"/>
-              </a:rPr>
-              <a:t>Learning differences and disability.</a:t>
-            </a:r>
-          </a:p>
-          <a:p>
-            <a:pPr algn="l">
-              <a:spcAft>
-                <a:spcPts val="585"/>
-              </a:spcAft>
-            </a:pPr>
-            <a:r>
-              <a:rPr sz="1300" b="0" i="0">
-                <a:solidFill>
-                  <a:srgbClr val="1C1B19"/>
-                </a:solidFill>
-                <a:latin typeface="Source Serif 4"/>
-              </a:rPr>
-              <a:t>The brain dump can be typed, spoken quietly into a phone, drawn as a map, or written as a list. Students with ADHD, dyslexia or slower processing may need more time on every activity. Measure what they can pull from memory, at whatever speed.</a:t>
-            </a:r>
-          </a:p>
-          <a:p>
-            <a:pPr algn="l">
-              <a:spcAft>
-                <a:spcPts val="585"/>
-              </a:spcAft>
-            </a:pPr>
-            <a:r>
-              <a:rPr sz="1300" b="0" i="0">
-                <a:solidFill>
-                  <a:srgbClr val="1C1B19"/>
-                </a:solidFill>
-                <a:latin typeface="Source Serif 4"/>
-              </a:rPr>
-              <a:t/>
-            </a:r>
-          </a:p>
-          <a:p>
-            <a:pPr algn="l">
-              <a:spcAft>
-                <a:spcPts val="585"/>
-              </a:spcAft>
-            </a:pPr>
-            <a:r>
-              <a:rPr sz="1500" b="1" i="0">
-                <a:solidFill>
-                  <a:srgbClr val="1C1B19"/>
-                </a:solidFill>
-                <a:latin typeface="Source Serif 4"/>
-              </a:rPr>
-              <a:t>Not every student has the same study time.</a:t>
-            </a:r>
-          </a:p>
-          <a:p>
-            <a:pPr algn="l">
-              <a:spcAft>
-                <a:spcPts val="585"/>
-              </a:spcAft>
-            </a:pPr>
-            <a:r>
-              <a:rPr sz="1300" b="0" i="0">
-                <a:solidFill>
-                  <a:srgbClr val="1C1B19"/>
-                </a:solidFill>
-                <a:latin typeface="Source Serif 4"/>
-              </a:rPr>
-              <a:t>Some students work, ride a long bus, or watch younger siblings after school. "Count questions, not hours" helps here: short quizzing sessions fit a tight evening. Every method in this lesson is free, and released practice questions are free online.</a:t>
-            </a:r>
-          </a:p>
-          <a:p>
-            <a:pPr algn="l">
-              <a:spcAft>
-                <a:spcPts val="585"/>
-              </a:spcAft>
-            </a:pPr>
-            <a:r>
-              <a:rPr sz="1300" b="0" i="0">
-                <a:solidFill>
-                  <a:srgbClr val="1C1B19"/>
-                </a:solidFill>
-                <a:latin typeface="Source Serif 4"/>
-              </a:rPr>
-              <a:t/>
-            </a:r>
-          </a:p>
-          <a:p>
-            <a:pPr algn="l">
-              <a:spcAft>
-                <a:spcPts val="585"/>
-              </a:spcAft>
-            </a:pPr>
-            <a:r>
-              <a:rPr sz="1500" b="1" i="0">
-                <a:solidFill>
-                  <a:srgbClr val="1C1B19"/>
-                </a:solidFill>
-                <a:latin typeface="Source Serif 4"/>
-              </a:rPr>
-              <a:t>A quiet place isn't a given.</a:t>
-            </a:r>
-          </a:p>
-          <a:p>
-            <a:pPr algn="l">
-              <a:spcAft>
-                <a:spcPts val="585"/>
-              </a:spcAft>
-            </a:pPr>
-            <a:r>
-              <a:rPr sz="1300" b="0" i="0">
-                <a:solidFill>
-                  <a:srgbClr val="1C1B19"/>
-                </a:solidFill>
-                <a:latin typeface="Source Serif 4"/>
-              </a:rPr>
-              <a:t>Some students share a room or study in a busy kitchen. Mention the school library and any after-school study space. A brain dump works on a bus or in a hallway.</a:t>
-            </a:r>
-          </a:p>
-          <a:p>
-            <a:pPr algn="l">
-              <a:spcAft>
-                <a:spcPts val="585"/>
-              </a:spcAft>
-            </a:pPr>
-            <a:r>
-              <a:rPr sz="1300" b="0" i="0">
-                <a:solidFill>
-                  <a:srgbClr val="1C1B19"/>
-                </a:solidFill>
-                <a:latin typeface="Source Serif 4"/>
-              </a:rPr>
-              <a:t/>
-            </a:r>
-          </a:p>
-        </p:txBody>
-      </p:sp>
-      <p:sp>
-        <p:nvSpPr>
-          <p:cNvPr id="7" name="TextBox 6"/>
-          <p:cNvSpPr txBox="1"/>
-          <p:nvPr/>
-        </p:nvSpPr>
-        <p:spPr>
-          <a:xfrm>
-            <a:off x="6217920" y="1828800"/>
-            <a:ext cx="5394960" cy="4572000"/>
-          </a:xfrm>
-          <a:prstGeom prst="rect">
-            <a:avLst/>
-          </a:prstGeom>
-          <a:noFill/>
-        </p:spPr>
-        <p:txBody>
-          <a:bodyPr wrap="square" anchor="t" lIns="0" rIns="0" tIns="0" bIns="0">
-            <a:spAutoFit/>
-          </a:bodyPr>
-          <a:lstStyle/>
-          <a:p>
-            <a:pPr algn="l">
-              <a:spcAft>
-                <a:spcPts val="585"/>
-              </a:spcAft>
-            </a:pPr>
-            <a:r>
-              <a:rPr sz="1500" b="1" i="0">
-                <a:solidFill>
-                  <a:srgbClr val="1C1B19"/>
-                </a:solidFill>
-                <a:latin typeface="Source Serif 4"/>
-              </a:rPr>
-              <a:t>Who quizzes you can be anyone.</a:t>
-            </a:r>
-          </a:p>
-          <a:p>
-            <a:pPr algn="l">
-              <a:spcAft>
-                <a:spcPts val="585"/>
-              </a:spcAft>
-            </a:pPr>
-            <a:r>
-              <a:rPr sz="1300" b="0" i="0">
-                <a:solidFill>
-                  <a:srgbClr val="1C1B19"/>
-                </a:solidFill>
-                <a:latin typeface="Source Serif 4"/>
-              </a:rPr>
-              <a:t>Don't assume a parent is home to help. A sibling, a grandparent, a friend on a call, or a stack of flashcards all work. Rosa's scenario has a grandmother in it; swap in whatever fits your students.</a:t>
-            </a:r>
-          </a:p>
-          <a:p>
-            <a:pPr algn="l">
-              <a:spcAft>
-                <a:spcPts val="585"/>
-              </a:spcAft>
-            </a:pPr>
-            <a:r>
-              <a:rPr sz="1300" b="0" i="0">
-                <a:solidFill>
-                  <a:srgbClr val="1C1B19"/>
-                </a:solidFill>
-                <a:latin typeface="Source Serif 4"/>
-              </a:rPr>
-              <a:t/>
-            </a:r>
-          </a:p>
-          <a:p>
-            <a:pPr algn="l">
-              <a:spcAft>
-                <a:spcPts val="585"/>
-              </a:spcAft>
-            </a:pPr>
-            <a:r>
-              <a:rPr sz="1500" b="1" i="0">
-                <a:solidFill>
-                  <a:srgbClr val="1C1B19"/>
-                </a:solidFill>
-                <a:latin typeface="Source Serif 4"/>
-              </a:rPr>
-              <a:t>Families hold different views on effort.</a:t>
-            </a:r>
-          </a:p>
-          <a:p>
-            <a:pPr algn="l">
-              <a:spcAft>
-                <a:spcPts val="585"/>
-              </a:spcAft>
-            </a:pPr>
-            <a:r>
-              <a:rPr sz="1300" b="0" i="0">
-                <a:solidFill>
-                  <a:srgbClr val="1C1B19"/>
-                </a:solidFill>
-                <a:latin typeface="Source Serif 4"/>
-              </a:rPr>
-              <a:t>For some families, long hours at the desk are how effort shows. Respect that. The point is to make those hours count. Ask students how studying is talked about at home, as a private thought.</a:t>
-            </a:r>
-          </a:p>
-          <a:p>
-            <a:pPr algn="l">
-              <a:spcAft>
-                <a:spcPts val="585"/>
-              </a:spcAft>
-            </a:pPr>
-            <a:r>
-              <a:rPr sz="1300" b="0" i="0">
-                <a:solidFill>
-                  <a:srgbClr val="1C1B19"/>
-                </a:solidFill>
-                <a:latin typeface="Source Serif 4"/>
-              </a:rPr>
-              <a:t/>
-            </a:r>
-          </a:p>
-          <a:p>
-            <a:pPr algn="l">
-              <a:spcAft>
-                <a:spcPts val="585"/>
-              </a:spcAft>
-            </a:pPr>
-            <a:r>
-              <a:rPr sz="1500" b="1" i="0">
-                <a:solidFill>
-                  <a:srgbClr val="1C1B19"/>
-                </a:solidFill>
-                <a:latin typeface="Source Serif 4"/>
-              </a:rPr>
-              <a:t>Language and the calendar.</a:t>
-            </a:r>
-          </a:p>
-          <a:p>
-            <a:pPr algn="l">
-              <a:spcAft>
-                <a:spcPts val="585"/>
-              </a:spcAft>
-            </a:pPr>
-            <a:r>
-              <a:rPr sz="1300" b="0" i="0">
-                <a:solidFill>
-                  <a:srgbClr val="1C1B19"/>
-                </a:solidFill>
-                <a:latin typeface="Source Serif 4"/>
-              </a:rPr>
-              <a:t>Students learning English can brain dump in any language, then check against notes in English. Religious holidays, fasting and family events can block whole days; a spaced plan moves around them more easily than a cram can.</a:t>
-            </a:r>
-          </a:p>
-          <a:p>
-            <a:pPr algn="l">
-              <a:spcAft>
-                <a:spcPts val="585"/>
-              </a:spcAft>
-            </a:pPr>
-            <a:r>
-              <a:rPr sz="1300" b="0" i="0">
-                <a:solidFill>
-                  <a:srgbClr val="1C1B19"/>
-                </a:solidFill>
-                <a:latin typeface="Source Serif 4"/>
-              </a:rPr>
-              <a:t/>
-            </a:r>
-          </a:p>
-        </p:txBody>
-      </p:sp>
-    </p:spTree>
-  </p:cSld>
-  <p:clrMapOvr>
-    <a:masterClrMapping/>
-  </p:clrMapOvr>
-</p:sld>
-</file>
-
-<file path=ppt/slides/slide4.xml><?xml version="1.0" encoding="utf-8"?>
-<p:sld xmlns:a="http://schemas.openxmlformats.org/drawingml/2006/main" xmlns:p="http://schemas.openxmlformats.org/presentationml/2006/main" xmlns:r="http://schemas.openxmlformats.org/officeDocument/2006/relationships" show="0">
-  <p:cSld>
-    <p:bg>
-      <p:bgPr>
-        <a:solidFill>
-          <a:srgbClr val="EEEBE4"/>
-        </a:solidFill>
-        <a:effectLst/>
-      </p:bgPr>
-    </p:bg>
-    <p:spTree>
-      <p:nvGrpSpPr>
-        <p:cNvPr id="1" name=""/>
-        <p:cNvGrpSpPr/>
-        <p:nvPr/>
-      </p:nvGrpSpPr>
-      <p:grpSpPr/>
-      <p:sp>
-        <p:nvSpPr>
-          <p:cNvPr id="2" name="Rectangle 1"/>
-          <p:cNvSpPr/>
-          <p:nvPr/>
-        </p:nvSpPr>
-        <p:spPr>
-          <a:xfrm>
-            <a:off x="0" y="0"/>
-            <a:ext cx="12191695" cy="384048"/>
-          </a:xfrm>
-          <a:prstGeom prst="rect">
-            <a:avLst/>
-          </a:prstGeom>
-          <a:solidFill>
-            <a:srgbClr val="0B2D5B"/>
-          </a:solidFill>
-          <a:ln>
-            <a:noFill/>
-          </a:ln>
-          <a:effectLst/>
-        </p:spPr>
-        <p:style>
-          <a:lnRef idx="1">
-            <a:schemeClr val="accent1"/>
-          </a:lnRef>
-          <a:fillRef idx="3">
-            <a:schemeClr val="accent1"/>
-          </a:fillRef>
-          <a:effectRef idx="2">
-            <a:schemeClr val="accent1"/>
-          </a:effectRef>
-          <a:fontRef idx="minor">
-            <a:schemeClr val="lt1"/>
-          </a:fontRef>
-        </p:style>
-        <p:txBody>
-          <a:bodyPr rtlCol="0" anchor="ctr"/>
-          <a:lstStyle/>
-          <a:p>
-            <a:pPr algn="ctr"/>
-          </a:p>
-        </p:txBody>
-      </p:sp>
-      <p:sp>
-        <p:nvSpPr>
-          <p:cNvPr id="3" name="TextBox 2"/>
-          <p:cNvSpPr txBox="1"/>
-          <p:nvPr/>
-        </p:nvSpPr>
-        <p:spPr>
-          <a:xfrm>
-            <a:off x="548640" y="100584"/>
-            <a:ext cx="10972800" cy="274320"/>
-          </a:xfrm>
-          <a:prstGeom prst="rect">
-            <a:avLst/>
-          </a:prstGeom>
-          <a:noFill/>
-        </p:spPr>
-        <p:txBody>
-          <a:bodyPr wrap="square" anchor="t" lIns="0" rIns="0" tIns="0" bIns="0">
-            <a:spAutoFit/>
-          </a:bodyPr>
-          <a:lstStyle/>
-          <a:p>
-            <a:pPr algn="l">
-              <a:spcAft>
-                <a:spcPts val="495"/>
-              </a:spcAft>
-            </a:pPr>
-            <a:r>
-              <a:rPr sz="1100" b="1" i="0">
-                <a:solidFill>
-                  <a:srgbClr val="FFFFFF"/>
-                </a:solidFill>
-                <a:latin typeface="Inter Tight"/>
-              </a:rPr>
-              <a:t>TEACHER PAGE  ·  skipped when you present  ·  Background</a:t>
-            </a:r>
-          </a:p>
-        </p:txBody>
-      </p:sp>
-      <p:sp>
-        <p:nvSpPr>
-          <p:cNvPr id="4" name="TextBox 3"/>
-          <p:cNvSpPr txBox="1"/>
-          <p:nvPr/>
-        </p:nvSpPr>
-        <p:spPr>
-          <a:xfrm>
-            <a:off x="548640" y="685800"/>
-            <a:ext cx="10972800" cy="640080"/>
-          </a:xfrm>
-          <a:prstGeom prst="rect">
-            <a:avLst/>
-          </a:prstGeom>
-          <a:noFill/>
-        </p:spPr>
-        <p:txBody>
-          <a:bodyPr wrap="square" anchor="t" lIns="0" rIns="0" tIns="0" bIns="0">
-            <a:spAutoFit/>
-          </a:bodyPr>
-          <a:lstStyle/>
-          <a:p>
-            <a:pPr algn="l">
-              <a:spcAft>
-                <a:spcPts val="1350"/>
-              </a:spcAft>
-            </a:pPr>
-            <a:r>
-              <a:rPr sz="3000" b="1" i="0">
-                <a:solidFill>
-                  <a:srgbClr val="1C1B19"/>
-                </a:solidFill>
-                <a:latin typeface="Source Serif 4"/>
-              </a:rPr>
-              <a:t>What the research says</a:t>
-            </a:r>
-          </a:p>
-        </p:txBody>
-      </p:sp>
-      <p:sp>
-        <p:nvSpPr>
-          <p:cNvPr id="5" name="TextBox 4"/>
-          <p:cNvSpPr txBox="1"/>
-          <p:nvPr/>
-        </p:nvSpPr>
-        <p:spPr>
-          <a:xfrm>
-            <a:off x="548640" y="1463040"/>
-            <a:ext cx="5394960" cy="4937760"/>
-          </a:xfrm>
-          <a:prstGeom prst="rect">
-            <a:avLst/>
-          </a:prstGeom>
-          <a:noFill/>
-        </p:spPr>
-        <p:txBody>
-          <a:bodyPr wrap="square" anchor="t" lIns="0" rIns="0" tIns="0" bIns="0">
-            <a:spAutoFit/>
-          </a:bodyPr>
-          <a:lstStyle/>
-          <a:p>
-            <a:pPr algn="l">
-              <a:spcAft>
-                <a:spcPts val="585"/>
-              </a:spcAft>
-            </a:pPr>
-            <a:r>
-              <a:rPr sz="1300" b="0" i="0">
-                <a:solidFill>
-                  <a:srgbClr val="1C1B19"/>
-                </a:solidFill>
-                <a:latin typeface="Source Serif 4"/>
-              </a:rPr>
-              <a:t>Students who reread a passage did best on a test five minutes later. Students who read it once and then wrote down all they could remember beat them by 14 points at two days and at one week. The rereaders predicted they'd remember the most and remembered the least.</a:t>
-            </a:r>
-          </a:p>
-          <a:p>
-            <a:pPr algn="l">
-              <a:spcAft>
-                <a:spcPts val="585"/>
-              </a:spcAft>
-            </a:pPr>
-            <a:r>
-              <a:rPr sz="1050" b="0" i="0">
-                <a:solidFill>
-                  <a:srgbClr val="5D5A54"/>
-                </a:solidFill>
-                <a:latin typeface="Inter Tight"/>
-              </a:rPr>
-              <a:t>Roediger and Karpicke, Psychological Science, 2006</a:t>
-            </a:r>
-          </a:p>
-          <a:p>
-            <a:pPr algn="l">
-              <a:spcAft>
-                <a:spcPts val="585"/>
-              </a:spcAft>
-            </a:pPr>
-            <a:r>
-              <a:rPr sz="1300" b="0" i="0">
-                <a:solidFill>
-                  <a:srgbClr val="1C1B19"/>
-                </a:solidFill>
-                <a:latin typeface="Source Serif 4"/>
-              </a:rPr>
-              <a:t>A review of hundreds of studies on ten common study techniques rated only two "high utility": practice testing and spreading study out over time. Rereading, highlighting and summarizing rated low.</a:t>
-            </a:r>
-          </a:p>
-          <a:p>
-            <a:pPr algn="l">
-              <a:spcAft>
-                <a:spcPts val="585"/>
-              </a:spcAft>
-            </a:pPr>
-            <a:r>
-              <a:rPr sz="1050" b="0" i="0">
-                <a:solidFill>
-                  <a:srgbClr val="5D5A54"/>
-                </a:solidFill>
-                <a:latin typeface="Inter Tight"/>
-              </a:rPr>
-              <a:t>Dunlosky et al., Psychological Science in the Public Interest, 2013</a:t>
-            </a:r>
-          </a:p>
-          <a:p>
-            <a:pPr algn="l">
-              <a:spcAft>
-                <a:spcPts val="585"/>
-              </a:spcAft>
-            </a:pPr>
-            <a:r>
-              <a:rPr sz="1300" b="0" i="0">
-                <a:solidFill>
-                  <a:srgbClr val="1C1B19"/>
-                </a:solidFill>
-                <a:latin typeface="Source Serif 4"/>
-              </a:rPr>
-              <a:t>About 84% of college students said they reread notes or textbooks to study. About 11% practiced recalling information, and only 1% called that their main method.</a:t>
-            </a:r>
-          </a:p>
-          <a:p>
-            <a:pPr algn="l">
-              <a:spcAft>
-                <a:spcPts val="585"/>
-              </a:spcAft>
-            </a:pPr>
-            <a:r>
-              <a:rPr sz="1050" b="0" i="0">
-                <a:solidFill>
-                  <a:srgbClr val="5D5A54"/>
-                </a:solidFill>
-                <a:latin typeface="Inter Tight"/>
-              </a:rPr>
-              <a:t>Karpicke, Butler and Roediger, Memory, 2009</a:t>
-            </a:r>
-          </a:p>
-          <a:p>
-            <a:pPr algn="l">
-              <a:spcAft>
-                <a:spcPts val="585"/>
-              </a:spcAft>
-            </a:pPr>
-            <a:r>
-              <a:rPr sz="1300" b="0" i="0">
-                <a:solidFill>
-                  <a:srgbClr val="1C1B19"/>
-                </a:solidFill>
-                <a:latin typeface="Source Serif 4"/>
-              </a:rPr>
-              <a:t>"Desirable difficulties": recalling from memory, waiting between sessions and mixing problem types feel slower in the moment, and that effort builds memory you can use later.</a:t>
-            </a:r>
-          </a:p>
-          <a:p>
-            <a:pPr algn="l">
-              <a:spcAft>
-                <a:spcPts val="585"/>
-              </a:spcAft>
-            </a:pPr>
-            <a:r>
-              <a:rPr sz="1050" b="0" i="0">
-                <a:solidFill>
-                  <a:srgbClr val="5D5A54"/>
-                </a:solidFill>
-                <a:latin typeface="Inter Tight"/>
-              </a:rPr>
-              <a:t>Bjork, 1994</a:t>
-            </a:r>
-          </a:p>
-        </p:txBody>
-      </p:sp>
-      <p:sp>
-        <p:nvSpPr>
-          <p:cNvPr id="6" name="TextBox 5"/>
-          <p:cNvSpPr txBox="1"/>
-          <p:nvPr/>
-        </p:nvSpPr>
-        <p:spPr>
-          <a:xfrm>
-            <a:off x="6217920" y="1463040"/>
-            <a:ext cx="5394960" cy="4937760"/>
-          </a:xfrm>
-          <a:prstGeom prst="rect">
-            <a:avLst/>
-          </a:prstGeom>
-          <a:noFill/>
-        </p:spPr>
-        <p:txBody>
-          <a:bodyPr wrap="square" anchor="t" lIns="0" rIns="0" tIns="0" bIns="0">
-            <a:spAutoFit/>
-          </a:bodyPr>
-          <a:lstStyle/>
-          <a:p>
-            <a:pPr algn="l">
-              <a:spcAft>
-                <a:spcPts val="585"/>
-              </a:spcAft>
-            </a:pPr>
-            <a:r>
-              <a:rPr sz="1300" b="0" i="0">
-                <a:solidFill>
-                  <a:srgbClr val="1C1B19"/>
-                </a:solidFill>
-                <a:latin typeface="Source Serif 4"/>
-              </a:rPr>
-              <a:t>Students who practiced math problems in blocks got 89% right during practice versus 60% for mixed practice. A week later the mixed group scored 63% and the blocked group 20%. A small study; mixed practice has held up in classrooms since.</a:t>
-            </a:r>
-          </a:p>
-          <a:p>
-            <a:pPr algn="l">
-              <a:spcAft>
-                <a:spcPts val="585"/>
-              </a:spcAft>
-            </a:pPr>
-            <a:r>
-              <a:rPr sz="1050" b="0" i="0">
-                <a:solidFill>
-                  <a:srgbClr val="5D5A54"/>
-                </a:solidFill>
-                <a:latin typeface="Inter Tight"/>
-              </a:rPr>
-              <a:t>Rohrer and Taylor, Instructional Science, 2007</a:t>
-            </a:r>
-          </a:p>
-          <a:p>
-            <a:pPr algn="l">
-              <a:spcAft>
-                <a:spcPts val="585"/>
-              </a:spcAft>
-            </a:pPr>
-            <a:r>
-              <a:rPr sz="1300" b="0" i="0">
-                <a:solidFill>
-                  <a:srgbClr val="1C1B19"/>
-                </a:solidFill>
-                <a:latin typeface="Source Serif 4"/>
-              </a:rPr>
-              <a:t>In a study of more than 1,350 people, the best gap between study sessions grew with the time until the test: a day or two for a test a week away, closer to a month for a test a year away.</a:t>
-            </a:r>
-          </a:p>
-          <a:p>
-            <a:pPr algn="l">
-              <a:spcAft>
-                <a:spcPts val="585"/>
-              </a:spcAft>
-            </a:pPr>
-            <a:r>
-              <a:rPr sz="1050" b="0" i="0">
-                <a:solidFill>
-                  <a:srgbClr val="5D5A54"/>
-                </a:solidFill>
-                <a:latin typeface="Inter Tight"/>
-              </a:rPr>
-              <a:t>Cepeda et al., Psychological Science, 2008</a:t>
-            </a:r>
-          </a:p>
-          <a:p>
-            <a:pPr algn="l">
-              <a:spcAft>
-                <a:spcPts val="585"/>
-              </a:spcAft>
-            </a:pPr>
-            <a:r>
-              <a:rPr sz="1300" b="0" i="0">
-                <a:solidFill>
-                  <a:srgbClr val="1C1B19"/>
-                </a:solidFill>
-                <a:latin typeface="Source Serif 4"/>
-              </a:rPr>
-              <a:t>During sleep the brain replays and strengthens what was learned that day. Sleep is an active part of memory consolidation.</a:t>
-            </a:r>
-          </a:p>
-          <a:p>
-            <a:pPr algn="l">
-              <a:spcAft>
-                <a:spcPts val="585"/>
-              </a:spcAft>
-            </a:pPr>
-            <a:r>
-              <a:rPr sz="1050" b="0" i="0">
-                <a:solidFill>
-                  <a:srgbClr val="5D5A54"/>
-                </a:solidFill>
-                <a:latin typeface="Inter Tight"/>
-              </a:rPr>
-              <a:t>Diekelmann and Born, Nature Reviews Neuroscience, 2010</a:t>
-            </a:r>
-          </a:p>
-          <a:p>
-            <a:pPr algn="l">
-              <a:spcAft>
-                <a:spcPts val="585"/>
-              </a:spcAft>
-            </a:pPr>
-            <a:r>
-              <a:rPr sz="1300" b="0" i="0">
-                <a:solidFill>
-                  <a:srgbClr val="1C1B19"/>
-                </a:solidFill>
-                <a:latin typeface="Source Serif 4"/>
-              </a:rPr>
-              <a:t>No good evidence that teaching to a person's preferred "learning style" improves learning.</a:t>
-            </a:r>
-          </a:p>
-          <a:p>
-            <a:pPr algn="l">
-              <a:spcAft>
-                <a:spcPts val="585"/>
-              </a:spcAft>
-            </a:pPr>
-            <a:r>
-              <a:rPr sz="1050" b="0" i="0">
-                <a:solidFill>
-                  <a:srgbClr val="5D5A54"/>
-                </a:solidFill>
-                <a:latin typeface="Inter Tight"/>
-              </a:rPr>
-              <a:t>Pashler et al., Psychological Science in the Public Interest, 2008</a:t>
-            </a:r>
-          </a:p>
-        </p:txBody>
-      </p:sp>
-    </p:spTree>
-  </p:cSld>
-  <p:clrMapOvr>
-    <a:masterClrMapping/>
-  </p:clrMapOvr>
-</p:sld>
-</file>
-
-<file path=ppt/slides/slide5.xml><?xml version="1.0" encoding="utf-8"?>
-<p:sld xmlns:a="http://schemas.openxmlformats.org/drawingml/2006/main" xmlns:p="http://schemas.openxmlformats.org/presentationml/2006/main" xmlns:r="http://schemas.openxmlformats.org/officeDocument/2006/relationships">
-  <p:cSld>
-    <p:bg>
-      <p:bgPr>
-        <a:solidFill>
-          <a:srgbClr val="0B2D5B"/>
-        </a:solidFill>
-        <a:effectLst/>
-      </p:bgPr>
-    </p:bg>
-    <p:spTree>
-      <p:nvGrpSpPr>
-        <p:cNvPr id="1" name=""/>
-        <p:cNvGrpSpPr/>
-        <p:nvPr/>
-      </p:nvGrpSpPr>
-      <p:grpSpPr/>
-      <p:sp>
-        <p:nvSpPr>
-          <p:cNvPr id="2" name="Rectangle 1"/>
-          <p:cNvSpPr/>
-          <p:nvPr/>
-        </p:nvSpPr>
-        <p:spPr>
-          <a:xfrm>
-            <a:off x="548640" y="502920"/>
-            <a:ext cx="457200" cy="54864"/>
-          </a:xfrm>
-          <a:prstGeom prst="rect">
-            <a:avLst/>
-          </a:prstGeom>
-          <a:solidFill>
-            <a:srgbClr val="F47B20"/>
-          </a:solidFill>
-          <a:ln>
-            <a:noFill/>
-          </a:ln>
-          <a:effectLst/>
-        </p:spPr>
-        <p:style>
-          <a:lnRef idx="1">
-            <a:schemeClr val="accent1"/>
-          </a:lnRef>
-          <a:fillRef idx="3">
-            <a:schemeClr val="accent1"/>
-          </a:fillRef>
-          <a:effectRef idx="2">
-            <a:schemeClr val="accent1"/>
-          </a:effectRef>
-          <a:fontRef idx="minor">
-            <a:schemeClr val="lt1"/>
-          </a:fontRef>
-        </p:style>
-        <p:txBody>
-          <a:bodyPr rtlCol="0" anchor="ctr"/>
-          <a:lstStyle/>
-          <a:p>
-            <a:pPr algn="ctr"/>
-          </a:p>
-        </p:txBody>
-      </p:sp>
-      <p:sp>
-        <p:nvSpPr>
-          <p:cNvPr id="3" name="TextBox 2"/>
-          <p:cNvSpPr txBox="1"/>
-          <p:nvPr/>
-        </p:nvSpPr>
-        <p:spPr>
-          <a:xfrm>
-            <a:off x="1143000" y="393192"/>
-            <a:ext cx="8229600" cy="274320"/>
-          </a:xfrm>
-          <a:prstGeom prst="rect">
-            <a:avLst/>
-          </a:prstGeom>
-          <a:noFill/>
-        </p:spPr>
-        <p:txBody>
-          <a:bodyPr wrap="square" anchor="t" lIns="0" rIns="0" tIns="0" bIns="0">
-            <a:spAutoFit/>
-          </a:bodyPr>
-          <a:lstStyle/>
-          <a:p>
-            <a:pPr algn="l">
-              <a:spcAft>
-                <a:spcPts val="540"/>
-              </a:spcAft>
-            </a:pPr>
-            <a:r>
-              <a:rPr sz="1200" b="1" i="0">
-                <a:solidFill>
-                  <a:srgbClr val="5D5A54"/>
-                </a:solidFill>
-                <a:latin typeface="Inter Tight"/>
-              </a:rPr>
-              <a:t>STUDY SMARTER, NOT LONGER</a:t>
-            </a:r>
-          </a:p>
-        </p:txBody>
-      </p:sp>
-      <p:sp>
-        <p:nvSpPr>
-          <p:cNvPr id="4" name="TextBox 3"/>
-          <p:cNvSpPr txBox="1"/>
-          <p:nvPr/>
-        </p:nvSpPr>
-        <p:spPr>
-          <a:xfrm>
-            <a:off x="8229600" y="6400800"/>
-            <a:ext cx="3410712" cy="274320"/>
-          </a:xfrm>
-          <a:prstGeom prst="rect">
-            <a:avLst/>
-          </a:prstGeom>
-          <a:noFill/>
-        </p:spPr>
-        <p:txBody>
-          <a:bodyPr wrap="square" anchor="t" lIns="0" rIns="0" tIns="0" bIns="0">
-            <a:spAutoFit/>
-          </a:bodyPr>
-          <a:lstStyle/>
-          <a:p>
-            <a:pPr algn="r">
-              <a:spcAft>
-                <a:spcPts val="450"/>
-              </a:spcAft>
-            </a:pPr>
-            <a:r>
-              <a:rPr sz="1000" b="0" i="0">
-                <a:solidFill>
-                  <a:srgbClr val="5D5A54"/>
-                </a:solidFill>
-                <a:latin typeface="Inter Tight"/>
-              </a:rPr>
-              <a:t>Beaver Counseling</a:t>
-            </a:r>
-          </a:p>
-        </p:txBody>
-      </p:sp>
-      <p:sp>
-        <p:nvSpPr>
-          <p:cNvPr id="5" name="TextBox 4"/>
-          <p:cNvSpPr txBox="1"/>
-          <p:nvPr/>
-        </p:nvSpPr>
-        <p:spPr>
-          <a:xfrm>
-            <a:off x="822960" y="2011680"/>
-            <a:ext cx="10515600" cy="1463040"/>
-          </a:xfrm>
-          <a:prstGeom prst="rect">
-            <a:avLst/>
-          </a:prstGeom>
-          <a:noFill/>
-        </p:spPr>
-        <p:txBody>
-          <a:bodyPr wrap="square" anchor="b" lIns="0" rIns="0" tIns="0" bIns="0">
-            <a:spAutoFit/>
-          </a:bodyPr>
-          <a:lstStyle/>
-          <a:p>
-            <a:pPr algn="l">
-              <a:spcAft>
-                <a:spcPts val="2700"/>
-              </a:spcAft>
-            </a:pPr>
-            <a:r>
-              <a:rPr sz="6000" b="1" i="0">
-                <a:solidFill>
-                  <a:srgbClr val="FFFFFF"/>
-                </a:solidFill>
-                <a:latin typeface="Source Serif 4"/>
-              </a:rPr>
-              <a:t>Study Smarter, Not Longer</a:t>
-            </a:r>
-          </a:p>
-        </p:txBody>
-      </p:sp>
-      <p:sp>
-        <p:nvSpPr>
-          <p:cNvPr id="6" name="TextBox 5"/>
-          <p:cNvSpPr txBox="1"/>
-          <p:nvPr/>
-        </p:nvSpPr>
-        <p:spPr>
-          <a:xfrm>
-            <a:off x="822960" y="3611880"/>
-            <a:ext cx="10515600" cy="914400"/>
-          </a:xfrm>
-          <a:prstGeom prst="rect">
-            <a:avLst/>
-          </a:prstGeom>
-          <a:noFill/>
-        </p:spPr>
-        <p:txBody>
-          <a:bodyPr wrap="square" anchor="t" lIns="0" rIns="0" tIns="0" bIns="0">
-            <a:spAutoFit/>
-          </a:bodyPr>
-          <a:lstStyle/>
-          <a:p>
-            <a:pPr algn="l">
-              <a:spcAft>
-                <a:spcPts val="1080"/>
-              </a:spcAft>
-            </a:pPr>
-            <a:r>
-              <a:rPr sz="2400" b="0" i="1">
-                <a:solidFill>
-                  <a:srgbClr val="E8E4DA"/>
-                </a:solidFill>
-                <a:latin typeface="Source Serif 4"/>
-              </a:rPr>
-              <a:t>The study methods that feel best usually work worst.</a:t>
-            </a:r>
-          </a:p>
-        </p:txBody>
-      </p:sp>
-      <p:sp>
-        <p:nvSpPr>
-          <p:cNvPr id="7" name="TextBox 6"/>
-          <p:cNvSpPr txBox="1"/>
-          <p:nvPr/>
-        </p:nvSpPr>
-        <p:spPr>
-          <a:xfrm>
-            <a:off x="822960" y="6035040"/>
-            <a:ext cx="7315200" cy="365760"/>
-          </a:xfrm>
-          <a:prstGeom prst="rect">
-            <a:avLst/>
-          </a:prstGeom>
-          <a:noFill/>
-        </p:spPr>
-        <p:txBody>
-          <a:bodyPr wrap="square" anchor="t" lIns="0" rIns="0" tIns="0" bIns="0">
-            <a:spAutoFit/>
-          </a:bodyPr>
-          <a:lstStyle/>
-          <a:p>
-            <a:pPr algn="l">
-              <a:spcAft>
-                <a:spcPts val="585"/>
-              </a:spcAft>
-            </a:pPr>
-            <a:r>
-              <a:rPr sz="1300" b="0" i="0">
-                <a:solidFill>
-                  <a:srgbClr val="E8E4DA"/>
-                </a:solidFill>
-                <a:latin typeface="Inter Tight"/>
-              </a:rPr>
-              <a:t>Beaver Upper School · Counseling</a:t>
+              <a:t>Won at two days and one week</a:t>
             </a:r>
           </a:p>
         </p:txBody>
@@ -8976,7 +9790,7 @@
                 </a:solidFill>
                 <a:latin typeface="Inter Tight"/>
               </a:rPr>
-              <a:t>MYTH OR FACT?</a:t>
+              <a:t>WHY IT FOOLS YOU</a:t>
             </a:r>
           </a:p>
         </p:txBody>
@@ -9028,7 +9842,46 @@
         </p:nvSpPr>
         <p:spPr>
           <a:xfrm>
-            <a:off x="822960" y="1005840"/>
+            <a:off x="822960" y="1463040"/>
+            <a:ext cx="10515600" cy="3291840"/>
+          </a:xfrm>
+          <a:prstGeom prst="rect">
+            <a:avLst/>
+          </a:prstGeom>
+          <a:noFill/>
+        </p:spPr>
+        <p:txBody>
+          <a:bodyPr wrap="square" anchor="ctr" lIns="0" rIns="0" tIns="0" bIns="0">
+            <a:spAutoFit/>
+          </a:bodyPr>
+          <a:lstStyle/>
+          <a:p>
+            <a:pPr algn="l">
+              <a:spcAft>
+                <a:spcPts val="2070"/>
+              </a:spcAft>
+            </a:pPr>
+            <a:r>
+              <a:rPr sz="4600" b="1" i="0">
+                <a:solidFill>
+                  <a:srgbClr val="1C1B19"/>
+                </a:solidFill>
+                <a:latin typeface="Source Serif 4"/>
+              </a:rPr>
+              <a:t>Familiar feels like knowing.</a:t>
+            </a:r>
+          </a:p>
+        </p:txBody>
+      </p:sp>
+      <p:sp>
+        <p:nvSpPr>
+          <p:cNvPr id="6" name="TextBox 5"/>
+          <p:cNvSpPr txBox="1"/>
+          <p:nvPr/>
+        </p:nvSpPr>
+        <p:spPr>
+          <a:xfrm>
+            <a:off x="822960" y="4846320"/>
             <a:ext cx="10515600" cy="1097280"/>
           </a:xfrm>
           <a:prstGeom prst="rect">
@@ -9044,407 +9897,17 @@
           <a:p>
             <a:pPr algn="l">
               <a:spcAft>
-                <a:spcPts val="1620"/>
-              </a:spcAft>
-            </a:pPr>
-            <a:r>
-              <a:rPr sz="3600" b="1" i="0">
-                <a:solidFill>
-                  <a:srgbClr val="1C1B19"/>
-                </a:solidFill>
-                <a:latin typeface="Source Serif 4"/>
-              </a:rPr>
-              <a:t>Stand up if you think it's a fact.</a:t>
-            </a:r>
-          </a:p>
-        </p:txBody>
-      </p:sp>
-      <p:sp>
-        <p:nvSpPr>
-          <p:cNvPr id="6" name="TextBox 5"/>
-          <p:cNvSpPr txBox="1"/>
-          <p:nvPr/>
-        </p:nvSpPr>
-        <p:spPr>
-          <a:xfrm>
-            <a:off x="822960" y="2057400"/>
-            <a:ext cx="548640" cy="804672"/>
-          </a:xfrm>
-          <a:prstGeom prst="rect">
-            <a:avLst/>
-          </a:prstGeom>
-          <a:noFill/>
-        </p:spPr>
-        <p:txBody>
-          <a:bodyPr wrap="square" anchor="t" lIns="0" rIns="0" tIns="0" bIns="0">
-            <a:spAutoFit/>
-          </a:bodyPr>
-          <a:lstStyle/>
-          <a:p>
-            <a:pPr algn="l">
-              <a:spcAft>
-                <a:spcPts val="1170"/>
-              </a:spcAft>
-            </a:pPr>
-            <a:r>
-              <a:rPr sz="2600" b="1" i="0">
-                <a:solidFill>
-                  <a:srgbClr val="F47B20"/>
-                </a:solidFill>
-                <a:latin typeface="Source Serif 4"/>
-              </a:rPr>
-              <a:t>1</a:t>
-            </a:r>
-          </a:p>
-        </p:txBody>
-      </p:sp>
-      <p:sp>
-        <p:nvSpPr>
-          <p:cNvPr id="7" name="TextBox 6"/>
-          <p:cNvSpPr txBox="1"/>
-          <p:nvPr/>
-        </p:nvSpPr>
-        <p:spPr>
-          <a:xfrm>
-            <a:off x="1463040" y="2093976"/>
-            <a:ext cx="9875520" cy="804672"/>
-          </a:xfrm>
-          <a:prstGeom prst="rect">
-            <a:avLst/>
-          </a:prstGeom>
-          <a:noFill/>
-        </p:spPr>
-        <p:txBody>
-          <a:bodyPr wrap="square" anchor="t" lIns="0" rIns="0" tIns="0" bIns="0">
-            <a:spAutoFit/>
-          </a:bodyPr>
-          <a:lstStyle/>
-          <a:p>
-            <a:pPr algn="l">
-              <a:spcAft>
-                <a:spcPts val="945"/>
-              </a:spcAft>
-            </a:pPr>
-            <a:r>
-              <a:rPr sz="2100" b="1" i="0">
-                <a:solidFill>
-                  <a:srgbClr val="1C1B19"/>
-                </a:solidFill>
-                <a:latin typeface="Source Serif 4"/>
-              </a:rPr>
-              <a:t>Rereading your notes is one of the best ways to study.</a:t>
-            </a:r>
-          </a:p>
-        </p:txBody>
-      </p:sp>
-      <p:sp>
-        <p:nvSpPr>
-          <p:cNvPr id="8" name="TextBox 7"/>
-          <p:cNvSpPr txBox="1"/>
-          <p:nvPr/>
-        </p:nvSpPr>
-        <p:spPr>
-          <a:xfrm>
-            <a:off x="822960" y="2862072"/>
-            <a:ext cx="548640" cy="804672"/>
-          </a:xfrm>
-          <a:prstGeom prst="rect">
-            <a:avLst/>
-          </a:prstGeom>
-          <a:noFill/>
-        </p:spPr>
-        <p:txBody>
-          <a:bodyPr wrap="square" anchor="t" lIns="0" rIns="0" tIns="0" bIns="0">
-            <a:spAutoFit/>
-          </a:bodyPr>
-          <a:lstStyle/>
-          <a:p>
-            <a:pPr algn="l">
-              <a:spcAft>
-                <a:spcPts val="1170"/>
-              </a:spcAft>
-            </a:pPr>
-            <a:r>
-              <a:rPr sz="2600" b="1" i="0">
-                <a:solidFill>
-                  <a:srgbClr val="F47B20"/>
-                </a:solidFill>
-                <a:latin typeface="Source Serif 4"/>
-              </a:rPr>
-              <a:t>2</a:t>
-            </a:r>
-          </a:p>
-        </p:txBody>
-      </p:sp>
-      <p:sp>
-        <p:nvSpPr>
-          <p:cNvPr id="9" name="TextBox 8"/>
-          <p:cNvSpPr txBox="1"/>
-          <p:nvPr/>
-        </p:nvSpPr>
-        <p:spPr>
-          <a:xfrm>
-            <a:off x="1463040" y="2898648"/>
-            <a:ext cx="9875520" cy="804672"/>
-          </a:xfrm>
-          <a:prstGeom prst="rect">
-            <a:avLst/>
-          </a:prstGeom>
-          <a:noFill/>
-        </p:spPr>
-        <p:txBody>
-          <a:bodyPr wrap="square" anchor="t" lIns="0" rIns="0" tIns="0" bIns="0">
-            <a:spAutoFit/>
-          </a:bodyPr>
-          <a:lstStyle/>
-          <a:p>
-            <a:pPr algn="l">
-              <a:spcAft>
-                <a:spcPts val="945"/>
-              </a:spcAft>
-            </a:pPr>
-            <a:r>
-              <a:rPr sz="2100" b="1" i="0">
-                <a:solidFill>
-                  <a:srgbClr val="1C1B19"/>
-                </a:solidFill>
-                <a:latin typeface="Source Serif 4"/>
-              </a:rPr>
-              <a:t>You learn more when teaching matches your learning style.</a:t>
-            </a:r>
-          </a:p>
-        </p:txBody>
-      </p:sp>
-      <p:sp>
-        <p:nvSpPr>
-          <p:cNvPr id="10" name="TextBox 9"/>
-          <p:cNvSpPr txBox="1"/>
-          <p:nvPr/>
-        </p:nvSpPr>
-        <p:spPr>
-          <a:xfrm>
-            <a:off x="822960" y="3666744"/>
-            <a:ext cx="548640" cy="804672"/>
-          </a:xfrm>
-          <a:prstGeom prst="rect">
-            <a:avLst/>
-          </a:prstGeom>
-          <a:noFill/>
-        </p:spPr>
-        <p:txBody>
-          <a:bodyPr wrap="square" anchor="t" lIns="0" rIns="0" tIns="0" bIns="0">
-            <a:spAutoFit/>
-          </a:bodyPr>
-          <a:lstStyle/>
-          <a:p>
-            <a:pPr algn="l">
-              <a:spcAft>
-                <a:spcPts val="1170"/>
-              </a:spcAft>
-            </a:pPr>
-            <a:r>
-              <a:rPr sz="2600" b="1" i="0">
-                <a:solidFill>
-                  <a:srgbClr val="F47B20"/>
-                </a:solidFill>
-                <a:latin typeface="Source Serif 4"/>
-              </a:rPr>
-              <a:t>3</a:t>
-            </a:r>
-          </a:p>
-        </p:txBody>
-      </p:sp>
-      <p:sp>
-        <p:nvSpPr>
-          <p:cNvPr id="11" name="TextBox 10"/>
-          <p:cNvSpPr txBox="1"/>
-          <p:nvPr/>
-        </p:nvSpPr>
-        <p:spPr>
-          <a:xfrm>
-            <a:off x="1463040" y="3703320"/>
-            <a:ext cx="9875520" cy="804672"/>
-          </a:xfrm>
-          <a:prstGeom prst="rect">
-            <a:avLst/>
-          </a:prstGeom>
-          <a:noFill/>
-        </p:spPr>
-        <p:txBody>
-          <a:bodyPr wrap="square" anchor="t" lIns="0" rIns="0" tIns="0" bIns="0">
-            <a:spAutoFit/>
-          </a:bodyPr>
-          <a:lstStyle/>
-          <a:p>
-            <a:pPr algn="l">
-              <a:spcAft>
-                <a:spcPts val="945"/>
-              </a:spcAft>
-            </a:pPr>
-            <a:r>
-              <a:rPr sz="2100" b="1" i="0">
-                <a:solidFill>
-                  <a:srgbClr val="1C1B19"/>
-                </a:solidFill>
-                <a:latin typeface="Source Serif 4"/>
-              </a:rPr>
-              <a:t>If it feels easy while you study, you know it.</a:t>
-            </a:r>
-          </a:p>
-        </p:txBody>
-      </p:sp>
-      <p:sp>
-        <p:nvSpPr>
-          <p:cNvPr id="12" name="TextBox 11"/>
-          <p:cNvSpPr txBox="1"/>
-          <p:nvPr/>
-        </p:nvSpPr>
-        <p:spPr>
-          <a:xfrm>
-            <a:off x="822960" y="4471416"/>
-            <a:ext cx="548640" cy="804672"/>
-          </a:xfrm>
-          <a:prstGeom prst="rect">
-            <a:avLst/>
-          </a:prstGeom>
-          <a:noFill/>
-        </p:spPr>
-        <p:txBody>
-          <a:bodyPr wrap="square" anchor="t" lIns="0" rIns="0" tIns="0" bIns="0">
-            <a:spAutoFit/>
-          </a:bodyPr>
-          <a:lstStyle/>
-          <a:p>
-            <a:pPr algn="l">
-              <a:spcAft>
-                <a:spcPts val="1170"/>
-              </a:spcAft>
-            </a:pPr>
-            <a:r>
-              <a:rPr sz="2600" b="1" i="0">
-                <a:solidFill>
-                  <a:srgbClr val="F47B20"/>
-                </a:solidFill>
-                <a:latin typeface="Source Serif 4"/>
-              </a:rPr>
-              <a:t>4</a:t>
-            </a:r>
-          </a:p>
-        </p:txBody>
-      </p:sp>
-      <p:sp>
-        <p:nvSpPr>
-          <p:cNvPr id="13" name="TextBox 12"/>
-          <p:cNvSpPr txBox="1"/>
-          <p:nvPr/>
-        </p:nvSpPr>
-        <p:spPr>
-          <a:xfrm>
-            <a:off x="1463040" y="4507992"/>
-            <a:ext cx="9875520" cy="804672"/>
-          </a:xfrm>
-          <a:prstGeom prst="rect">
-            <a:avLst/>
-          </a:prstGeom>
-          <a:noFill/>
-        </p:spPr>
-        <p:txBody>
-          <a:bodyPr wrap="square" anchor="t" lIns="0" rIns="0" tIns="0" bIns="0">
-            <a:spAutoFit/>
-          </a:bodyPr>
-          <a:lstStyle/>
-          <a:p>
-            <a:pPr algn="l">
-              <a:spcAft>
-                <a:spcPts val="945"/>
-              </a:spcAft>
-            </a:pPr>
-            <a:r>
-              <a:rPr sz="2100" b="1" i="0">
-                <a:solidFill>
-                  <a:srgbClr val="1C1B19"/>
-                </a:solidFill>
-                <a:latin typeface="Source Serif 4"/>
-              </a:rPr>
-              <a:t>Mixing problem types beats doing one type at a time.</a:t>
-            </a:r>
-          </a:p>
-        </p:txBody>
-      </p:sp>
-      <p:sp>
-        <p:nvSpPr>
-          <p:cNvPr id="14" name="TextBox 13"/>
-          <p:cNvSpPr txBox="1"/>
-          <p:nvPr/>
-        </p:nvSpPr>
-        <p:spPr>
-          <a:xfrm>
-            <a:off x="822960" y="5276088"/>
-            <a:ext cx="548640" cy="804672"/>
-          </a:xfrm>
-          <a:prstGeom prst="rect">
-            <a:avLst/>
-          </a:prstGeom>
-          <a:noFill/>
-        </p:spPr>
-        <p:txBody>
-          <a:bodyPr wrap="square" anchor="t" lIns="0" rIns="0" tIns="0" bIns="0">
-            <a:spAutoFit/>
-          </a:bodyPr>
-          <a:lstStyle/>
-          <a:p>
-            <a:pPr algn="l">
-              <a:spcAft>
-                <a:spcPts val="1170"/>
-              </a:spcAft>
-            </a:pPr>
-            <a:r>
-              <a:rPr sz="2600" b="1" i="0">
-                <a:solidFill>
-                  <a:srgbClr val="F47B20"/>
-                </a:solidFill>
-                <a:latin typeface="Source Serif 4"/>
-              </a:rPr>
-              <a:t>5</a:t>
-            </a:r>
-          </a:p>
-        </p:txBody>
-      </p:sp>
-      <p:sp>
-        <p:nvSpPr>
-          <p:cNvPr id="15" name="TextBox 14"/>
-          <p:cNvSpPr txBox="1"/>
-          <p:nvPr/>
-        </p:nvSpPr>
-        <p:spPr>
-          <a:xfrm>
-            <a:off x="1463040" y="5312664"/>
-            <a:ext cx="9875520" cy="804672"/>
-          </a:xfrm>
-          <a:prstGeom prst="rect">
-            <a:avLst/>
-          </a:prstGeom>
-          <a:noFill/>
-        </p:spPr>
-        <p:txBody>
-          <a:bodyPr wrap="square" anchor="t" lIns="0" rIns="0" tIns="0" bIns="0">
-            <a:spAutoFit/>
-          </a:bodyPr>
-          <a:lstStyle/>
-          <a:p>
-            <a:pPr algn="l">
-              <a:spcAft>
-                <a:spcPts val="945"/>
-              </a:spcAft>
-            </a:pPr>
-            <a:r>
-              <a:rPr sz="2100" b="1" i="0">
-                <a:solidFill>
-                  <a:srgbClr val="1C1B19"/>
-                </a:solidFill>
-                <a:latin typeface="Source Serif 4"/>
-              </a:rPr>
-              <a:t>An all-nighter is worth it for a big test.</a:t>
+                <a:spcPts val="990"/>
+              </a:spcAft>
+            </a:pPr>
+            <a:r>
+              <a:rPr sz="2200" b="0" i="1">
+                <a:solidFill>
+                  <a:srgbClr val="5D5A54"/>
+                </a:solidFill>
+                <a:latin typeface="Source Serif 4"/>
+              </a:rPr>
+              <a:t>Rereading makes the page look familiar. The test asks you to pull it out of your own head.</a:t>
             </a:r>
           </a:p>
         </p:txBody>
@@ -9553,7 +10016,7 @@
                 </a:solidFill>
                 <a:latin typeface="Inter Tight"/>
               </a:rPr>
-              <a:t>MYTH OR FACT?</a:t>
+              <a:t>MIXING IT UP</a:t>
             </a:r>
           </a:p>
         </p:txBody>
@@ -9606,7 +10069,7 @@
         <p:spPr>
           <a:xfrm>
             <a:off x="822960" y="1005840"/>
-            <a:ext cx="10515600" cy="1097280"/>
+            <a:ext cx="10515600" cy="914400"/>
           </a:xfrm>
           <a:prstGeom prst="rect">
             <a:avLst/>
@@ -9621,31 +10084,77 @@
           <a:p>
             <a:pPr algn="l">
               <a:spcAft>
-                <a:spcPts val="1620"/>
-              </a:spcAft>
-            </a:pPr>
-            <a:r>
-              <a:rPr sz="3600" b="1" i="0">
+                <a:spcPts val="1530"/>
+              </a:spcAft>
+            </a:pPr>
+            <a:r>
+              <a:rPr sz="3400" b="1" i="0">
                 <a:solidFill>
                   <a:srgbClr val="1C1B19"/>
                 </a:solidFill>
                 <a:latin typeface="Source Serif 4"/>
               </a:rPr>
-              <a:t>The answers</a:t>
-            </a:r>
-          </a:p>
-        </p:txBody>
-      </p:sp>
-      <p:sp>
-        <p:nvSpPr>
-          <p:cNvPr id="6" name="TextBox 5"/>
+              <a:t>Practice that feels worse, results that are better</a:t>
+            </a:r>
+          </a:p>
+        </p:txBody>
+      </p:sp>
+      <p:sp>
+        <p:nvSpPr>
+          <p:cNvPr id="6" name="Rectangle 5"/>
+          <p:cNvSpPr/>
+          <p:nvPr/>
+        </p:nvSpPr>
+        <p:spPr>
+          <a:xfrm>
+            <a:off x="822960" y="2103120"/>
+            <a:ext cx="5120640" cy="3931920"/>
+          </a:xfrm>
+          <a:prstGeom prst="rect">
+            <a:avLst/>
+          </a:prstGeom>
+          <a:solidFill>
+            <a:srgbClr val="FFFFFF"/>
+          </a:solidFill>
+          <a:ln w="15875">
+            <a:solidFill>
+              <a:srgbClr val="D8D2C6"/>
+            </a:solidFill>
+          </a:ln>
+          <a:effectLst/>
+        </p:spPr>
+        <p:style>
+          <a:lnRef idx="1">
+            <a:schemeClr val="accent1"/>
+          </a:lnRef>
+          <a:fillRef idx="3">
+            <a:schemeClr val="accent1"/>
+          </a:fillRef>
+          <a:effectRef idx="2">
+            <a:schemeClr val="accent1"/>
+          </a:effectRef>
+          <a:fontRef idx="minor">
+            <a:schemeClr val="lt1"/>
+          </a:fontRef>
+        </p:style>
+        <p:txBody>
+          <a:bodyPr rtlCol="0" anchor="ctr"/>
+          <a:lstStyle/>
+          <a:p>
+            <a:pPr algn="ctr"/>
+          </a:p>
+        </p:txBody>
+      </p:sp>
+      <p:sp>
+        <p:nvSpPr>
+          <p:cNvPr id="7" name="TextBox 6"/>
           <p:cNvSpPr txBox="1"/>
           <p:nvPr/>
         </p:nvSpPr>
         <p:spPr>
           <a:xfrm>
-            <a:off x="822960" y="2057400"/>
-            <a:ext cx="548640" cy="804672"/>
+            <a:off x="1097280" y="2286000"/>
+            <a:ext cx="4572000" cy="457200"/>
           </a:xfrm>
           <a:prstGeom prst="rect">
             <a:avLst/>
@@ -9660,31 +10169,31 @@
           <a:p>
             <a:pPr algn="l">
               <a:spcAft>
-                <a:spcPts val="1170"/>
-              </a:spcAft>
-            </a:pPr>
-            <a:r>
-              <a:rPr sz="2600" b="1" i="0">
-                <a:solidFill>
-                  <a:srgbClr val="F47B20"/>
-                </a:solidFill>
-                <a:latin typeface="Source Serif 4"/>
-              </a:rPr>
-              <a:t>1</a:t>
-            </a:r>
-          </a:p>
-        </p:txBody>
-      </p:sp>
-      <p:sp>
-        <p:nvSpPr>
-          <p:cNvPr id="7" name="TextBox 6"/>
+                <a:spcPts val="585"/>
+              </a:spcAft>
+            </a:pPr>
+            <a:r>
+              <a:rPr sz="1300" b="1" i="0">
+                <a:solidFill>
+                  <a:srgbClr val="0B2D5B"/>
+                </a:solidFill>
+                <a:latin typeface="Inter Tight"/>
+              </a:rPr>
+              <a:t>ONE TYPE AT A TIME</a:t>
+            </a:r>
+          </a:p>
+        </p:txBody>
+      </p:sp>
+      <p:sp>
+        <p:nvSpPr>
+          <p:cNvPr id="8" name="TextBox 7"/>
           <p:cNvSpPr txBox="1"/>
           <p:nvPr/>
         </p:nvSpPr>
         <p:spPr>
           <a:xfrm>
-            <a:off x="1463040" y="2093976"/>
-            <a:ext cx="9875520" cy="804672"/>
+            <a:off x="1097280" y="2788920"/>
+            <a:ext cx="4572000" cy="3108960"/>
           </a:xfrm>
           <a:prstGeom prst="rect">
             <a:avLst/>
@@ -9699,47 +10208,125 @@
           <a:p>
             <a:pPr algn="l">
               <a:spcAft>
-                <a:spcPts val="945"/>
-              </a:spcAft>
-            </a:pPr>
-            <a:r>
-              <a:rPr sz="2100" b="1" i="0">
+                <a:spcPts val="855"/>
+              </a:spcAft>
+            </a:pPr>
+            <a:r>
+              <a:rPr sz="1900" b="0" i="0">
                 <a:solidFill>
                   <a:srgbClr val="1C1B19"/>
                 </a:solidFill>
                 <a:latin typeface="Source Serif 4"/>
               </a:rPr>
-              <a:t>Myth.</a:t>
-            </a:r>
-          </a:p>
-          <a:p>
-            <a:pPr algn="l">
-              <a:spcAft>
-                <a:spcPts val="945"/>
-              </a:spcAft>
-            </a:pPr>
-            <a:r>
-              <a:rPr sz="1600" b="0" i="0">
-                <a:solidFill>
-                  <a:srgbClr val="5D5A54"/>
-                </a:solidFill>
-                <a:latin typeface="Source Serif 4"/>
-              </a:rPr>
-              <a:t>It feels great. A week later it holds up worst.</a:t>
-            </a:r>
-          </a:p>
-        </p:txBody>
-      </p:sp>
-      <p:sp>
-        <p:nvSpPr>
-          <p:cNvPr id="8" name="TextBox 7"/>
+              <a:t>89% right during practice</a:t>
+            </a:r>
+          </a:p>
+          <a:p>
+            <a:pPr algn="l">
+              <a:spcAft>
+                <a:spcPts val="855"/>
+              </a:spcAft>
+            </a:pPr>
+            <a:r>
+              <a:rPr sz="1900" b="0" i="0">
+                <a:solidFill>
+                  <a:srgbClr val="1C1B19"/>
+                </a:solidFill>
+                <a:latin typeface="Source Serif 4"/>
+              </a:rPr>
+              <a:t>20% on the test a week later</a:t>
+            </a:r>
+          </a:p>
+          <a:p>
+            <a:pPr algn="l">
+              <a:spcAft>
+                <a:spcPts val="855"/>
+              </a:spcAft>
+            </a:pPr>
+            <a:r>
+              <a:rPr sz="1900" b="0" i="0">
+                <a:solidFill>
+                  <a:srgbClr val="1C1B19"/>
+                </a:solidFill>
+                <a:latin typeface="Source Serif 4"/>
+              </a:rPr>
+              <a:t>You know the method before you start</a:t>
+            </a:r>
+          </a:p>
+          <a:p>
+            <a:pPr algn="l">
+              <a:spcAft>
+                <a:spcPts val="855"/>
+              </a:spcAft>
+            </a:pPr>
+            <a:r>
+              <a:rPr sz="1900" b="0" i="0">
+                <a:solidFill>
+                  <a:srgbClr val="1C1B19"/>
+                </a:solidFill>
+                <a:latin typeface="Source Serif 4"/>
+              </a:rPr>
+              <a:t>Feels smooth</a:t>
+            </a:r>
+          </a:p>
+        </p:txBody>
+      </p:sp>
+      <p:sp>
+        <p:nvSpPr>
+          <p:cNvPr id="9" name="Rectangle 8"/>
+          <p:cNvSpPr/>
+          <p:nvPr/>
+        </p:nvSpPr>
+        <p:spPr>
+          <a:xfrm>
+            <a:off x="6309360" y="2103120"/>
+            <a:ext cx="5120640" cy="3931920"/>
+          </a:xfrm>
+          <a:prstGeom prst="rect">
+            <a:avLst/>
+          </a:prstGeom>
+          <a:solidFill>
+            <a:srgbClr val="FFFFFF"/>
+          </a:solidFill>
+          <a:ln w="15875">
+            <a:solidFill>
+              <a:srgbClr val="D8D2C6"/>
+            </a:solidFill>
+          </a:ln>
+          <a:effectLst/>
+        </p:spPr>
+        <p:style>
+          <a:lnRef idx="1">
+            <a:schemeClr val="accent1"/>
+          </a:lnRef>
+          <a:fillRef idx="3">
+            <a:schemeClr val="accent1"/>
+          </a:fillRef>
+          <a:effectRef idx="2">
+            <a:schemeClr val="accent1"/>
+          </a:effectRef>
+          <a:fontRef idx="minor">
+            <a:schemeClr val="lt1"/>
+          </a:fontRef>
+        </p:style>
+        <p:txBody>
+          <a:bodyPr rtlCol="0" anchor="ctr"/>
+          <a:lstStyle/>
+          <a:p>
+            <a:pPr algn="ctr"/>
+          </a:p>
+        </p:txBody>
+      </p:sp>
+      <p:sp>
+        <p:nvSpPr>
+          <p:cNvPr id="10" name="TextBox 9"/>
           <p:cNvSpPr txBox="1"/>
           <p:nvPr/>
         </p:nvSpPr>
         <p:spPr>
           <a:xfrm>
-            <a:off x="822960" y="2862072"/>
-            <a:ext cx="548640" cy="804672"/>
+            <a:off x="6583680" y="2286000"/>
+            <a:ext cx="4572000" cy="457200"/>
           </a:xfrm>
           <a:prstGeom prst="rect">
             <a:avLst/>
@@ -9754,31 +10341,31 @@
           <a:p>
             <a:pPr algn="l">
               <a:spcAft>
-                <a:spcPts val="1170"/>
-              </a:spcAft>
-            </a:pPr>
-            <a:r>
-              <a:rPr sz="2600" b="1" i="0">
-                <a:solidFill>
-                  <a:srgbClr val="F47B20"/>
-                </a:solidFill>
-                <a:latin typeface="Source Serif 4"/>
-              </a:rPr>
-              <a:t>2</a:t>
-            </a:r>
-          </a:p>
-        </p:txBody>
-      </p:sp>
-      <p:sp>
-        <p:nvSpPr>
-          <p:cNvPr id="9" name="TextBox 8"/>
+                <a:spcPts val="585"/>
+              </a:spcAft>
+            </a:pPr>
+            <a:r>
+              <a:rPr sz="1300" b="1" i="0">
+                <a:solidFill>
+                  <a:srgbClr val="0B2D5B"/>
+                </a:solidFill>
+                <a:latin typeface="Inter Tight"/>
+              </a:rPr>
+              <a:t>MIXED UP</a:t>
+            </a:r>
+          </a:p>
+        </p:txBody>
+      </p:sp>
+      <p:sp>
+        <p:nvSpPr>
+          <p:cNvPr id="11" name="TextBox 10"/>
           <p:cNvSpPr txBox="1"/>
           <p:nvPr/>
         </p:nvSpPr>
         <p:spPr>
           <a:xfrm>
-            <a:off x="1463040" y="2898648"/>
-            <a:ext cx="9875520" cy="804672"/>
+            <a:off x="6583680" y="2788920"/>
+            <a:ext cx="4572000" cy="3108960"/>
           </a:xfrm>
           <a:prstGeom prst="rect">
             <a:avLst/>
@@ -9793,315 +10380,65 @@
           <a:p>
             <a:pPr algn="l">
               <a:spcAft>
-                <a:spcPts val="945"/>
-              </a:spcAft>
-            </a:pPr>
-            <a:r>
-              <a:rPr sz="2100" b="1" i="0">
+                <a:spcPts val="855"/>
+              </a:spcAft>
+            </a:pPr>
+            <a:r>
+              <a:rPr sz="1900" b="0" i="0">
                 <a:solidFill>
                   <a:srgbClr val="1C1B19"/>
                 </a:solidFill>
                 <a:latin typeface="Source Serif 4"/>
               </a:rPr>
-              <a:t>Myth.</a:t>
-            </a:r>
-          </a:p>
-          <a:p>
-            <a:pPr algn="l">
-              <a:spcAft>
-                <a:spcPts val="945"/>
-              </a:spcAft>
-            </a:pPr>
-            <a:r>
-              <a:rPr sz="1600" b="0" i="0">
-                <a:solidFill>
-                  <a:srgbClr val="5D5A54"/>
-                </a:solidFill>
-                <a:latin typeface="Source Serif 4"/>
-              </a:rPr>
-              <a:t>No good evidence for it. Quizzing and spacing help everyone.</a:t>
-            </a:r>
-          </a:p>
-        </p:txBody>
-      </p:sp>
-      <p:sp>
-        <p:nvSpPr>
-          <p:cNvPr id="10" name="TextBox 9"/>
-          <p:cNvSpPr txBox="1"/>
-          <p:nvPr/>
-        </p:nvSpPr>
-        <p:spPr>
-          <a:xfrm>
-            <a:off x="822960" y="3666744"/>
-            <a:ext cx="548640" cy="804672"/>
-          </a:xfrm>
-          <a:prstGeom prst="rect">
-            <a:avLst/>
-          </a:prstGeom>
-          <a:noFill/>
-        </p:spPr>
-        <p:txBody>
-          <a:bodyPr wrap="square" anchor="t" lIns="0" rIns="0" tIns="0" bIns="0">
-            <a:spAutoFit/>
-          </a:bodyPr>
-          <a:lstStyle/>
-          <a:p>
-            <a:pPr algn="l">
-              <a:spcAft>
-                <a:spcPts val="1170"/>
-              </a:spcAft>
-            </a:pPr>
-            <a:r>
-              <a:rPr sz="2600" b="1" i="0">
-                <a:solidFill>
-                  <a:srgbClr val="F47B20"/>
-                </a:solidFill>
-                <a:latin typeface="Source Serif 4"/>
-              </a:rPr>
-              <a:t>3</a:t>
-            </a:r>
-          </a:p>
-        </p:txBody>
-      </p:sp>
-      <p:sp>
-        <p:nvSpPr>
-          <p:cNvPr id="11" name="TextBox 10"/>
-          <p:cNvSpPr txBox="1"/>
-          <p:nvPr/>
-        </p:nvSpPr>
-        <p:spPr>
-          <a:xfrm>
-            <a:off x="1463040" y="3703320"/>
-            <a:ext cx="9875520" cy="804672"/>
-          </a:xfrm>
-          <a:prstGeom prst="rect">
-            <a:avLst/>
-          </a:prstGeom>
-          <a:noFill/>
-        </p:spPr>
-        <p:txBody>
-          <a:bodyPr wrap="square" anchor="t" lIns="0" rIns="0" tIns="0" bIns="0">
-            <a:spAutoFit/>
-          </a:bodyPr>
-          <a:lstStyle/>
-          <a:p>
-            <a:pPr algn="l">
-              <a:spcAft>
-                <a:spcPts val="945"/>
-              </a:spcAft>
-            </a:pPr>
-            <a:r>
-              <a:rPr sz="2100" b="1" i="0">
+              <a:t>60% right during practice</a:t>
+            </a:r>
+          </a:p>
+          <a:p>
+            <a:pPr algn="l">
+              <a:spcAft>
+                <a:spcPts val="855"/>
+              </a:spcAft>
+            </a:pPr>
+            <a:r>
+              <a:rPr sz="1900" b="0" i="0">
                 <a:solidFill>
                   <a:srgbClr val="1C1B19"/>
                 </a:solidFill>
                 <a:latin typeface="Source Serif 4"/>
               </a:rPr>
-              <a:t>Myth.</a:t>
-            </a:r>
-          </a:p>
-          <a:p>
-            <a:pPr algn="l">
-              <a:spcAft>
-                <a:spcPts val="945"/>
-              </a:spcAft>
-            </a:pPr>
-            <a:r>
-              <a:rPr sz="1600" b="0" i="0">
-                <a:solidFill>
-                  <a:srgbClr val="5D5A54"/>
-                </a:solidFill>
-                <a:latin typeface="Source Serif 4"/>
-              </a:rPr>
-              <a:t>Easy usually means familiar. Familiar isn't recall.</a:t>
-            </a:r>
-          </a:p>
-        </p:txBody>
-      </p:sp>
-      <p:sp>
-        <p:nvSpPr>
-          <p:cNvPr id="12" name="TextBox 11"/>
-          <p:cNvSpPr txBox="1"/>
-          <p:nvPr/>
-        </p:nvSpPr>
-        <p:spPr>
-          <a:xfrm>
-            <a:off x="822960" y="4471416"/>
-            <a:ext cx="548640" cy="804672"/>
-          </a:xfrm>
-          <a:prstGeom prst="rect">
-            <a:avLst/>
-          </a:prstGeom>
-          <a:noFill/>
-        </p:spPr>
-        <p:txBody>
-          <a:bodyPr wrap="square" anchor="t" lIns="0" rIns="0" tIns="0" bIns="0">
-            <a:spAutoFit/>
-          </a:bodyPr>
-          <a:lstStyle/>
-          <a:p>
-            <a:pPr algn="l">
-              <a:spcAft>
-                <a:spcPts val="1170"/>
-              </a:spcAft>
-            </a:pPr>
-            <a:r>
-              <a:rPr sz="2600" b="1" i="0">
-                <a:solidFill>
-                  <a:srgbClr val="F47B20"/>
-                </a:solidFill>
-                <a:latin typeface="Source Serif 4"/>
-              </a:rPr>
-              <a:t>4</a:t>
-            </a:r>
-          </a:p>
-        </p:txBody>
-      </p:sp>
-      <p:sp>
-        <p:nvSpPr>
-          <p:cNvPr id="13" name="TextBox 12"/>
-          <p:cNvSpPr txBox="1"/>
-          <p:nvPr/>
-        </p:nvSpPr>
-        <p:spPr>
-          <a:xfrm>
-            <a:off x="1463040" y="4507992"/>
-            <a:ext cx="9875520" cy="804672"/>
-          </a:xfrm>
-          <a:prstGeom prst="rect">
-            <a:avLst/>
-          </a:prstGeom>
-          <a:noFill/>
-        </p:spPr>
-        <p:txBody>
-          <a:bodyPr wrap="square" anchor="t" lIns="0" rIns="0" tIns="0" bIns="0">
-            <a:spAutoFit/>
-          </a:bodyPr>
-          <a:lstStyle/>
-          <a:p>
-            <a:pPr algn="l">
-              <a:spcAft>
-                <a:spcPts val="945"/>
-              </a:spcAft>
-            </a:pPr>
-            <a:r>
-              <a:rPr sz="2100" b="1" i="0">
+              <a:t>63% on the test a week later</a:t>
+            </a:r>
+          </a:p>
+          <a:p>
+            <a:pPr algn="l">
+              <a:spcAft>
+                <a:spcPts val="855"/>
+              </a:spcAft>
+            </a:pPr>
+            <a:r>
+              <a:rPr sz="1900" b="0" i="0">
                 <a:solidFill>
                   <a:srgbClr val="1C1B19"/>
                 </a:solidFill>
                 <a:latin typeface="Source Serif 4"/>
               </a:rPr>
-              <a:t>Fact.</a:t>
-            </a:r>
-          </a:p>
-          <a:p>
-            <a:pPr algn="l">
-              <a:spcAft>
-                <a:spcPts val="945"/>
-              </a:spcAft>
-            </a:pPr>
-            <a:r>
-              <a:rPr sz="1600" b="0" i="0">
-                <a:solidFill>
-                  <a:srgbClr val="5D5A54"/>
-                </a:solidFill>
-                <a:latin typeface="Source Serif 4"/>
-              </a:rPr>
-              <a:t>Worse during practice, much better on the test.</a:t>
-            </a:r>
-          </a:p>
-        </p:txBody>
-      </p:sp>
-      <p:sp>
-        <p:nvSpPr>
-          <p:cNvPr id="14" name="TextBox 13"/>
-          <p:cNvSpPr txBox="1"/>
-          <p:nvPr/>
-        </p:nvSpPr>
-        <p:spPr>
-          <a:xfrm>
-            <a:off x="822960" y="5276088"/>
-            <a:ext cx="548640" cy="804672"/>
-          </a:xfrm>
-          <a:prstGeom prst="rect">
-            <a:avLst/>
-          </a:prstGeom>
-          <a:noFill/>
-        </p:spPr>
-        <p:txBody>
-          <a:bodyPr wrap="square" anchor="t" lIns="0" rIns="0" tIns="0" bIns="0">
-            <a:spAutoFit/>
-          </a:bodyPr>
-          <a:lstStyle/>
-          <a:p>
-            <a:pPr algn="l">
-              <a:spcAft>
-                <a:spcPts val="1170"/>
-              </a:spcAft>
-            </a:pPr>
-            <a:r>
-              <a:rPr sz="2600" b="1" i="0">
-                <a:solidFill>
-                  <a:srgbClr val="F47B20"/>
-                </a:solidFill>
-                <a:latin typeface="Source Serif 4"/>
-              </a:rPr>
-              <a:t>5</a:t>
-            </a:r>
-          </a:p>
-        </p:txBody>
-      </p:sp>
-      <p:sp>
-        <p:nvSpPr>
-          <p:cNvPr id="15" name="TextBox 14"/>
-          <p:cNvSpPr txBox="1"/>
-          <p:nvPr/>
-        </p:nvSpPr>
-        <p:spPr>
-          <a:xfrm>
-            <a:off x="1463040" y="5312664"/>
-            <a:ext cx="9875520" cy="804672"/>
-          </a:xfrm>
-          <a:prstGeom prst="rect">
-            <a:avLst/>
-          </a:prstGeom>
-          <a:noFill/>
-        </p:spPr>
-        <p:txBody>
-          <a:bodyPr wrap="square" anchor="t" lIns="0" rIns="0" tIns="0" bIns="0">
-            <a:spAutoFit/>
-          </a:bodyPr>
-          <a:lstStyle/>
-          <a:p>
-            <a:pPr algn="l">
-              <a:spcAft>
-                <a:spcPts val="945"/>
-              </a:spcAft>
-            </a:pPr>
-            <a:r>
-              <a:rPr sz="2100" b="1" i="0">
+              <a:t>You have to pick the method</a:t>
+            </a:r>
+          </a:p>
+          <a:p>
+            <a:pPr algn="l">
+              <a:spcAft>
+                <a:spcPts val="855"/>
+              </a:spcAft>
+            </a:pPr>
+            <a:r>
+              <a:rPr sz="1900" b="0" i="0">
                 <a:solidFill>
                   <a:srgbClr val="1C1B19"/>
                 </a:solidFill>
                 <a:latin typeface="Source Serif 4"/>
               </a:rPr>
-              <a:t>Myth.</a:t>
-            </a:r>
-          </a:p>
-          <a:p>
-            <a:pPr algn="l">
-              <a:spcAft>
-                <a:spcPts val="945"/>
-              </a:spcAft>
-            </a:pPr>
-            <a:r>
-              <a:rPr sz="1600" b="0" i="0">
-                <a:solidFill>
-                  <a:srgbClr val="5D5A54"/>
-                </a:solidFill>
-                <a:latin typeface="Source Serif 4"/>
-              </a:rPr>
-              <a:t>Sleep is when your brain strengthens what you studied.</a:t>
+              <a:t>Feels clumsy</a:t>
             </a:r>
           </a:p>
         </p:txBody>
@@ -10210,7 +10547,7 @@
                 </a:solidFill>
                 <a:latin typeface="Inter Tight"/>
               </a:rPr>
-              <a:t>THE EXPERIMENT</a:t>
+              <a:t>TRY IT</a:t>
             </a:r>
           </a:p>
         </p:txBody>
@@ -10256,64 +10593,23 @@
       </p:sp>
       <p:sp>
         <p:nvSpPr>
-          <p:cNvPr id="5" name="TextBox 4"/>
-          <p:cNvSpPr txBox="1"/>
-          <p:nvPr/>
-        </p:nvSpPr>
-        <p:spPr>
-          <a:xfrm>
-            <a:off x="822960" y="1005840"/>
-            <a:ext cx="10515600" cy="914400"/>
-          </a:xfrm>
-          <a:prstGeom prst="rect">
-            <a:avLst/>
-          </a:prstGeom>
-          <a:noFill/>
-        </p:spPr>
-        <p:txBody>
-          <a:bodyPr wrap="square" anchor="t" lIns="0" rIns="0" tIns="0" bIns="0">
-            <a:spAutoFit/>
-          </a:bodyPr>
-          <a:lstStyle/>
-          <a:p>
-            <a:pPr algn="l">
-              <a:spcAft>
-                <a:spcPts val="1530"/>
-              </a:spcAft>
-            </a:pPr>
-            <a:r>
-              <a:rPr sz="3400" b="1" i="0">
-                <a:solidFill>
-                  <a:srgbClr val="1C1B19"/>
-                </a:solidFill>
-                <a:latin typeface="Source Serif 4"/>
-              </a:rPr>
-              <a:t>Reread it, or test yourself?</a:t>
-            </a:r>
-          </a:p>
-        </p:txBody>
-      </p:sp>
-      <p:sp>
-        <p:nvSpPr>
-          <p:cNvPr id="6" name="Rectangle 5"/>
+          <p:cNvPr id="5" name="Rectangle 4"/>
           <p:cNvSpPr/>
           <p:nvPr/>
         </p:nvSpPr>
         <p:spPr>
           <a:xfrm>
-            <a:off x="822960" y="2103120"/>
-            <a:ext cx="5120640" cy="3931920"/>
+            <a:off x="822960" y="1371600"/>
+            <a:ext cx="73152" cy="3566160"/>
           </a:xfrm>
           <a:prstGeom prst="rect">
             <a:avLst/>
           </a:prstGeom>
           <a:solidFill>
-            <a:srgbClr val="FFFFFF"/>
+            <a:srgbClr val="F47B20"/>
           </a:solidFill>
-          <a:ln w="15875">
-            <a:solidFill>
-              <a:srgbClr val="D8D2C6"/>
-            </a:solidFill>
+          <a:ln>
+            <a:noFill/>
           </a:ln>
           <a:effectLst/>
         </p:spPr>
@@ -10341,14 +10637,53 @@
       </p:sp>
       <p:sp>
         <p:nvSpPr>
+          <p:cNvPr id="6" name="TextBox 5"/>
+          <p:cNvSpPr txBox="1"/>
+          <p:nvPr/>
+        </p:nvSpPr>
+        <p:spPr>
+          <a:xfrm>
+            <a:off x="1188720" y="1371600"/>
+            <a:ext cx="10058400" cy="3566160"/>
+          </a:xfrm>
+          <a:prstGeom prst="rect">
+            <a:avLst/>
+          </a:prstGeom>
+          <a:noFill/>
+        </p:spPr>
+        <p:txBody>
+          <a:bodyPr wrap="square" anchor="ctr" lIns="0" rIns="0" tIns="0" bIns="0">
+            <a:spAutoFit/>
+          </a:bodyPr>
+          <a:lstStyle/>
+          <a:p>
+            <a:pPr algn="l">
+              <a:spcAft>
+                <a:spcPts val="1800"/>
+              </a:spcAft>
+            </a:pPr>
+            <a:r>
+              <a:rPr sz="4000" b="0" i="1">
+                <a:solidFill>
+                  <a:srgbClr val="1C1B19"/>
+                </a:solidFill>
+                <a:latin typeface="Source Serif 4"/>
+              </a:rPr>
+              <a:t>Pick a class with a test coming. Write all you remember.</a:t>
+            </a:r>
+          </a:p>
+        </p:txBody>
+      </p:sp>
+      <p:sp>
+        <p:nvSpPr>
           <p:cNvPr id="7" name="TextBox 6"/>
           <p:cNvSpPr txBox="1"/>
           <p:nvPr/>
         </p:nvSpPr>
         <p:spPr>
           <a:xfrm>
-            <a:off x="1097280" y="2286000"/>
-            <a:ext cx="4572000" cy="457200"/>
+            <a:off x="1188720" y="5120640"/>
+            <a:ext cx="10058400" cy="914400"/>
           </a:xfrm>
           <a:prstGeom prst="rect">
             <a:avLst/>
@@ -10363,276 +10698,17 @@
           <a:p>
             <a:pPr algn="l">
               <a:spcAft>
-                <a:spcPts val="585"/>
-              </a:spcAft>
-            </a:pPr>
-            <a:r>
-              <a:rPr sz="1300" b="1" i="0">
-                <a:solidFill>
-                  <a:srgbClr val="0B2D5B"/>
+                <a:spcPts val="810"/>
+              </a:spcAft>
+            </a:pPr>
+            <a:r>
+              <a:rPr sz="1800" b="0" i="0">
+                <a:solidFill>
+                  <a:srgbClr val="5D5A54"/>
                 </a:solidFill>
                 <a:latin typeface="Inter Tight"/>
               </a:rPr>
-              <a:t>GROUP A: REREAD</a:t>
-            </a:r>
-          </a:p>
-        </p:txBody>
-      </p:sp>
-      <p:sp>
-        <p:nvSpPr>
-          <p:cNvPr id="8" name="TextBox 7"/>
-          <p:cNvSpPr txBox="1"/>
-          <p:nvPr/>
-        </p:nvSpPr>
-        <p:spPr>
-          <a:xfrm>
-            <a:off x="1097280" y="2788920"/>
-            <a:ext cx="4572000" cy="3108960"/>
-          </a:xfrm>
-          <a:prstGeom prst="rect">
-            <a:avLst/>
-          </a:prstGeom>
-          <a:noFill/>
-        </p:spPr>
-        <p:txBody>
-          <a:bodyPr wrap="square" anchor="t" lIns="0" rIns="0" tIns="0" bIns="0">
-            <a:spAutoFit/>
-          </a:bodyPr>
-          <a:lstStyle/>
-          <a:p>
-            <a:pPr algn="l">
-              <a:spcAft>
-                <a:spcPts val="855"/>
-              </a:spcAft>
-            </a:pPr>
-            <a:r>
-              <a:rPr sz="1900" b="0" i="0">
-                <a:solidFill>
-                  <a:srgbClr val="1C1B19"/>
-                </a:solidFill>
-                <a:latin typeface="Source Serif 4"/>
-              </a:rPr>
-              <a:t>Read the passage</a:t>
-            </a:r>
-          </a:p>
-          <a:p>
-            <a:pPr algn="l">
-              <a:spcAft>
-                <a:spcPts val="855"/>
-              </a:spcAft>
-            </a:pPr>
-            <a:r>
-              <a:rPr sz="1900" b="0" i="0">
-                <a:solidFill>
-                  <a:srgbClr val="1C1B19"/>
-                </a:solidFill>
-                <a:latin typeface="Source Serif 4"/>
-              </a:rPr>
-              <a:t>Read it again</a:t>
-            </a:r>
-          </a:p>
-          <a:p>
-            <a:pPr algn="l">
-              <a:spcAft>
-                <a:spcPts val="855"/>
-              </a:spcAft>
-            </a:pPr>
-            <a:r>
-              <a:rPr sz="1900" b="0" i="0">
-                <a:solidFill>
-                  <a:srgbClr val="1C1B19"/>
-                </a:solidFill>
-                <a:latin typeface="Source Serif 4"/>
-              </a:rPr>
-              <a:t>Felt the most ready</a:t>
-            </a:r>
-          </a:p>
-          <a:p>
-            <a:pPr algn="l">
-              <a:spcAft>
-                <a:spcPts val="855"/>
-              </a:spcAft>
-            </a:pPr>
-            <a:r>
-              <a:rPr sz="1900" b="0" i="0">
-                <a:solidFill>
-                  <a:srgbClr val="1C1B19"/>
-                </a:solidFill>
-                <a:latin typeface="Source Serif 4"/>
-              </a:rPr>
-              <a:t>Won the five-minute test</a:t>
-            </a:r>
-          </a:p>
-        </p:txBody>
-      </p:sp>
-      <p:sp>
-        <p:nvSpPr>
-          <p:cNvPr id="9" name="Rectangle 8"/>
-          <p:cNvSpPr/>
-          <p:nvPr/>
-        </p:nvSpPr>
-        <p:spPr>
-          <a:xfrm>
-            <a:off x="6309360" y="2103120"/>
-            <a:ext cx="5120640" cy="3931920"/>
-          </a:xfrm>
-          <a:prstGeom prst="rect">
-            <a:avLst/>
-          </a:prstGeom>
-          <a:solidFill>
-            <a:srgbClr val="FFFFFF"/>
-          </a:solidFill>
-          <a:ln w="15875">
-            <a:solidFill>
-              <a:srgbClr val="D8D2C6"/>
-            </a:solidFill>
-          </a:ln>
-          <a:effectLst/>
-        </p:spPr>
-        <p:style>
-          <a:lnRef idx="1">
-            <a:schemeClr val="accent1"/>
-          </a:lnRef>
-          <a:fillRef idx="3">
-            <a:schemeClr val="accent1"/>
-          </a:fillRef>
-          <a:effectRef idx="2">
-            <a:schemeClr val="accent1"/>
-          </a:effectRef>
-          <a:fontRef idx="minor">
-            <a:schemeClr val="lt1"/>
-          </a:fontRef>
-        </p:style>
-        <p:txBody>
-          <a:bodyPr rtlCol="0" anchor="ctr"/>
-          <a:lstStyle/>
-          <a:p>
-            <a:pPr algn="ctr"/>
-          </a:p>
-        </p:txBody>
-      </p:sp>
-      <p:sp>
-        <p:nvSpPr>
-          <p:cNvPr id="10" name="TextBox 9"/>
-          <p:cNvSpPr txBox="1"/>
-          <p:nvPr/>
-        </p:nvSpPr>
-        <p:spPr>
-          <a:xfrm>
-            <a:off x="6583680" y="2286000"/>
-            <a:ext cx="4572000" cy="457200"/>
-          </a:xfrm>
-          <a:prstGeom prst="rect">
-            <a:avLst/>
-          </a:prstGeom>
-          <a:noFill/>
-        </p:spPr>
-        <p:txBody>
-          <a:bodyPr wrap="square" anchor="t" lIns="0" rIns="0" tIns="0" bIns="0">
-            <a:spAutoFit/>
-          </a:bodyPr>
-          <a:lstStyle/>
-          <a:p>
-            <a:pPr algn="l">
-              <a:spcAft>
-                <a:spcPts val="585"/>
-              </a:spcAft>
-            </a:pPr>
-            <a:r>
-              <a:rPr sz="1300" b="1" i="0">
-                <a:solidFill>
-                  <a:srgbClr val="0B2D5B"/>
-                </a:solidFill>
-                <a:latin typeface="Inter Tight"/>
-              </a:rPr>
-              <a:t>GROUP B: READ ONCE, THEN RECALL</a:t>
-            </a:r>
-          </a:p>
-        </p:txBody>
-      </p:sp>
-      <p:sp>
-        <p:nvSpPr>
-          <p:cNvPr id="11" name="TextBox 10"/>
-          <p:cNvSpPr txBox="1"/>
-          <p:nvPr/>
-        </p:nvSpPr>
-        <p:spPr>
-          <a:xfrm>
-            <a:off x="6583680" y="2788920"/>
-            <a:ext cx="4572000" cy="3108960"/>
-          </a:xfrm>
-          <a:prstGeom prst="rect">
-            <a:avLst/>
-          </a:prstGeom>
-          <a:noFill/>
-        </p:spPr>
-        <p:txBody>
-          <a:bodyPr wrap="square" anchor="t" lIns="0" rIns="0" tIns="0" bIns="0">
-            <a:spAutoFit/>
-          </a:bodyPr>
-          <a:lstStyle/>
-          <a:p>
-            <a:pPr algn="l">
-              <a:spcAft>
-                <a:spcPts val="855"/>
-              </a:spcAft>
-            </a:pPr>
-            <a:r>
-              <a:rPr sz="1900" b="0" i="0">
-                <a:solidFill>
-                  <a:srgbClr val="1C1B19"/>
-                </a:solidFill>
-                <a:latin typeface="Source Serif 4"/>
-              </a:rPr>
-              <a:t>Read the passage once</a:t>
-            </a:r>
-          </a:p>
-          <a:p>
-            <a:pPr algn="l">
-              <a:spcAft>
-                <a:spcPts val="855"/>
-              </a:spcAft>
-            </a:pPr>
-            <a:r>
-              <a:rPr sz="1900" b="0" i="0">
-                <a:solidFill>
-                  <a:srgbClr val="1C1B19"/>
-                </a:solidFill>
-                <a:latin typeface="Source Serif 4"/>
-              </a:rPr>
-              <a:t>Wrote all they could remember</a:t>
-            </a:r>
-          </a:p>
-          <a:p>
-            <a:pPr algn="l">
-              <a:spcAft>
-                <a:spcPts val="855"/>
-              </a:spcAft>
-            </a:pPr>
-            <a:r>
-              <a:rPr sz="1900" b="0" i="0">
-                <a:solidFill>
-                  <a:srgbClr val="1C1B19"/>
-                </a:solidFill>
-                <a:latin typeface="Source Serif 4"/>
-              </a:rPr>
-              <a:t>No notes, no feedback</a:t>
-            </a:r>
-          </a:p>
-          <a:p>
-            <a:pPr algn="l">
-              <a:spcAft>
-                <a:spcPts val="855"/>
-              </a:spcAft>
-            </a:pPr>
-            <a:r>
-              <a:rPr sz="1900" b="0" i="0">
-                <a:solidFill>
-                  <a:srgbClr val="1C1B19"/>
-                </a:solidFill>
-                <a:latin typeface="Source Serif 4"/>
-              </a:rPr>
-              <a:t>Won at two days and one week</a:t>
+              <a:t>No notes for five minutes. Then open your notes and mark what you missed in another color.</a:t>
             </a:r>
           </a:p>
         </p:txBody>
@@ -10741,7 +10817,7 @@
                 </a:solidFill>
                 <a:latin typeface="Inter Tight"/>
               </a:rPr>
-              <a:t>WHY IT FOOLS YOU</a:t>
+              <a:t>THREE STUDY PLANS</a:t>
             </a:r>
           </a:p>
         </p:txBody>
@@ -10793,47 +10869,8 @@
         </p:nvSpPr>
         <p:spPr>
           <a:xfrm>
-            <a:off x="822960" y="1463040"/>
-            <a:ext cx="10515600" cy="3291840"/>
-          </a:xfrm>
-          <a:prstGeom prst="rect">
-            <a:avLst/>
-          </a:prstGeom>
-          <a:noFill/>
-        </p:spPr>
-        <p:txBody>
-          <a:bodyPr wrap="square" anchor="ctr" lIns="0" rIns="0" tIns="0" bIns="0">
-            <a:spAutoFit/>
-          </a:bodyPr>
-          <a:lstStyle/>
-          <a:p>
-            <a:pPr algn="l">
-              <a:spcAft>
-                <a:spcPts val="2070"/>
-              </a:spcAft>
-            </a:pPr>
-            <a:r>
-              <a:rPr sz="4600" b="1" i="0">
-                <a:solidFill>
-                  <a:srgbClr val="1C1B19"/>
-                </a:solidFill>
-                <a:latin typeface="Source Serif 4"/>
-              </a:rPr>
-              <a:t>Familiar feels like knowing.</a:t>
-            </a:r>
-          </a:p>
-        </p:txBody>
-      </p:sp>
-      <p:sp>
-        <p:nvSpPr>
-          <p:cNvPr id="6" name="TextBox 5"/>
-          <p:cNvSpPr txBox="1"/>
-          <p:nvPr/>
-        </p:nvSpPr>
-        <p:spPr>
-          <a:xfrm>
-            <a:off x="822960" y="4846320"/>
-            <a:ext cx="10515600" cy="1097280"/>
+            <a:off x="822960" y="1005840"/>
+            <a:ext cx="10515600" cy="914400"/>
           </a:xfrm>
           <a:prstGeom prst="rect">
             <a:avLst/>
@@ -10848,17 +10885,389 @@
           <a:p>
             <a:pPr algn="l">
               <a:spcAft>
-                <a:spcPts val="990"/>
-              </a:spcAft>
-            </a:pPr>
-            <a:r>
-              <a:rPr sz="2200" b="0" i="1">
-                <a:solidFill>
-                  <a:srgbClr val="5D5A54"/>
-                </a:solidFill>
-                <a:latin typeface="Source Serif 4"/>
-              </a:rPr>
-              <a:t>Rereading makes the page look familiar. The test asks you to pull it out of your own head.</a:t>
+                <a:spcPts val="1530"/>
+              </a:spcAft>
+            </a:pPr>
+            <a:r>
+              <a:rPr sz="3400" b="1" i="0">
+                <a:solidFill>
+                  <a:srgbClr val="1C1B19"/>
+                </a:solidFill>
+                <a:latin typeface="Source Serif 4"/>
+              </a:rPr>
+              <a:t>Which plan would you change, and how?</a:t>
+            </a:r>
+          </a:p>
+        </p:txBody>
+      </p:sp>
+      <p:sp>
+        <p:nvSpPr>
+          <p:cNvPr id="6" name="Rectangle 5"/>
+          <p:cNvSpPr/>
+          <p:nvPr/>
+        </p:nvSpPr>
+        <p:spPr>
+          <a:xfrm>
+            <a:off x="822960" y="2103120"/>
+            <a:ext cx="3322320" cy="3840480"/>
+          </a:xfrm>
+          <a:prstGeom prst="rect">
+            <a:avLst/>
+          </a:prstGeom>
+          <a:solidFill>
+            <a:srgbClr val="FFFFFF"/>
+          </a:solidFill>
+          <a:ln w="15875">
+            <a:solidFill>
+              <a:srgbClr val="D8D2C6"/>
+            </a:solidFill>
+          </a:ln>
+          <a:effectLst/>
+        </p:spPr>
+        <p:style>
+          <a:lnRef idx="1">
+            <a:schemeClr val="accent1"/>
+          </a:lnRef>
+          <a:fillRef idx="3">
+            <a:schemeClr val="accent1"/>
+          </a:fillRef>
+          <a:effectRef idx="2">
+            <a:schemeClr val="accent1"/>
+          </a:effectRef>
+          <a:fontRef idx="minor">
+            <a:schemeClr val="lt1"/>
+          </a:fontRef>
+        </p:style>
+        <p:txBody>
+          <a:bodyPr rtlCol="0" anchor="ctr"/>
+          <a:lstStyle/>
+          <a:p>
+            <a:pPr algn="ctr"/>
+          </a:p>
+        </p:txBody>
+      </p:sp>
+      <p:sp>
+        <p:nvSpPr>
+          <p:cNvPr id="7" name="TextBox 6"/>
+          <p:cNvSpPr txBox="1"/>
+          <p:nvPr/>
+        </p:nvSpPr>
+        <p:spPr>
+          <a:xfrm>
+            <a:off x="1051560" y="2286000"/>
+            <a:ext cx="2865120" cy="365760"/>
+          </a:xfrm>
+          <a:prstGeom prst="rect">
+            <a:avLst/>
+          </a:prstGeom>
+          <a:noFill/>
+        </p:spPr>
+        <p:txBody>
+          <a:bodyPr wrap="square" anchor="t" lIns="0" rIns="0" tIns="0" bIns="0">
+            <a:spAutoFit/>
+          </a:bodyPr>
+          <a:lstStyle/>
+          <a:p>
+            <a:pPr algn="l">
+              <a:spcAft>
+                <a:spcPts val="585"/>
+              </a:spcAft>
+            </a:pPr>
+            <a:r>
+              <a:rPr sz="1300" b="1" i="0">
+                <a:solidFill>
+                  <a:srgbClr val="0B2D5B"/>
+                </a:solidFill>
+                <a:latin typeface="Inter Tight"/>
+              </a:rPr>
+              <a:t>KENJI</a:t>
+            </a:r>
+          </a:p>
+        </p:txBody>
+      </p:sp>
+      <p:sp>
+        <p:nvSpPr>
+          <p:cNvPr id="8" name="TextBox 7"/>
+          <p:cNvSpPr txBox="1"/>
+          <p:nvPr/>
+        </p:nvSpPr>
+        <p:spPr>
+          <a:xfrm>
+            <a:off x="1051560" y="2743200"/>
+            <a:ext cx="2865120" cy="3017520"/>
+          </a:xfrm>
+          <a:prstGeom prst="rect">
+            <a:avLst/>
+          </a:prstGeom>
+          <a:noFill/>
+        </p:spPr>
+        <p:txBody>
+          <a:bodyPr wrap="square" anchor="t" lIns="0" rIns="0" tIns="0" bIns="0">
+            <a:spAutoFit/>
+          </a:bodyPr>
+          <a:lstStyle/>
+          <a:p>
+            <a:pPr algn="l">
+              <a:spcAft>
+                <a:spcPts val="810"/>
+              </a:spcAft>
+            </a:pPr>
+            <a:r>
+              <a:rPr sz="1800" b="0" i="0">
+                <a:solidFill>
+                  <a:srgbClr val="1C1B19"/>
+                </a:solidFill>
+                <a:latin typeface="Source Serif 4"/>
+              </a:rPr>
+              <a:t>Biology test in ten days. Soccer most nights. His plan: make a color-coded study guide this weekend, then reread it every night.</a:t>
+            </a:r>
+          </a:p>
+        </p:txBody>
+      </p:sp>
+      <p:sp>
+        <p:nvSpPr>
+          <p:cNvPr id="9" name="Rectangle 8"/>
+          <p:cNvSpPr/>
+          <p:nvPr/>
+        </p:nvSpPr>
+        <p:spPr>
+          <a:xfrm>
+            <a:off x="4419600" y="2103120"/>
+            <a:ext cx="3322320" cy="3840480"/>
+          </a:xfrm>
+          <a:prstGeom prst="rect">
+            <a:avLst/>
+          </a:prstGeom>
+          <a:solidFill>
+            <a:srgbClr val="FFFFFF"/>
+          </a:solidFill>
+          <a:ln w="15875">
+            <a:solidFill>
+              <a:srgbClr val="D8D2C6"/>
+            </a:solidFill>
+          </a:ln>
+          <a:effectLst/>
+        </p:spPr>
+        <p:style>
+          <a:lnRef idx="1">
+            <a:schemeClr val="accent1"/>
+          </a:lnRef>
+          <a:fillRef idx="3">
+            <a:schemeClr val="accent1"/>
+          </a:fillRef>
+          <a:effectRef idx="2">
+            <a:schemeClr val="accent1"/>
+          </a:effectRef>
+          <a:fontRef idx="minor">
+            <a:schemeClr val="lt1"/>
+          </a:fontRef>
+        </p:style>
+        <p:txBody>
+          <a:bodyPr rtlCol="0" anchor="ctr"/>
+          <a:lstStyle/>
+          <a:p>
+            <a:pPr algn="ctr"/>
+          </a:p>
+        </p:txBody>
+      </p:sp>
+      <p:sp>
+        <p:nvSpPr>
+          <p:cNvPr id="10" name="TextBox 9"/>
+          <p:cNvSpPr txBox="1"/>
+          <p:nvPr/>
+        </p:nvSpPr>
+        <p:spPr>
+          <a:xfrm>
+            <a:off x="4648200" y="2286000"/>
+            <a:ext cx="2865120" cy="365760"/>
+          </a:xfrm>
+          <a:prstGeom prst="rect">
+            <a:avLst/>
+          </a:prstGeom>
+          <a:noFill/>
+        </p:spPr>
+        <p:txBody>
+          <a:bodyPr wrap="square" anchor="t" lIns="0" rIns="0" tIns="0" bIns="0">
+            <a:spAutoFit/>
+          </a:bodyPr>
+          <a:lstStyle/>
+          <a:p>
+            <a:pPr algn="l">
+              <a:spcAft>
+                <a:spcPts val="585"/>
+              </a:spcAft>
+            </a:pPr>
+            <a:r>
+              <a:rPr sz="1300" b="1" i="0">
+                <a:solidFill>
+                  <a:srgbClr val="0B2D5B"/>
+                </a:solidFill>
+                <a:latin typeface="Inter Tight"/>
+              </a:rPr>
+              <a:t>ROSA</a:t>
+            </a:r>
+          </a:p>
+        </p:txBody>
+      </p:sp>
+      <p:sp>
+        <p:nvSpPr>
+          <p:cNvPr id="11" name="TextBox 10"/>
+          <p:cNvSpPr txBox="1"/>
+          <p:nvPr/>
+        </p:nvSpPr>
+        <p:spPr>
+          <a:xfrm>
+            <a:off x="4648200" y="2743200"/>
+            <a:ext cx="2865120" cy="3017520"/>
+          </a:xfrm>
+          <a:prstGeom prst="rect">
+            <a:avLst/>
+          </a:prstGeom>
+          <a:noFill/>
+        </p:spPr>
+        <p:txBody>
+          <a:bodyPr wrap="square" anchor="t" lIns="0" rIns="0" tIns="0" bIns="0">
+            <a:spAutoFit/>
+          </a:bodyPr>
+          <a:lstStyle/>
+          <a:p>
+            <a:pPr algn="l">
+              <a:spcAft>
+                <a:spcPts val="810"/>
+              </a:spcAft>
+            </a:pPr>
+            <a:r>
+              <a:rPr sz="1800" b="0" i="0">
+                <a:solidFill>
+                  <a:srgbClr val="1C1B19"/>
+                </a:solidFill>
+                <a:latin typeface="Source Serif 4"/>
+              </a:rPr>
+              <a:t>Math final covers six units. She watches her little brothers until her grandmother gets home. Plan: one unit a night, in order, all problems of a type together.</a:t>
+            </a:r>
+          </a:p>
+        </p:txBody>
+      </p:sp>
+      <p:sp>
+        <p:nvSpPr>
+          <p:cNvPr id="12" name="Rectangle 11"/>
+          <p:cNvSpPr/>
+          <p:nvPr/>
+        </p:nvSpPr>
+        <p:spPr>
+          <a:xfrm>
+            <a:off x="8016239" y="2103120"/>
+            <a:ext cx="3322320" cy="3840480"/>
+          </a:xfrm>
+          <a:prstGeom prst="rect">
+            <a:avLst/>
+          </a:prstGeom>
+          <a:solidFill>
+            <a:srgbClr val="FFFFFF"/>
+          </a:solidFill>
+          <a:ln w="15875">
+            <a:solidFill>
+              <a:srgbClr val="D8D2C6"/>
+            </a:solidFill>
+          </a:ln>
+          <a:effectLst/>
+        </p:spPr>
+        <p:style>
+          <a:lnRef idx="1">
+            <a:schemeClr val="accent1"/>
+          </a:lnRef>
+          <a:fillRef idx="3">
+            <a:schemeClr val="accent1"/>
+          </a:fillRef>
+          <a:effectRef idx="2">
+            <a:schemeClr val="accent1"/>
+          </a:effectRef>
+          <a:fontRef idx="minor">
+            <a:schemeClr val="lt1"/>
+          </a:fontRef>
+        </p:style>
+        <p:txBody>
+          <a:bodyPr rtlCol="0" anchor="ctr"/>
+          <a:lstStyle/>
+          <a:p>
+            <a:pPr algn="ctr"/>
+          </a:p>
+        </p:txBody>
+      </p:sp>
+      <p:sp>
+        <p:nvSpPr>
+          <p:cNvPr id="13" name="TextBox 12"/>
+          <p:cNvSpPr txBox="1"/>
+          <p:nvPr/>
+        </p:nvSpPr>
+        <p:spPr>
+          <a:xfrm>
+            <a:off x="8244839" y="2286000"/>
+            <a:ext cx="2865120" cy="365760"/>
+          </a:xfrm>
+          <a:prstGeom prst="rect">
+            <a:avLst/>
+          </a:prstGeom>
+          <a:noFill/>
+        </p:spPr>
+        <p:txBody>
+          <a:bodyPr wrap="square" anchor="t" lIns="0" rIns="0" tIns="0" bIns="0">
+            <a:spAutoFit/>
+          </a:bodyPr>
+          <a:lstStyle/>
+          <a:p>
+            <a:pPr algn="l">
+              <a:spcAft>
+                <a:spcPts val="585"/>
+              </a:spcAft>
+            </a:pPr>
+            <a:r>
+              <a:rPr sz="1300" b="1" i="0">
+                <a:solidFill>
+                  <a:srgbClr val="0B2D5B"/>
+                </a:solidFill>
+                <a:latin typeface="Inter Tight"/>
+              </a:rPr>
+              <a:t>MALIK</a:t>
+            </a:r>
+          </a:p>
+        </p:txBody>
+      </p:sp>
+      <p:sp>
+        <p:nvSpPr>
+          <p:cNvPr id="14" name="TextBox 13"/>
+          <p:cNvSpPr txBox="1"/>
+          <p:nvPr/>
+        </p:nvSpPr>
+        <p:spPr>
+          <a:xfrm>
+            <a:off x="8244839" y="2743200"/>
+            <a:ext cx="2865120" cy="3017520"/>
+          </a:xfrm>
+          <a:prstGeom prst="rect">
+            <a:avLst/>
+          </a:prstGeom>
+          <a:noFill/>
+        </p:spPr>
+        <p:txBody>
+          <a:bodyPr wrap="square" anchor="t" lIns="0" rIns="0" tIns="0" bIns="0">
+            <a:spAutoFit/>
+          </a:bodyPr>
+          <a:lstStyle/>
+          <a:p>
+            <a:pPr algn="l">
+              <a:spcAft>
+                <a:spcPts val="810"/>
+              </a:spcAft>
+            </a:pPr>
+            <a:r>
+              <a:rPr sz="1800" b="0" i="0">
+                <a:solidFill>
+                  <a:srgbClr val="1C1B19"/>
+                </a:solidFill>
+                <a:latin typeface="Source Serif 4"/>
+              </a:rPr>
+              <a:t>His study group meets on a video call the night before the history test. Last time they read their notes out loud for two hours.</a:t>
             </a:r>
           </a:p>
         </p:txBody>

--- a/decks/study-smarter-not-longer-lesson-v2.pptx
+++ b/decks/study-smarter-not-longer-lesson-v2.pptx
@@ -7917,6 +7917,45 @@
                 <a:latin typeface="Inter Tight"/>
               </a:rPr>
               <a:t>Beaver Upper School · Counseling</a:t>
+            </a:r>
+          </a:p>
+        </p:txBody>
+      </p:sp>
+      <p:sp>
+        <p:nvSpPr>
+          <p:cNvPr id="8" name="TextBox 7"/>
+          <p:cNvSpPr txBox="1"/>
+          <p:nvPr/>
+        </p:nvSpPr>
+        <p:spPr>
+          <a:xfrm>
+            <a:off x="6766560" y="5897880"/>
+            <a:ext cx="4846320" cy="640080"/>
+          </a:xfrm>
+          <a:prstGeom prst="rect">
+            <a:avLst/>
+          </a:prstGeom>
+          <a:noFill/>
+        </p:spPr>
+        <p:txBody>
+          <a:bodyPr wrap="square" anchor="t" lIns="0" rIns="0" tIns="0" bIns="0">
+            <a:spAutoFit/>
+          </a:bodyPr>
+          <a:lstStyle/>
+          <a:p>
+            <a:pPr algn="r">
+              <a:spcAft>
+                <a:spcPts val="495"/>
+              </a:spcAft>
+            </a:pPr>
+            <a:r>
+              <a:rPr sz="1100" b="0" i="0">
+                <a:solidFill>
+                  <a:srgbClr val="E8E4DA"/>
+                </a:solidFill>
+                <a:latin typeface="Inter Tight"/>
+              </a:rPr>
+              <a:t>Written by Dr. Rick Wilson, with AI-assisted drafting. Every lesson is reviewed and edited by Dr. Wilson.</a:t>
             </a:r>
           </a:p>
         </p:txBody>
